--- a/Old Rugged Cross.pptx
+++ b/Old Rugged Cross.pptx
@@ -2,30 +2,27 @@
 <file path=ppt/presentation.xml><?xml version="1.0" encoding="utf-8"?>
 <p:presentation xmlns:a="http://schemas.openxmlformats.org/drawingml/2006/main" xmlns:r="http://schemas.openxmlformats.org/officeDocument/2006/relationships" xmlns:p="http://schemas.openxmlformats.org/presentationml/2006/main" saveSubsetFonts="1" autoCompressPictures="0">
   <p:sldMasterIdLst>
-    <p:sldMasterId id="2147483648" r:id="rId1"/>
+    <p:sldMasterId id="2147483660" r:id="rId1"/>
   </p:sldMasterIdLst>
   <p:sldIdLst>
-    <p:sldId id="256" r:id="rId2"/>
-    <p:sldId id="284" r:id="rId3"/>
+    <p:sldId id="284" r:id="rId2"/>
+    <p:sldId id="294" r:id="rId3"/>
     <p:sldId id="277" r:id="rId4"/>
     <p:sldId id="276" r:id="rId5"/>
-    <p:sldId id="285" r:id="rId6"/>
-    <p:sldId id="286" r:id="rId7"/>
-    <p:sldId id="287" r:id="rId8"/>
-    <p:sldId id="288" r:id="rId9"/>
-    <p:sldId id="289" r:id="rId10"/>
-    <p:sldId id="290" r:id="rId11"/>
-    <p:sldId id="291" r:id="rId12"/>
-    <p:sldId id="292" r:id="rId13"/>
-    <p:sldId id="293" r:id="rId14"/>
+    <p:sldId id="286" r:id="rId6"/>
+    <p:sldId id="287" r:id="rId7"/>
+    <p:sldId id="295" r:id="rId8"/>
+    <p:sldId id="290" r:id="rId9"/>
+    <p:sldId id="291" r:id="rId10"/>
+    <p:sldId id="296" r:id="rId11"/>
   </p:sldIdLst>
-  <p:sldSz cx="12192000" cy="6858000"/>
+  <p:sldSz cx="9144000" cy="6858000" type="screen4x3"/>
   <p:notesSz cx="6858000" cy="9144000"/>
   <p:defaultTextStyle>
     <a:defPPr>
       <a:defRPr lang="en-US"/>
     </a:defPPr>
-    <a:lvl1pPr marL="0" algn="l" defTabSz="914400" rtl="0" eaLnBrk="1" latinLnBrk="0" hangingPunct="1">
+    <a:lvl1pPr marL="0" algn="l" defTabSz="457200" rtl="0" eaLnBrk="1" latinLnBrk="0" hangingPunct="1">
       <a:defRPr sz="1800" kern="1200">
         <a:solidFill>
           <a:schemeClr val="tx1"/>
@@ -35,7 +32,7 @@
         <a:cs typeface="+mn-cs"/>
       </a:defRPr>
     </a:lvl1pPr>
-    <a:lvl2pPr marL="457200" algn="l" defTabSz="914400" rtl="0" eaLnBrk="1" latinLnBrk="0" hangingPunct="1">
+    <a:lvl2pPr marL="457200" algn="l" defTabSz="457200" rtl="0" eaLnBrk="1" latinLnBrk="0" hangingPunct="1">
       <a:defRPr sz="1800" kern="1200">
         <a:solidFill>
           <a:schemeClr val="tx1"/>
@@ -45,7 +42,7 @@
         <a:cs typeface="+mn-cs"/>
       </a:defRPr>
     </a:lvl2pPr>
-    <a:lvl3pPr marL="914400" algn="l" defTabSz="914400" rtl="0" eaLnBrk="1" latinLnBrk="0" hangingPunct="1">
+    <a:lvl3pPr marL="914400" algn="l" defTabSz="457200" rtl="0" eaLnBrk="1" latinLnBrk="0" hangingPunct="1">
       <a:defRPr sz="1800" kern="1200">
         <a:solidFill>
           <a:schemeClr val="tx1"/>
@@ -55,7 +52,7 @@
         <a:cs typeface="+mn-cs"/>
       </a:defRPr>
     </a:lvl3pPr>
-    <a:lvl4pPr marL="1371600" algn="l" defTabSz="914400" rtl="0" eaLnBrk="1" latinLnBrk="0" hangingPunct="1">
+    <a:lvl4pPr marL="1371600" algn="l" defTabSz="457200" rtl="0" eaLnBrk="1" latinLnBrk="0" hangingPunct="1">
       <a:defRPr sz="1800" kern="1200">
         <a:solidFill>
           <a:schemeClr val="tx1"/>
@@ -65,7 +62,7 @@
         <a:cs typeface="+mn-cs"/>
       </a:defRPr>
     </a:lvl4pPr>
-    <a:lvl5pPr marL="1828800" algn="l" defTabSz="914400" rtl="0" eaLnBrk="1" latinLnBrk="0" hangingPunct="1">
+    <a:lvl5pPr marL="1828800" algn="l" defTabSz="457200" rtl="0" eaLnBrk="1" latinLnBrk="0" hangingPunct="1">
       <a:defRPr sz="1800" kern="1200">
         <a:solidFill>
           <a:schemeClr val="tx1"/>
@@ -75,7 +72,7 @@
         <a:cs typeface="+mn-cs"/>
       </a:defRPr>
     </a:lvl5pPr>
-    <a:lvl6pPr marL="2286000" algn="l" defTabSz="914400" rtl="0" eaLnBrk="1" latinLnBrk="0" hangingPunct="1">
+    <a:lvl6pPr marL="2286000" algn="l" defTabSz="457200" rtl="0" eaLnBrk="1" latinLnBrk="0" hangingPunct="1">
       <a:defRPr sz="1800" kern="1200">
         <a:solidFill>
           <a:schemeClr val="tx1"/>
@@ -85,7 +82,7 @@
         <a:cs typeface="+mn-cs"/>
       </a:defRPr>
     </a:lvl6pPr>
-    <a:lvl7pPr marL="2743200" algn="l" defTabSz="914400" rtl="0" eaLnBrk="1" latinLnBrk="0" hangingPunct="1">
+    <a:lvl7pPr marL="2743200" algn="l" defTabSz="457200" rtl="0" eaLnBrk="1" latinLnBrk="0" hangingPunct="1">
       <a:defRPr sz="1800" kern="1200">
         <a:solidFill>
           <a:schemeClr val="tx1"/>
@@ -95,7 +92,7 @@
         <a:cs typeface="+mn-cs"/>
       </a:defRPr>
     </a:lvl7pPr>
-    <a:lvl8pPr marL="3200400" algn="l" defTabSz="914400" rtl="0" eaLnBrk="1" latinLnBrk="0" hangingPunct="1">
+    <a:lvl8pPr marL="3200400" algn="l" defTabSz="457200" rtl="0" eaLnBrk="1" latinLnBrk="0" hangingPunct="1">
       <a:defRPr sz="1800" kern="1200">
         <a:solidFill>
           <a:schemeClr val="tx1"/>
@@ -105,7 +102,7 @@
         <a:cs typeface="+mn-cs"/>
       </a:defRPr>
     </a:lvl8pPr>
-    <a:lvl9pPr marL="3657600" algn="l" defTabSz="914400" rtl="0" eaLnBrk="1" latinLnBrk="0" hangingPunct="1">
+    <a:lvl9pPr marL="3657600" algn="l" defTabSz="457200" rtl="0" eaLnBrk="1" latinLnBrk="0" hangingPunct="1">
       <a:defRPr sz="1800" kern="1200">
         <a:solidFill>
           <a:schemeClr val="tx1"/>
@@ -143,13 +140,7 @@
       </p:grpSpPr>
       <p:sp>
         <p:nvSpPr>
-          <p:cNvPr id="2" name="Title 1">
-            <a:extLst>
-              <a:ext uri="{FF2B5EF4-FFF2-40B4-BE49-F238E27FC236}">
-                <a16:creationId xmlns:a16="http://schemas.microsoft.com/office/drawing/2014/main" id="{50FC4881-024B-CA4F-1A53-33C2DC0E7490}"/>
-              </a:ext>
-            </a:extLst>
-          </p:cNvPr>
+          <p:cNvPr id="2" name="Title 1"/>
           <p:cNvSpPr>
             <a:spLocks noGrp="1"/>
           </p:cNvSpPr>
@@ -159,8 +150,8 @@
         </p:nvSpPr>
         <p:spPr>
           <a:xfrm>
-            <a:off x="1524000" y="1122363"/>
-            <a:ext cx="9144000" cy="2387600"/>
+            <a:off x="685800" y="1122363"/>
+            <a:ext cx="7772400" cy="2387600"/>
           </a:xfrm>
         </p:spPr>
         <p:txBody>
@@ -175,18 +166,13 @@
               <a:rPr lang="en-US"/>
               <a:t>Click to edit Master title style</a:t>
             </a:r>
-          </a:p>
-        </p:txBody>
-      </p:sp>
-      <p:sp>
-        <p:nvSpPr>
-          <p:cNvPr id="3" name="Subtitle 2">
-            <a:extLst>
-              <a:ext uri="{FF2B5EF4-FFF2-40B4-BE49-F238E27FC236}">
-                <a16:creationId xmlns:a16="http://schemas.microsoft.com/office/drawing/2014/main" id="{8B0D2959-CEED-C8E4-130C-7C436E2473A7}"/>
-              </a:ext>
-            </a:extLst>
-          </p:cNvPr>
+            <a:endParaRPr lang="en-US" dirty="0"/>
+          </a:p>
+        </p:txBody>
+      </p:sp>
+      <p:sp>
+        <p:nvSpPr>
+          <p:cNvPr id="3" name="Subtitle 2"/>
           <p:cNvSpPr>
             <a:spLocks noGrp="1"/>
           </p:cNvSpPr>
@@ -196,8 +182,8 @@
         </p:nvSpPr>
         <p:spPr>
           <a:xfrm>
-            <a:off x="1524000" y="3602038"/>
-            <a:ext cx="9144000" cy="1655762"/>
+            <a:off x="1143000" y="3602038"/>
+            <a:ext cx="6858000" cy="1655762"/>
           </a:xfrm>
         </p:spPr>
         <p:txBody>
@@ -245,18 +231,13 @@
               <a:rPr lang="en-US"/>
               <a:t>Click to edit Master subtitle style</a:t>
             </a:r>
-          </a:p>
-        </p:txBody>
-      </p:sp>
-      <p:sp>
-        <p:nvSpPr>
-          <p:cNvPr id="4" name="Date Placeholder 3">
-            <a:extLst>
-              <a:ext uri="{FF2B5EF4-FFF2-40B4-BE49-F238E27FC236}">
-                <a16:creationId xmlns:a16="http://schemas.microsoft.com/office/drawing/2014/main" id="{4ABBB692-36FC-D0C6-12D7-33A0E66EA065}"/>
-              </a:ext>
-            </a:extLst>
-          </p:cNvPr>
+            <a:endParaRPr lang="en-US" dirty="0"/>
+          </a:p>
+        </p:txBody>
+      </p:sp>
+      <p:sp>
+        <p:nvSpPr>
+          <p:cNvPr id="4" name="Date Placeholder 3"/>
           <p:cNvSpPr>
             <a:spLocks noGrp="1"/>
           </p:cNvSpPr>
@@ -271,7 +252,7 @@
           <a:p>
             <a:fld id="{E759A0DE-F190-5444-87AC-4719D5F20D15}" type="datetimeFigureOut">
               <a:rPr lang="en-US" smtClean="0"/>
-              <a:t>3/31/26</a:t>
+              <a:t>6/13/26</a:t>
             </a:fld>
             <a:endParaRPr lang="en-US"/>
           </a:p>
@@ -279,13 +260,7 @@
       </p:sp>
       <p:sp>
         <p:nvSpPr>
-          <p:cNvPr id="5" name="Footer Placeholder 4">
-            <a:extLst>
-              <a:ext uri="{FF2B5EF4-FFF2-40B4-BE49-F238E27FC236}">
-                <a16:creationId xmlns:a16="http://schemas.microsoft.com/office/drawing/2014/main" id="{51817876-8CFB-960B-6A57-C7F9FD39D3EC}"/>
-              </a:ext>
-            </a:extLst>
-          </p:cNvPr>
+          <p:cNvPr id="5" name="Footer Placeholder 4"/>
           <p:cNvSpPr>
             <a:spLocks noGrp="1"/>
           </p:cNvSpPr>
@@ -304,13 +279,7 @@
       </p:sp>
       <p:sp>
         <p:nvSpPr>
-          <p:cNvPr id="6" name="Slide Number Placeholder 5">
-            <a:extLst>
-              <a:ext uri="{FF2B5EF4-FFF2-40B4-BE49-F238E27FC236}">
-                <a16:creationId xmlns:a16="http://schemas.microsoft.com/office/drawing/2014/main" id="{DB548E83-1153-3307-5818-CD7F2833A3F5}"/>
-              </a:ext>
-            </a:extLst>
-          </p:cNvPr>
+          <p:cNvPr id="6" name="Slide Number Placeholder 5"/>
           <p:cNvSpPr>
             <a:spLocks noGrp="1"/>
           </p:cNvSpPr>
@@ -334,7 +303,7 @@
     </p:spTree>
     <p:extLst>
       <p:ext uri="{BB962C8B-B14F-4D97-AF65-F5344CB8AC3E}">
-        <p14:creationId xmlns:p14="http://schemas.microsoft.com/office/powerpoint/2010/main" val="2594881872"/>
+        <p14:creationId xmlns:p14="http://schemas.microsoft.com/office/powerpoint/2010/main" val="2904640610"/>
       </p:ext>
     </p:extLst>
   </p:cSld>
@@ -363,13 +332,7 @@
       </p:grpSpPr>
       <p:sp>
         <p:nvSpPr>
-          <p:cNvPr id="2" name="Title 1">
-            <a:extLst>
-              <a:ext uri="{FF2B5EF4-FFF2-40B4-BE49-F238E27FC236}">
-                <a16:creationId xmlns:a16="http://schemas.microsoft.com/office/drawing/2014/main" id="{9015C597-3152-5765-EBC1-B17D9951543D}"/>
-              </a:ext>
-            </a:extLst>
-          </p:cNvPr>
+          <p:cNvPr id="2" name="Title 1"/>
           <p:cNvSpPr>
             <a:spLocks noGrp="1"/>
           </p:cNvSpPr>
@@ -386,18 +349,13 @@
               <a:rPr lang="en-US"/>
               <a:t>Click to edit Master title style</a:t>
             </a:r>
-          </a:p>
-        </p:txBody>
-      </p:sp>
-      <p:sp>
-        <p:nvSpPr>
-          <p:cNvPr id="3" name="Vertical Text Placeholder 2">
-            <a:extLst>
-              <a:ext uri="{FF2B5EF4-FFF2-40B4-BE49-F238E27FC236}">
-                <a16:creationId xmlns:a16="http://schemas.microsoft.com/office/drawing/2014/main" id="{5BA5F73E-18E1-021C-9878-B37DC31E2802}"/>
-              </a:ext>
-            </a:extLst>
-          </p:cNvPr>
+            <a:endParaRPr lang="en-US" dirty="0"/>
+          </a:p>
+        </p:txBody>
+      </p:sp>
+      <p:sp>
+        <p:nvSpPr>
+          <p:cNvPr id="3" name="Vertical Text Placeholder 2"/>
           <p:cNvSpPr>
             <a:spLocks noGrp="1"/>
           </p:cNvSpPr>
@@ -443,18 +401,13 @@
               <a:rPr lang="en-US"/>
               <a:t>Fifth level</a:t>
             </a:r>
-          </a:p>
-        </p:txBody>
-      </p:sp>
-      <p:sp>
-        <p:nvSpPr>
-          <p:cNvPr id="4" name="Date Placeholder 3">
-            <a:extLst>
-              <a:ext uri="{FF2B5EF4-FFF2-40B4-BE49-F238E27FC236}">
-                <a16:creationId xmlns:a16="http://schemas.microsoft.com/office/drawing/2014/main" id="{B683AF53-E0B5-2F63-C15E-4BF621A3186B}"/>
-              </a:ext>
-            </a:extLst>
-          </p:cNvPr>
+            <a:endParaRPr lang="en-US" dirty="0"/>
+          </a:p>
+        </p:txBody>
+      </p:sp>
+      <p:sp>
+        <p:nvSpPr>
+          <p:cNvPr id="4" name="Date Placeholder 3"/>
           <p:cNvSpPr>
             <a:spLocks noGrp="1"/>
           </p:cNvSpPr>
@@ -469,7 +422,7 @@
           <a:p>
             <a:fld id="{E759A0DE-F190-5444-87AC-4719D5F20D15}" type="datetimeFigureOut">
               <a:rPr lang="en-US" smtClean="0"/>
-              <a:t>3/31/26</a:t>
+              <a:t>6/13/26</a:t>
             </a:fld>
             <a:endParaRPr lang="en-US"/>
           </a:p>
@@ -477,13 +430,7 @@
       </p:sp>
       <p:sp>
         <p:nvSpPr>
-          <p:cNvPr id="5" name="Footer Placeholder 4">
-            <a:extLst>
-              <a:ext uri="{FF2B5EF4-FFF2-40B4-BE49-F238E27FC236}">
-                <a16:creationId xmlns:a16="http://schemas.microsoft.com/office/drawing/2014/main" id="{D1CA465D-C46F-7FA4-9154-773B74869505}"/>
-              </a:ext>
-            </a:extLst>
-          </p:cNvPr>
+          <p:cNvPr id="5" name="Footer Placeholder 4"/>
           <p:cNvSpPr>
             <a:spLocks noGrp="1"/>
           </p:cNvSpPr>
@@ -502,13 +449,7 @@
       </p:sp>
       <p:sp>
         <p:nvSpPr>
-          <p:cNvPr id="6" name="Slide Number Placeholder 5">
-            <a:extLst>
-              <a:ext uri="{FF2B5EF4-FFF2-40B4-BE49-F238E27FC236}">
-                <a16:creationId xmlns:a16="http://schemas.microsoft.com/office/drawing/2014/main" id="{BBA3BEE5-DE05-B54F-20CA-E8C336AE957E}"/>
-              </a:ext>
-            </a:extLst>
-          </p:cNvPr>
+          <p:cNvPr id="6" name="Slide Number Placeholder 5"/>
           <p:cNvSpPr>
             <a:spLocks noGrp="1"/>
           </p:cNvSpPr>
@@ -532,7 +473,7 @@
     </p:spTree>
     <p:extLst>
       <p:ext uri="{BB962C8B-B14F-4D97-AF65-F5344CB8AC3E}">
-        <p14:creationId xmlns:p14="http://schemas.microsoft.com/office/powerpoint/2010/main" val="3115587574"/>
+        <p14:creationId xmlns:p14="http://schemas.microsoft.com/office/powerpoint/2010/main" val="4100862919"/>
       </p:ext>
     </p:extLst>
   </p:cSld>
@@ -561,13 +502,7 @@
       </p:grpSpPr>
       <p:sp>
         <p:nvSpPr>
-          <p:cNvPr id="2" name="Vertical Title 1">
-            <a:extLst>
-              <a:ext uri="{FF2B5EF4-FFF2-40B4-BE49-F238E27FC236}">
-                <a16:creationId xmlns:a16="http://schemas.microsoft.com/office/drawing/2014/main" id="{42C72931-C193-DCDC-01FD-20CDA0AD4513}"/>
-              </a:ext>
-            </a:extLst>
-          </p:cNvPr>
+          <p:cNvPr id="2" name="Vertical Title 1"/>
           <p:cNvSpPr>
             <a:spLocks noGrp="1"/>
           </p:cNvSpPr>
@@ -577,8 +512,8 @@
         </p:nvSpPr>
         <p:spPr>
           <a:xfrm>
-            <a:off x="8724900" y="365125"/>
-            <a:ext cx="2628900" cy="5811838"/>
+            <a:off x="6543675" y="365125"/>
+            <a:ext cx="1971675" cy="5811838"/>
           </a:xfrm>
         </p:spPr>
         <p:txBody>
@@ -589,18 +524,13 @@
               <a:rPr lang="en-US"/>
               <a:t>Click to edit Master title style</a:t>
             </a:r>
-          </a:p>
-        </p:txBody>
-      </p:sp>
-      <p:sp>
-        <p:nvSpPr>
-          <p:cNvPr id="3" name="Vertical Text Placeholder 2">
-            <a:extLst>
-              <a:ext uri="{FF2B5EF4-FFF2-40B4-BE49-F238E27FC236}">
-                <a16:creationId xmlns:a16="http://schemas.microsoft.com/office/drawing/2014/main" id="{E65B2C1B-4D9D-9A62-13D7-01C6580B781D}"/>
-              </a:ext>
-            </a:extLst>
-          </p:cNvPr>
+            <a:endParaRPr lang="en-US" dirty="0"/>
+          </a:p>
+        </p:txBody>
+      </p:sp>
+      <p:sp>
+        <p:nvSpPr>
+          <p:cNvPr id="3" name="Vertical Text Placeholder 2"/>
           <p:cNvSpPr>
             <a:spLocks noGrp="1"/>
           </p:cNvSpPr>
@@ -610,8 +540,8 @@
         </p:nvSpPr>
         <p:spPr>
           <a:xfrm>
-            <a:off x="838200" y="365125"/>
-            <a:ext cx="7734300" cy="5811838"/>
+            <a:off x="628650" y="365125"/>
+            <a:ext cx="5800725" cy="5811838"/>
           </a:xfrm>
         </p:spPr>
         <p:txBody>
@@ -651,18 +581,13 @@
               <a:rPr lang="en-US"/>
               <a:t>Fifth level</a:t>
             </a:r>
-          </a:p>
-        </p:txBody>
-      </p:sp>
-      <p:sp>
-        <p:nvSpPr>
-          <p:cNvPr id="4" name="Date Placeholder 3">
-            <a:extLst>
-              <a:ext uri="{FF2B5EF4-FFF2-40B4-BE49-F238E27FC236}">
-                <a16:creationId xmlns:a16="http://schemas.microsoft.com/office/drawing/2014/main" id="{57445465-66E1-00A0-A5D2-D034616CC34D}"/>
-              </a:ext>
-            </a:extLst>
-          </p:cNvPr>
+            <a:endParaRPr lang="en-US" dirty="0"/>
+          </a:p>
+        </p:txBody>
+      </p:sp>
+      <p:sp>
+        <p:nvSpPr>
+          <p:cNvPr id="4" name="Date Placeholder 3"/>
           <p:cNvSpPr>
             <a:spLocks noGrp="1"/>
           </p:cNvSpPr>
@@ -677,7 +602,7 @@
           <a:p>
             <a:fld id="{E759A0DE-F190-5444-87AC-4719D5F20D15}" type="datetimeFigureOut">
               <a:rPr lang="en-US" smtClean="0"/>
-              <a:t>3/31/26</a:t>
+              <a:t>6/13/26</a:t>
             </a:fld>
             <a:endParaRPr lang="en-US"/>
           </a:p>
@@ -685,13 +610,7 @@
       </p:sp>
       <p:sp>
         <p:nvSpPr>
-          <p:cNvPr id="5" name="Footer Placeholder 4">
-            <a:extLst>
-              <a:ext uri="{FF2B5EF4-FFF2-40B4-BE49-F238E27FC236}">
-                <a16:creationId xmlns:a16="http://schemas.microsoft.com/office/drawing/2014/main" id="{F253519E-C69A-9396-C73F-1ACB40774508}"/>
-              </a:ext>
-            </a:extLst>
-          </p:cNvPr>
+          <p:cNvPr id="5" name="Footer Placeholder 4"/>
           <p:cNvSpPr>
             <a:spLocks noGrp="1"/>
           </p:cNvSpPr>
@@ -710,13 +629,7 @@
       </p:sp>
       <p:sp>
         <p:nvSpPr>
-          <p:cNvPr id="6" name="Slide Number Placeholder 5">
-            <a:extLst>
-              <a:ext uri="{FF2B5EF4-FFF2-40B4-BE49-F238E27FC236}">
-                <a16:creationId xmlns:a16="http://schemas.microsoft.com/office/drawing/2014/main" id="{CC85BFC6-ABA4-44D2-E110-CE59D7D2AE43}"/>
-              </a:ext>
-            </a:extLst>
-          </p:cNvPr>
+          <p:cNvPr id="6" name="Slide Number Placeholder 5"/>
           <p:cNvSpPr>
             <a:spLocks noGrp="1"/>
           </p:cNvSpPr>
@@ -740,7 +653,7 @@
     </p:spTree>
     <p:extLst>
       <p:ext uri="{BB962C8B-B14F-4D97-AF65-F5344CB8AC3E}">
-        <p14:creationId xmlns:p14="http://schemas.microsoft.com/office/powerpoint/2010/main" val="1588597314"/>
+        <p14:creationId xmlns:p14="http://schemas.microsoft.com/office/powerpoint/2010/main" val="3601913456"/>
       </p:ext>
     </p:extLst>
   </p:cSld>
@@ -769,13 +682,7 @@
       </p:grpSpPr>
       <p:sp>
         <p:nvSpPr>
-          <p:cNvPr id="2" name="Title 1">
-            <a:extLst>
-              <a:ext uri="{FF2B5EF4-FFF2-40B4-BE49-F238E27FC236}">
-                <a16:creationId xmlns:a16="http://schemas.microsoft.com/office/drawing/2014/main" id="{A4C6B7EA-B38C-12D1-5730-E271A11FB914}"/>
-              </a:ext>
-            </a:extLst>
-          </p:cNvPr>
+          <p:cNvPr id="2" name="Title 1"/>
           <p:cNvSpPr>
             <a:spLocks noGrp="1"/>
           </p:cNvSpPr>
@@ -792,18 +699,13 @@
               <a:rPr lang="en-US"/>
               <a:t>Click to edit Master title style</a:t>
             </a:r>
-          </a:p>
-        </p:txBody>
-      </p:sp>
-      <p:sp>
-        <p:nvSpPr>
-          <p:cNvPr id="3" name="Content Placeholder 2">
-            <a:extLst>
-              <a:ext uri="{FF2B5EF4-FFF2-40B4-BE49-F238E27FC236}">
-                <a16:creationId xmlns:a16="http://schemas.microsoft.com/office/drawing/2014/main" id="{5D8D1A30-880C-91DF-D6D6-0BE623BC9F03}"/>
-              </a:ext>
-            </a:extLst>
-          </p:cNvPr>
+            <a:endParaRPr lang="en-US" dirty="0"/>
+          </a:p>
+        </p:txBody>
+      </p:sp>
+      <p:sp>
+        <p:nvSpPr>
+          <p:cNvPr id="3" name="Content Placeholder 2"/>
           <p:cNvSpPr>
             <a:spLocks noGrp="1"/>
           </p:cNvSpPr>
@@ -849,18 +751,13 @@
               <a:rPr lang="en-US"/>
               <a:t>Fifth level</a:t>
             </a:r>
-          </a:p>
-        </p:txBody>
-      </p:sp>
-      <p:sp>
-        <p:nvSpPr>
-          <p:cNvPr id="4" name="Date Placeholder 3">
-            <a:extLst>
-              <a:ext uri="{FF2B5EF4-FFF2-40B4-BE49-F238E27FC236}">
-                <a16:creationId xmlns:a16="http://schemas.microsoft.com/office/drawing/2014/main" id="{27753098-E2DC-41B2-9361-756938A8EBFE}"/>
-              </a:ext>
-            </a:extLst>
-          </p:cNvPr>
+            <a:endParaRPr lang="en-US" dirty="0"/>
+          </a:p>
+        </p:txBody>
+      </p:sp>
+      <p:sp>
+        <p:nvSpPr>
+          <p:cNvPr id="4" name="Date Placeholder 3"/>
           <p:cNvSpPr>
             <a:spLocks noGrp="1"/>
           </p:cNvSpPr>
@@ -875,7 +772,7 @@
           <a:p>
             <a:fld id="{E759A0DE-F190-5444-87AC-4719D5F20D15}" type="datetimeFigureOut">
               <a:rPr lang="en-US" smtClean="0"/>
-              <a:t>3/31/26</a:t>
+              <a:t>6/13/26</a:t>
             </a:fld>
             <a:endParaRPr lang="en-US"/>
           </a:p>
@@ -883,13 +780,7 @@
       </p:sp>
       <p:sp>
         <p:nvSpPr>
-          <p:cNvPr id="5" name="Footer Placeholder 4">
-            <a:extLst>
-              <a:ext uri="{FF2B5EF4-FFF2-40B4-BE49-F238E27FC236}">
-                <a16:creationId xmlns:a16="http://schemas.microsoft.com/office/drawing/2014/main" id="{E463E6B5-5EA8-FE6C-FA06-4515DC0C07A4}"/>
-              </a:ext>
-            </a:extLst>
-          </p:cNvPr>
+          <p:cNvPr id="5" name="Footer Placeholder 4"/>
           <p:cNvSpPr>
             <a:spLocks noGrp="1"/>
           </p:cNvSpPr>
@@ -908,13 +799,7 @@
       </p:sp>
       <p:sp>
         <p:nvSpPr>
-          <p:cNvPr id="6" name="Slide Number Placeholder 5">
-            <a:extLst>
-              <a:ext uri="{FF2B5EF4-FFF2-40B4-BE49-F238E27FC236}">
-                <a16:creationId xmlns:a16="http://schemas.microsoft.com/office/drawing/2014/main" id="{196A6D58-9856-3B55-DBEA-1B9A3269B325}"/>
-              </a:ext>
-            </a:extLst>
-          </p:cNvPr>
+          <p:cNvPr id="6" name="Slide Number Placeholder 5"/>
           <p:cNvSpPr>
             <a:spLocks noGrp="1"/>
           </p:cNvSpPr>
@@ -938,7 +823,7 @@
     </p:spTree>
     <p:extLst>
       <p:ext uri="{BB962C8B-B14F-4D97-AF65-F5344CB8AC3E}">
-        <p14:creationId xmlns:p14="http://schemas.microsoft.com/office/powerpoint/2010/main" val="1474312020"/>
+        <p14:creationId xmlns:p14="http://schemas.microsoft.com/office/powerpoint/2010/main" val="3545686274"/>
       </p:ext>
     </p:extLst>
   </p:cSld>
@@ -967,13 +852,7 @@
       </p:grpSpPr>
       <p:sp>
         <p:nvSpPr>
-          <p:cNvPr id="2" name="Title 1">
-            <a:extLst>
-              <a:ext uri="{FF2B5EF4-FFF2-40B4-BE49-F238E27FC236}">
-                <a16:creationId xmlns:a16="http://schemas.microsoft.com/office/drawing/2014/main" id="{F3003BE6-BFB2-0EF8-7BD3-99B4FF56B7C7}"/>
-              </a:ext>
-            </a:extLst>
-          </p:cNvPr>
+          <p:cNvPr id="2" name="Title 1"/>
           <p:cNvSpPr>
             <a:spLocks noGrp="1"/>
           </p:cNvSpPr>
@@ -983,8 +862,8 @@
         </p:nvSpPr>
         <p:spPr>
           <a:xfrm>
-            <a:off x="831850" y="1709738"/>
-            <a:ext cx="10515600" cy="2852737"/>
+            <a:off x="623888" y="1709739"/>
+            <a:ext cx="7886700" cy="2852737"/>
           </a:xfrm>
         </p:spPr>
         <p:txBody>
@@ -999,18 +878,13 @@
               <a:rPr lang="en-US"/>
               <a:t>Click to edit Master title style</a:t>
             </a:r>
-          </a:p>
-        </p:txBody>
-      </p:sp>
-      <p:sp>
-        <p:nvSpPr>
-          <p:cNvPr id="3" name="Text Placeholder 2">
-            <a:extLst>
-              <a:ext uri="{FF2B5EF4-FFF2-40B4-BE49-F238E27FC236}">
-                <a16:creationId xmlns:a16="http://schemas.microsoft.com/office/drawing/2014/main" id="{95E87140-F157-4DFF-CE20-2F5B759FC1E1}"/>
-              </a:ext>
-            </a:extLst>
-          </p:cNvPr>
+            <a:endParaRPr lang="en-US" dirty="0"/>
+          </a:p>
+        </p:txBody>
+      </p:sp>
+      <p:sp>
+        <p:nvSpPr>
+          <p:cNvPr id="3" name="Text Placeholder 2"/>
           <p:cNvSpPr>
             <a:spLocks noGrp="1"/>
           </p:cNvSpPr>
@@ -1020,8 +894,8 @@
         </p:nvSpPr>
         <p:spPr>
           <a:xfrm>
-            <a:off x="831850" y="4589463"/>
-            <a:ext cx="10515600" cy="1500187"/>
+            <a:off x="623888" y="4589464"/>
+            <a:ext cx="7886700" cy="1500187"/>
           </a:xfrm>
         </p:spPr>
         <p:txBody>
@@ -1129,13 +1003,7 @@
       </p:sp>
       <p:sp>
         <p:nvSpPr>
-          <p:cNvPr id="4" name="Date Placeholder 3">
-            <a:extLst>
-              <a:ext uri="{FF2B5EF4-FFF2-40B4-BE49-F238E27FC236}">
-                <a16:creationId xmlns:a16="http://schemas.microsoft.com/office/drawing/2014/main" id="{E119DC89-D1D7-E179-4B62-551014DFE5B3}"/>
-              </a:ext>
-            </a:extLst>
-          </p:cNvPr>
+          <p:cNvPr id="4" name="Date Placeholder 3"/>
           <p:cNvSpPr>
             <a:spLocks noGrp="1"/>
           </p:cNvSpPr>
@@ -1150,7 +1018,7 @@
           <a:p>
             <a:fld id="{E759A0DE-F190-5444-87AC-4719D5F20D15}" type="datetimeFigureOut">
               <a:rPr lang="en-US" smtClean="0"/>
-              <a:t>3/31/26</a:t>
+              <a:t>6/13/26</a:t>
             </a:fld>
             <a:endParaRPr lang="en-US"/>
           </a:p>
@@ -1158,13 +1026,7 @@
       </p:sp>
       <p:sp>
         <p:nvSpPr>
-          <p:cNvPr id="5" name="Footer Placeholder 4">
-            <a:extLst>
-              <a:ext uri="{FF2B5EF4-FFF2-40B4-BE49-F238E27FC236}">
-                <a16:creationId xmlns:a16="http://schemas.microsoft.com/office/drawing/2014/main" id="{0DC033CF-70D2-4EFC-5477-15F7486A8F3C}"/>
-              </a:ext>
-            </a:extLst>
-          </p:cNvPr>
+          <p:cNvPr id="5" name="Footer Placeholder 4"/>
           <p:cNvSpPr>
             <a:spLocks noGrp="1"/>
           </p:cNvSpPr>
@@ -1183,13 +1045,7 @@
       </p:sp>
       <p:sp>
         <p:nvSpPr>
-          <p:cNvPr id="6" name="Slide Number Placeholder 5">
-            <a:extLst>
-              <a:ext uri="{FF2B5EF4-FFF2-40B4-BE49-F238E27FC236}">
-                <a16:creationId xmlns:a16="http://schemas.microsoft.com/office/drawing/2014/main" id="{797ECCF9-ED4E-20EE-67CD-F55D0D853A8C}"/>
-              </a:ext>
-            </a:extLst>
-          </p:cNvPr>
+          <p:cNvPr id="6" name="Slide Number Placeholder 5"/>
           <p:cNvSpPr>
             <a:spLocks noGrp="1"/>
           </p:cNvSpPr>
@@ -1213,7 +1069,7 @@
     </p:spTree>
     <p:extLst>
       <p:ext uri="{BB962C8B-B14F-4D97-AF65-F5344CB8AC3E}">
-        <p14:creationId xmlns:p14="http://schemas.microsoft.com/office/powerpoint/2010/main" val="3736666041"/>
+        <p14:creationId xmlns:p14="http://schemas.microsoft.com/office/powerpoint/2010/main" val="2894598240"/>
       </p:ext>
     </p:extLst>
   </p:cSld>
@@ -1242,13 +1098,7 @@
       </p:grpSpPr>
       <p:sp>
         <p:nvSpPr>
-          <p:cNvPr id="2" name="Title 1">
-            <a:extLst>
-              <a:ext uri="{FF2B5EF4-FFF2-40B4-BE49-F238E27FC236}">
-                <a16:creationId xmlns:a16="http://schemas.microsoft.com/office/drawing/2014/main" id="{74DD7124-6407-E388-DFAC-CEAEF342D72D}"/>
-              </a:ext>
-            </a:extLst>
-          </p:cNvPr>
+          <p:cNvPr id="2" name="Title 1"/>
           <p:cNvSpPr>
             <a:spLocks noGrp="1"/>
           </p:cNvSpPr>
@@ -1265,18 +1115,13 @@
               <a:rPr lang="en-US"/>
               <a:t>Click to edit Master title style</a:t>
             </a:r>
-          </a:p>
-        </p:txBody>
-      </p:sp>
-      <p:sp>
-        <p:nvSpPr>
-          <p:cNvPr id="3" name="Content Placeholder 2">
-            <a:extLst>
-              <a:ext uri="{FF2B5EF4-FFF2-40B4-BE49-F238E27FC236}">
-                <a16:creationId xmlns:a16="http://schemas.microsoft.com/office/drawing/2014/main" id="{0354C6C2-33DA-0102-6360-654F993BD701}"/>
-              </a:ext>
-            </a:extLst>
-          </p:cNvPr>
+            <a:endParaRPr lang="en-US" dirty="0"/>
+          </a:p>
+        </p:txBody>
+      </p:sp>
+      <p:sp>
+        <p:nvSpPr>
+          <p:cNvPr id="3" name="Content Placeholder 2"/>
           <p:cNvSpPr>
             <a:spLocks noGrp="1"/>
           </p:cNvSpPr>
@@ -1286,8 +1131,8 @@
         </p:nvSpPr>
         <p:spPr>
           <a:xfrm>
-            <a:off x="838200" y="1825625"/>
-            <a:ext cx="5181600" cy="4351338"/>
+            <a:off x="628650" y="1825625"/>
+            <a:ext cx="3886200" cy="4351338"/>
           </a:xfrm>
         </p:spPr>
         <p:txBody>
@@ -1327,18 +1172,13 @@
               <a:rPr lang="en-US"/>
               <a:t>Fifth level</a:t>
             </a:r>
-          </a:p>
-        </p:txBody>
-      </p:sp>
-      <p:sp>
-        <p:nvSpPr>
-          <p:cNvPr id="4" name="Content Placeholder 3">
-            <a:extLst>
-              <a:ext uri="{FF2B5EF4-FFF2-40B4-BE49-F238E27FC236}">
-                <a16:creationId xmlns:a16="http://schemas.microsoft.com/office/drawing/2014/main" id="{EE2B2A58-052B-B454-9932-012243039D08}"/>
-              </a:ext>
-            </a:extLst>
-          </p:cNvPr>
+            <a:endParaRPr lang="en-US" dirty="0"/>
+          </a:p>
+        </p:txBody>
+      </p:sp>
+      <p:sp>
+        <p:nvSpPr>
+          <p:cNvPr id="4" name="Content Placeholder 3"/>
           <p:cNvSpPr>
             <a:spLocks noGrp="1"/>
           </p:cNvSpPr>
@@ -1348,8 +1188,8 @@
         </p:nvSpPr>
         <p:spPr>
           <a:xfrm>
-            <a:off x="6172200" y="1825625"/>
-            <a:ext cx="5181600" cy="4351338"/>
+            <a:off x="4629150" y="1825625"/>
+            <a:ext cx="3886200" cy="4351338"/>
           </a:xfrm>
         </p:spPr>
         <p:txBody>
@@ -1389,18 +1229,13 @@
               <a:rPr lang="en-US"/>
               <a:t>Fifth level</a:t>
             </a:r>
-          </a:p>
-        </p:txBody>
-      </p:sp>
-      <p:sp>
-        <p:nvSpPr>
-          <p:cNvPr id="5" name="Date Placeholder 4">
-            <a:extLst>
-              <a:ext uri="{FF2B5EF4-FFF2-40B4-BE49-F238E27FC236}">
-                <a16:creationId xmlns:a16="http://schemas.microsoft.com/office/drawing/2014/main" id="{52B92D04-ECBD-D55F-A459-4C28DF6A8C2E}"/>
-              </a:ext>
-            </a:extLst>
-          </p:cNvPr>
+            <a:endParaRPr lang="en-US" dirty="0"/>
+          </a:p>
+        </p:txBody>
+      </p:sp>
+      <p:sp>
+        <p:nvSpPr>
+          <p:cNvPr id="5" name="Date Placeholder 4"/>
           <p:cNvSpPr>
             <a:spLocks noGrp="1"/>
           </p:cNvSpPr>
@@ -1415,7 +1250,7 @@
           <a:p>
             <a:fld id="{E759A0DE-F190-5444-87AC-4719D5F20D15}" type="datetimeFigureOut">
               <a:rPr lang="en-US" smtClean="0"/>
-              <a:t>3/31/26</a:t>
+              <a:t>6/13/26</a:t>
             </a:fld>
             <a:endParaRPr lang="en-US"/>
           </a:p>
@@ -1423,13 +1258,7 @@
       </p:sp>
       <p:sp>
         <p:nvSpPr>
-          <p:cNvPr id="6" name="Footer Placeholder 5">
-            <a:extLst>
-              <a:ext uri="{FF2B5EF4-FFF2-40B4-BE49-F238E27FC236}">
-                <a16:creationId xmlns:a16="http://schemas.microsoft.com/office/drawing/2014/main" id="{DF69ACAC-11AF-A864-BD18-A4B426A4AA03}"/>
-              </a:ext>
-            </a:extLst>
-          </p:cNvPr>
+          <p:cNvPr id="6" name="Footer Placeholder 5"/>
           <p:cNvSpPr>
             <a:spLocks noGrp="1"/>
           </p:cNvSpPr>
@@ -1448,13 +1277,7 @@
       </p:sp>
       <p:sp>
         <p:nvSpPr>
-          <p:cNvPr id="7" name="Slide Number Placeholder 6">
-            <a:extLst>
-              <a:ext uri="{FF2B5EF4-FFF2-40B4-BE49-F238E27FC236}">
-                <a16:creationId xmlns:a16="http://schemas.microsoft.com/office/drawing/2014/main" id="{3A3C5DAC-E196-CEC3-6A6B-376BB3F37D19}"/>
-              </a:ext>
-            </a:extLst>
-          </p:cNvPr>
+          <p:cNvPr id="7" name="Slide Number Placeholder 6"/>
           <p:cNvSpPr>
             <a:spLocks noGrp="1"/>
           </p:cNvSpPr>
@@ -1478,7 +1301,7 @@
     </p:spTree>
     <p:extLst>
       <p:ext uri="{BB962C8B-B14F-4D97-AF65-F5344CB8AC3E}">
-        <p14:creationId xmlns:p14="http://schemas.microsoft.com/office/powerpoint/2010/main" val="621302458"/>
+        <p14:creationId xmlns:p14="http://schemas.microsoft.com/office/powerpoint/2010/main" val="2636504166"/>
       </p:ext>
     </p:extLst>
   </p:cSld>
@@ -1507,13 +1330,7 @@
       </p:grpSpPr>
       <p:sp>
         <p:nvSpPr>
-          <p:cNvPr id="2" name="Title 1">
-            <a:extLst>
-              <a:ext uri="{FF2B5EF4-FFF2-40B4-BE49-F238E27FC236}">
-                <a16:creationId xmlns:a16="http://schemas.microsoft.com/office/drawing/2014/main" id="{0C632820-190D-235F-CEAA-9558C5413BC1}"/>
-              </a:ext>
-            </a:extLst>
-          </p:cNvPr>
+          <p:cNvPr id="2" name="Title 1"/>
           <p:cNvSpPr>
             <a:spLocks noGrp="1"/>
           </p:cNvSpPr>
@@ -1523,8 +1340,8 @@
         </p:nvSpPr>
         <p:spPr>
           <a:xfrm>
-            <a:off x="839788" y="365125"/>
-            <a:ext cx="10515600" cy="1325563"/>
+            <a:off x="629841" y="365126"/>
+            <a:ext cx="7886700" cy="1325563"/>
           </a:xfrm>
         </p:spPr>
         <p:txBody>
@@ -1535,18 +1352,13 @@
               <a:rPr lang="en-US"/>
               <a:t>Click to edit Master title style</a:t>
             </a:r>
-          </a:p>
-        </p:txBody>
-      </p:sp>
-      <p:sp>
-        <p:nvSpPr>
-          <p:cNvPr id="3" name="Text Placeholder 2">
-            <a:extLst>
-              <a:ext uri="{FF2B5EF4-FFF2-40B4-BE49-F238E27FC236}">
-                <a16:creationId xmlns:a16="http://schemas.microsoft.com/office/drawing/2014/main" id="{16693254-6651-D942-4099-84C9B6A31CF3}"/>
-              </a:ext>
-            </a:extLst>
-          </p:cNvPr>
+            <a:endParaRPr lang="en-US" dirty="0"/>
+          </a:p>
+        </p:txBody>
+      </p:sp>
+      <p:sp>
+        <p:nvSpPr>
+          <p:cNvPr id="3" name="Text Placeholder 2"/>
           <p:cNvSpPr>
             <a:spLocks noGrp="1"/>
           </p:cNvSpPr>
@@ -1556,8 +1368,8 @@
         </p:nvSpPr>
         <p:spPr>
           <a:xfrm>
-            <a:off x="839788" y="1681163"/>
-            <a:ext cx="5157787" cy="823912"/>
+            <a:off x="629842" y="1681163"/>
+            <a:ext cx="3868340" cy="823912"/>
           </a:xfrm>
         </p:spPr>
         <p:txBody>
@@ -1611,13 +1423,7 @@
       </p:sp>
       <p:sp>
         <p:nvSpPr>
-          <p:cNvPr id="4" name="Content Placeholder 3">
-            <a:extLst>
-              <a:ext uri="{FF2B5EF4-FFF2-40B4-BE49-F238E27FC236}">
-                <a16:creationId xmlns:a16="http://schemas.microsoft.com/office/drawing/2014/main" id="{D6D4DAC3-CF47-11DC-83E8-0B1192A4422A}"/>
-              </a:ext>
-            </a:extLst>
-          </p:cNvPr>
+          <p:cNvPr id="4" name="Content Placeholder 3"/>
           <p:cNvSpPr>
             <a:spLocks noGrp="1"/>
           </p:cNvSpPr>
@@ -1627,8 +1433,8 @@
         </p:nvSpPr>
         <p:spPr>
           <a:xfrm>
-            <a:off x="839788" y="2505075"/>
-            <a:ext cx="5157787" cy="3684588"/>
+            <a:off x="629842" y="2505075"/>
+            <a:ext cx="3868340" cy="3684588"/>
           </a:xfrm>
         </p:spPr>
         <p:txBody>
@@ -1668,18 +1474,13 @@
               <a:rPr lang="en-US"/>
               <a:t>Fifth level</a:t>
             </a:r>
-          </a:p>
-        </p:txBody>
-      </p:sp>
-      <p:sp>
-        <p:nvSpPr>
-          <p:cNvPr id="5" name="Text Placeholder 4">
-            <a:extLst>
-              <a:ext uri="{FF2B5EF4-FFF2-40B4-BE49-F238E27FC236}">
-                <a16:creationId xmlns:a16="http://schemas.microsoft.com/office/drawing/2014/main" id="{3C49067B-AD0F-C796-4C8F-C043DB6FD3B3}"/>
-              </a:ext>
-            </a:extLst>
-          </p:cNvPr>
+            <a:endParaRPr lang="en-US" dirty="0"/>
+          </a:p>
+        </p:txBody>
+      </p:sp>
+      <p:sp>
+        <p:nvSpPr>
+          <p:cNvPr id="5" name="Text Placeholder 4"/>
           <p:cNvSpPr>
             <a:spLocks noGrp="1"/>
           </p:cNvSpPr>
@@ -1689,8 +1490,8 @@
         </p:nvSpPr>
         <p:spPr>
           <a:xfrm>
-            <a:off x="6172200" y="1681163"/>
-            <a:ext cx="5183188" cy="823912"/>
+            <a:off x="4629150" y="1681163"/>
+            <a:ext cx="3887391" cy="823912"/>
           </a:xfrm>
         </p:spPr>
         <p:txBody>
@@ -1744,13 +1545,7 @@
       </p:sp>
       <p:sp>
         <p:nvSpPr>
-          <p:cNvPr id="6" name="Content Placeholder 5">
-            <a:extLst>
-              <a:ext uri="{FF2B5EF4-FFF2-40B4-BE49-F238E27FC236}">
-                <a16:creationId xmlns:a16="http://schemas.microsoft.com/office/drawing/2014/main" id="{A4D0695B-675B-E8DD-D931-29E639B3E559}"/>
-              </a:ext>
-            </a:extLst>
-          </p:cNvPr>
+          <p:cNvPr id="6" name="Content Placeholder 5"/>
           <p:cNvSpPr>
             <a:spLocks noGrp="1"/>
           </p:cNvSpPr>
@@ -1760,8 +1555,8 @@
         </p:nvSpPr>
         <p:spPr>
           <a:xfrm>
-            <a:off x="6172200" y="2505075"/>
-            <a:ext cx="5183188" cy="3684588"/>
+            <a:off x="4629150" y="2505075"/>
+            <a:ext cx="3887391" cy="3684588"/>
           </a:xfrm>
         </p:spPr>
         <p:txBody>
@@ -1801,18 +1596,13 @@
               <a:rPr lang="en-US"/>
               <a:t>Fifth level</a:t>
             </a:r>
-          </a:p>
-        </p:txBody>
-      </p:sp>
-      <p:sp>
-        <p:nvSpPr>
-          <p:cNvPr id="7" name="Date Placeholder 6">
-            <a:extLst>
-              <a:ext uri="{FF2B5EF4-FFF2-40B4-BE49-F238E27FC236}">
-                <a16:creationId xmlns:a16="http://schemas.microsoft.com/office/drawing/2014/main" id="{E7F5423C-A80C-353A-6ADA-AD2195CCE83B}"/>
-              </a:ext>
-            </a:extLst>
-          </p:cNvPr>
+            <a:endParaRPr lang="en-US" dirty="0"/>
+          </a:p>
+        </p:txBody>
+      </p:sp>
+      <p:sp>
+        <p:nvSpPr>
+          <p:cNvPr id="7" name="Date Placeholder 6"/>
           <p:cNvSpPr>
             <a:spLocks noGrp="1"/>
           </p:cNvSpPr>
@@ -1827,7 +1617,7 @@
           <a:p>
             <a:fld id="{E759A0DE-F190-5444-87AC-4719D5F20D15}" type="datetimeFigureOut">
               <a:rPr lang="en-US" smtClean="0"/>
-              <a:t>3/31/26</a:t>
+              <a:t>6/13/26</a:t>
             </a:fld>
             <a:endParaRPr lang="en-US"/>
           </a:p>
@@ -1835,13 +1625,7 @@
       </p:sp>
       <p:sp>
         <p:nvSpPr>
-          <p:cNvPr id="8" name="Footer Placeholder 7">
-            <a:extLst>
-              <a:ext uri="{FF2B5EF4-FFF2-40B4-BE49-F238E27FC236}">
-                <a16:creationId xmlns:a16="http://schemas.microsoft.com/office/drawing/2014/main" id="{3154C085-1B7B-06F2-2F97-8BE5AED3D908}"/>
-              </a:ext>
-            </a:extLst>
-          </p:cNvPr>
+          <p:cNvPr id="8" name="Footer Placeholder 7"/>
           <p:cNvSpPr>
             <a:spLocks noGrp="1"/>
           </p:cNvSpPr>
@@ -1860,13 +1644,7 @@
       </p:sp>
       <p:sp>
         <p:nvSpPr>
-          <p:cNvPr id="9" name="Slide Number Placeholder 8">
-            <a:extLst>
-              <a:ext uri="{FF2B5EF4-FFF2-40B4-BE49-F238E27FC236}">
-                <a16:creationId xmlns:a16="http://schemas.microsoft.com/office/drawing/2014/main" id="{A6C6B0A2-57CB-16B8-1E9B-CA6DA6337B35}"/>
-              </a:ext>
-            </a:extLst>
-          </p:cNvPr>
+          <p:cNvPr id="9" name="Slide Number Placeholder 8"/>
           <p:cNvSpPr>
             <a:spLocks noGrp="1"/>
           </p:cNvSpPr>
@@ -1890,7 +1668,7 @@
     </p:spTree>
     <p:extLst>
       <p:ext uri="{BB962C8B-B14F-4D97-AF65-F5344CB8AC3E}">
-        <p14:creationId xmlns:p14="http://schemas.microsoft.com/office/powerpoint/2010/main" val="3902579014"/>
+        <p14:creationId xmlns:p14="http://schemas.microsoft.com/office/powerpoint/2010/main" val="3292413673"/>
       </p:ext>
     </p:extLst>
   </p:cSld>
@@ -1919,13 +1697,7 @@
       </p:grpSpPr>
       <p:sp>
         <p:nvSpPr>
-          <p:cNvPr id="2" name="Title 1">
-            <a:extLst>
-              <a:ext uri="{FF2B5EF4-FFF2-40B4-BE49-F238E27FC236}">
-                <a16:creationId xmlns:a16="http://schemas.microsoft.com/office/drawing/2014/main" id="{42014C2D-A9C6-E4FF-86E0-53926609620A}"/>
-              </a:ext>
-            </a:extLst>
-          </p:cNvPr>
+          <p:cNvPr id="2" name="Title 1"/>
           <p:cNvSpPr>
             <a:spLocks noGrp="1"/>
           </p:cNvSpPr>
@@ -1942,18 +1714,13 @@
               <a:rPr lang="en-US"/>
               <a:t>Click to edit Master title style</a:t>
             </a:r>
-          </a:p>
-        </p:txBody>
-      </p:sp>
-      <p:sp>
-        <p:nvSpPr>
-          <p:cNvPr id="3" name="Date Placeholder 2">
-            <a:extLst>
-              <a:ext uri="{FF2B5EF4-FFF2-40B4-BE49-F238E27FC236}">
-                <a16:creationId xmlns:a16="http://schemas.microsoft.com/office/drawing/2014/main" id="{CAEBDED3-8FA2-E14E-6132-DBF06C0043E9}"/>
-              </a:ext>
-            </a:extLst>
-          </p:cNvPr>
+            <a:endParaRPr lang="en-US" dirty="0"/>
+          </a:p>
+        </p:txBody>
+      </p:sp>
+      <p:sp>
+        <p:nvSpPr>
+          <p:cNvPr id="3" name="Date Placeholder 2"/>
           <p:cNvSpPr>
             <a:spLocks noGrp="1"/>
           </p:cNvSpPr>
@@ -1968,7 +1735,7 @@
           <a:p>
             <a:fld id="{E759A0DE-F190-5444-87AC-4719D5F20D15}" type="datetimeFigureOut">
               <a:rPr lang="en-US" smtClean="0"/>
-              <a:t>3/31/26</a:t>
+              <a:t>6/13/26</a:t>
             </a:fld>
             <a:endParaRPr lang="en-US"/>
           </a:p>
@@ -1976,13 +1743,7 @@
       </p:sp>
       <p:sp>
         <p:nvSpPr>
-          <p:cNvPr id="4" name="Footer Placeholder 3">
-            <a:extLst>
-              <a:ext uri="{FF2B5EF4-FFF2-40B4-BE49-F238E27FC236}">
-                <a16:creationId xmlns:a16="http://schemas.microsoft.com/office/drawing/2014/main" id="{24FF1715-78D0-6155-47B7-64F32ECF5F55}"/>
-              </a:ext>
-            </a:extLst>
-          </p:cNvPr>
+          <p:cNvPr id="4" name="Footer Placeholder 3"/>
           <p:cNvSpPr>
             <a:spLocks noGrp="1"/>
           </p:cNvSpPr>
@@ -2001,13 +1762,7 @@
       </p:sp>
       <p:sp>
         <p:nvSpPr>
-          <p:cNvPr id="5" name="Slide Number Placeholder 4">
-            <a:extLst>
-              <a:ext uri="{FF2B5EF4-FFF2-40B4-BE49-F238E27FC236}">
-                <a16:creationId xmlns:a16="http://schemas.microsoft.com/office/drawing/2014/main" id="{95EE70D1-30EB-D2A6-F6C0-29E5A0681277}"/>
-              </a:ext>
-            </a:extLst>
-          </p:cNvPr>
+          <p:cNvPr id="5" name="Slide Number Placeholder 4"/>
           <p:cNvSpPr>
             <a:spLocks noGrp="1"/>
           </p:cNvSpPr>
@@ -2031,7 +1786,7 @@
     </p:spTree>
     <p:extLst>
       <p:ext uri="{BB962C8B-B14F-4D97-AF65-F5344CB8AC3E}">
-        <p14:creationId xmlns:p14="http://schemas.microsoft.com/office/powerpoint/2010/main" val="2762667879"/>
+        <p14:creationId xmlns:p14="http://schemas.microsoft.com/office/powerpoint/2010/main" val="73920897"/>
       </p:ext>
     </p:extLst>
   </p:cSld>
@@ -2060,13 +1815,7 @@
       </p:grpSpPr>
       <p:sp>
         <p:nvSpPr>
-          <p:cNvPr id="2" name="Date Placeholder 1">
-            <a:extLst>
-              <a:ext uri="{FF2B5EF4-FFF2-40B4-BE49-F238E27FC236}">
-                <a16:creationId xmlns:a16="http://schemas.microsoft.com/office/drawing/2014/main" id="{9CD2DAB5-6AD5-15BC-026B-B80E34678399}"/>
-              </a:ext>
-            </a:extLst>
-          </p:cNvPr>
+          <p:cNvPr id="2" name="Date Placeholder 1"/>
           <p:cNvSpPr>
             <a:spLocks noGrp="1"/>
           </p:cNvSpPr>
@@ -2081,7 +1830,7 @@
           <a:p>
             <a:fld id="{E759A0DE-F190-5444-87AC-4719D5F20D15}" type="datetimeFigureOut">
               <a:rPr lang="en-US" smtClean="0"/>
-              <a:t>3/31/26</a:t>
+              <a:t>6/13/26</a:t>
             </a:fld>
             <a:endParaRPr lang="en-US"/>
           </a:p>
@@ -2089,13 +1838,7 @@
       </p:sp>
       <p:sp>
         <p:nvSpPr>
-          <p:cNvPr id="3" name="Footer Placeholder 2">
-            <a:extLst>
-              <a:ext uri="{FF2B5EF4-FFF2-40B4-BE49-F238E27FC236}">
-                <a16:creationId xmlns:a16="http://schemas.microsoft.com/office/drawing/2014/main" id="{919D2783-D2E4-47AE-70D6-B4A209E13CBC}"/>
-              </a:ext>
-            </a:extLst>
-          </p:cNvPr>
+          <p:cNvPr id="3" name="Footer Placeholder 2"/>
           <p:cNvSpPr>
             <a:spLocks noGrp="1"/>
           </p:cNvSpPr>
@@ -2114,13 +1857,7 @@
       </p:sp>
       <p:sp>
         <p:nvSpPr>
-          <p:cNvPr id="4" name="Slide Number Placeholder 3">
-            <a:extLst>
-              <a:ext uri="{FF2B5EF4-FFF2-40B4-BE49-F238E27FC236}">
-                <a16:creationId xmlns:a16="http://schemas.microsoft.com/office/drawing/2014/main" id="{009A41F5-9D51-17BE-FB49-C0DC79F1FB33}"/>
-              </a:ext>
-            </a:extLst>
-          </p:cNvPr>
+          <p:cNvPr id="4" name="Slide Number Placeholder 3"/>
           <p:cNvSpPr>
             <a:spLocks noGrp="1"/>
           </p:cNvSpPr>
@@ -2144,7 +1881,7 @@
     </p:spTree>
     <p:extLst>
       <p:ext uri="{BB962C8B-B14F-4D97-AF65-F5344CB8AC3E}">
-        <p14:creationId xmlns:p14="http://schemas.microsoft.com/office/powerpoint/2010/main" val="684399818"/>
+        <p14:creationId xmlns:p14="http://schemas.microsoft.com/office/powerpoint/2010/main" val="3823607462"/>
       </p:ext>
     </p:extLst>
   </p:cSld>
@@ -2173,13 +1910,7 @@
       </p:grpSpPr>
       <p:sp>
         <p:nvSpPr>
-          <p:cNvPr id="2" name="Title 1">
-            <a:extLst>
-              <a:ext uri="{FF2B5EF4-FFF2-40B4-BE49-F238E27FC236}">
-                <a16:creationId xmlns:a16="http://schemas.microsoft.com/office/drawing/2014/main" id="{636535ED-82D6-0936-3EEB-AD9435F5EDC9}"/>
-              </a:ext>
-            </a:extLst>
-          </p:cNvPr>
+          <p:cNvPr id="2" name="Title 1"/>
           <p:cNvSpPr>
             <a:spLocks noGrp="1"/>
           </p:cNvSpPr>
@@ -2189,8 +1920,8 @@
         </p:nvSpPr>
         <p:spPr>
           <a:xfrm>
-            <a:off x="839788" y="457200"/>
-            <a:ext cx="3932237" cy="1600200"/>
+            <a:off x="629841" y="457200"/>
+            <a:ext cx="2949178" cy="1600200"/>
           </a:xfrm>
         </p:spPr>
         <p:txBody>
@@ -2205,18 +1936,13 @@
               <a:rPr lang="en-US"/>
               <a:t>Click to edit Master title style</a:t>
             </a:r>
-          </a:p>
-        </p:txBody>
-      </p:sp>
-      <p:sp>
-        <p:nvSpPr>
-          <p:cNvPr id="3" name="Content Placeholder 2">
-            <a:extLst>
-              <a:ext uri="{FF2B5EF4-FFF2-40B4-BE49-F238E27FC236}">
-                <a16:creationId xmlns:a16="http://schemas.microsoft.com/office/drawing/2014/main" id="{1803B2A4-A7AB-CDB0-D7F1-279536A2702A}"/>
-              </a:ext>
-            </a:extLst>
-          </p:cNvPr>
+            <a:endParaRPr lang="en-US" dirty="0"/>
+          </a:p>
+        </p:txBody>
+      </p:sp>
+      <p:sp>
+        <p:nvSpPr>
+          <p:cNvPr id="3" name="Content Placeholder 2"/>
           <p:cNvSpPr>
             <a:spLocks noGrp="1"/>
           </p:cNvSpPr>
@@ -2226,8 +1952,8 @@
         </p:nvSpPr>
         <p:spPr>
           <a:xfrm>
-            <a:off x="5183188" y="987425"/>
-            <a:ext cx="6172200" cy="4873625"/>
+            <a:off x="3887391" y="987426"/>
+            <a:ext cx="4629150" cy="4873625"/>
           </a:xfrm>
         </p:spPr>
         <p:txBody>
@@ -2295,18 +2021,13 @@
               <a:rPr lang="en-US"/>
               <a:t>Fifth level</a:t>
             </a:r>
-          </a:p>
-        </p:txBody>
-      </p:sp>
-      <p:sp>
-        <p:nvSpPr>
-          <p:cNvPr id="4" name="Text Placeholder 3">
-            <a:extLst>
-              <a:ext uri="{FF2B5EF4-FFF2-40B4-BE49-F238E27FC236}">
-                <a16:creationId xmlns:a16="http://schemas.microsoft.com/office/drawing/2014/main" id="{3329566A-3ACC-2A16-1AAE-6B0281DB7E3C}"/>
-              </a:ext>
-            </a:extLst>
-          </p:cNvPr>
+            <a:endParaRPr lang="en-US" dirty="0"/>
+          </a:p>
+        </p:txBody>
+      </p:sp>
+      <p:sp>
+        <p:nvSpPr>
+          <p:cNvPr id="4" name="Text Placeholder 3"/>
           <p:cNvSpPr>
             <a:spLocks noGrp="1"/>
           </p:cNvSpPr>
@@ -2316,8 +2037,8 @@
         </p:nvSpPr>
         <p:spPr>
           <a:xfrm>
-            <a:off x="839788" y="2057400"/>
-            <a:ext cx="3932237" cy="3811588"/>
+            <a:off x="629841" y="2057400"/>
+            <a:ext cx="2949178" cy="3811588"/>
           </a:xfrm>
         </p:spPr>
         <p:txBody>
@@ -2371,13 +2092,7 @@
       </p:sp>
       <p:sp>
         <p:nvSpPr>
-          <p:cNvPr id="5" name="Date Placeholder 4">
-            <a:extLst>
-              <a:ext uri="{FF2B5EF4-FFF2-40B4-BE49-F238E27FC236}">
-                <a16:creationId xmlns:a16="http://schemas.microsoft.com/office/drawing/2014/main" id="{453518F2-2B74-8F2D-171A-15986F3C5152}"/>
-              </a:ext>
-            </a:extLst>
-          </p:cNvPr>
+          <p:cNvPr id="5" name="Date Placeholder 4"/>
           <p:cNvSpPr>
             <a:spLocks noGrp="1"/>
           </p:cNvSpPr>
@@ -2392,7 +2107,7 @@
           <a:p>
             <a:fld id="{E759A0DE-F190-5444-87AC-4719D5F20D15}" type="datetimeFigureOut">
               <a:rPr lang="en-US" smtClean="0"/>
-              <a:t>3/31/26</a:t>
+              <a:t>6/13/26</a:t>
             </a:fld>
             <a:endParaRPr lang="en-US"/>
           </a:p>
@@ -2400,13 +2115,7 @@
       </p:sp>
       <p:sp>
         <p:nvSpPr>
-          <p:cNvPr id="6" name="Footer Placeholder 5">
-            <a:extLst>
-              <a:ext uri="{FF2B5EF4-FFF2-40B4-BE49-F238E27FC236}">
-                <a16:creationId xmlns:a16="http://schemas.microsoft.com/office/drawing/2014/main" id="{6DF8701B-4899-C3D0-CB2F-6C31378A510F}"/>
-              </a:ext>
-            </a:extLst>
-          </p:cNvPr>
+          <p:cNvPr id="6" name="Footer Placeholder 5"/>
           <p:cNvSpPr>
             <a:spLocks noGrp="1"/>
           </p:cNvSpPr>
@@ -2425,13 +2134,7 @@
       </p:sp>
       <p:sp>
         <p:nvSpPr>
-          <p:cNvPr id="7" name="Slide Number Placeholder 6">
-            <a:extLst>
-              <a:ext uri="{FF2B5EF4-FFF2-40B4-BE49-F238E27FC236}">
-                <a16:creationId xmlns:a16="http://schemas.microsoft.com/office/drawing/2014/main" id="{F3240FD0-A8F8-EFCD-2A69-21AB0FB076F6}"/>
-              </a:ext>
-            </a:extLst>
-          </p:cNvPr>
+          <p:cNvPr id="7" name="Slide Number Placeholder 6"/>
           <p:cNvSpPr>
             <a:spLocks noGrp="1"/>
           </p:cNvSpPr>
@@ -2455,7 +2158,7 @@
     </p:spTree>
     <p:extLst>
       <p:ext uri="{BB962C8B-B14F-4D97-AF65-F5344CB8AC3E}">
-        <p14:creationId xmlns:p14="http://schemas.microsoft.com/office/powerpoint/2010/main" val="2191778824"/>
+        <p14:creationId xmlns:p14="http://schemas.microsoft.com/office/powerpoint/2010/main" val="3680430450"/>
       </p:ext>
     </p:extLst>
   </p:cSld>
@@ -2484,13 +2187,7 @@
       </p:grpSpPr>
       <p:sp>
         <p:nvSpPr>
-          <p:cNvPr id="2" name="Title 1">
-            <a:extLst>
-              <a:ext uri="{FF2B5EF4-FFF2-40B4-BE49-F238E27FC236}">
-                <a16:creationId xmlns:a16="http://schemas.microsoft.com/office/drawing/2014/main" id="{FD43467F-CDAF-BF3C-2E6D-F2EBB52C7E17}"/>
-              </a:ext>
-            </a:extLst>
-          </p:cNvPr>
+          <p:cNvPr id="2" name="Title 1"/>
           <p:cNvSpPr>
             <a:spLocks noGrp="1"/>
           </p:cNvSpPr>
@@ -2500,8 +2197,8 @@
         </p:nvSpPr>
         <p:spPr>
           <a:xfrm>
-            <a:off x="839788" y="457200"/>
-            <a:ext cx="3932237" cy="1600200"/>
+            <a:off x="629841" y="457200"/>
+            <a:ext cx="2949178" cy="1600200"/>
           </a:xfrm>
         </p:spPr>
         <p:txBody>
@@ -2516,20 +2213,15 @@
               <a:rPr lang="en-US"/>
               <a:t>Click to edit Master title style</a:t>
             </a:r>
-          </a:p>
-        </p:txBody>
-      </p:sp>
-      <p:sp>
-        <p:nvSpPr>
-          <p:cNvPr id="3" name="Picture Placeholder 2">
-            <a:extLst>
-              <a:ext uri="{FF2B5EF4-FFF2-40B4-BE49-F238E27FC236}">
-                <a16:creationId xmlns:a16="http://schemas.microsoft.com/office/drawing/2014/main" id="{63D374E6-7653-1FED-90D8-27F8F5A5A555}"/>
-              </a:ext>
-            </a:extLst>
-          </p:cNvPr>
-          <p:cNvSpPr>
-            <a:spLocks noGrp="1"/>
+            <a:endParaRPr lang="en-US" dirty="0"/>
+          </a:p>
+        </p:txBody>
+      </p:sp>
+      <p:sp>
+        <p:nvSpPr>
+          <p:cNvPr id="3" name="Picture Placeholder 2"/>
+          <p:cNvSpPr>
+            <a:spLocks noGrp="1" noChangeAspect="1"/>
           </p:cNvSpPr>
           <p:nvPr>
             <p:ph type="pic" idx="1"/>
@@ -2537,12 +2229,12 @@
         </p:nvSpPr>
         <p:spPr>
           <a:xfrm>
-            <a:off x="5183188" y="987425"/>
-            <a:ext cx="6172200" cy="4873625"/>
+            <a:off x="3887391" y="987426"/>
+            <a:ext cx="4629150" cy="4873625"/>
           </a:xfrm>
         </p:spPr>
         <p:txBody>
-          <a:bodyPr/>
+          <a:bodyPr anchor="t"/>
           <a:lstStyle>
             <a:lvl1pPr marL="0" indent="0">
               <a:buNone/>
@@ -2582,19 +2274,17 @@
             </a:lvl9pPr>
           </a:lstStyle>
           <a:p>
-            <a:endParaRPr lang="en-US"/>
-          </a:p>
-        </p:txBody>
-      </p:sp>
-      <p:sp>
-        <p:nvSpPr>
-          <p:cNvPr id="4" name="Text Placeholder 3">
-            <a:extLst>
-              <a:ext uri="{FF2B5EF4-FFF2-40B4-BE49-F238E27FC236}">
-                <a16:creationId xmlns:a16="http://schemas.microsoft.com/office/drawing/2014/main" id="{9318631D-B68A-86EE-A551-F2FE300250A2}"/>
-              </a:ext>
-            </a:extLst>
-          </p:cNvPr>
+            <a:r>
+              <a:rPr lang="en-US"/>
+              <a:t>Click icon to add picture</a:t>
+            </a:r>
+            <a:endParaRPr lang="en-US" dirty="0"/>
+          </a:p>
+        </p:txBody>
+      </p:sp>
+      <p:sp>
+        <p:nvSpPr>
+          <p:cNvPr id="4" name="Text Placeholder 3"/>
           <p:cNvSpPr>
             <a:spLocks noGrp="1"/>
           </p:cNvSpPr>
@@ -2604,8 +2294,8 @@
         </p:nvSpPr>
         <p:spPr>
           <a:xfrm>
-            <a:off x="839788" y="2057400"/>
-            <a:ext cx="3932237" cy="3811588"/>
+            <a:off x="629841" y="2057400"/>
+            <a:ext cx="2949178" cy="3811588"/>
           </a:xfrm>
         </p:spPr>
         <p:txBody>
@@ -2659,13 +2349,7 @@
       </p:sp>
       <p:sp>
         <p:nvSpPr>
-          <p:cNvPr id="5" name="Date Placeholder 4">
-            <a:extLst>
-              <a:ext uri="{FF2B5EF4-FFF2-40B4-BE49-F238E27FC236}">
-                <a16:creationId xmlns:a16="http://schemas.microsoft.com/office/drawing/2014/main" id="{0CAD5574-CD0C-0EDC-7EA2-BBDDAA07AD36}"/>
-              </a:ext>
-            </a:extLst>
-          </p:cNvPr>
+          <p:cNvPr id="5" name="Date Placeholder 4"/>
           <p:cNvSpPr>
             <a:spLocks noGrp="1"/>
           </p:cNvSpPr>
@@ -2680,7 +2364,7 @@
           <a:p>
             <a:fld id="{E759A0DE-F190-5444-87AC-4719D5F20D15}" type="datetimeFigureOut">
               <a:rPr lang="en-US" smtClean="0"/>
-              <a:t>3/31/26</a:t>
+              <a:t>6/13/26</a:t>
             </a:fld>
             <a:endParaRPr lang="en-US"/>
           </a:p>
@@ -2688,13 +2372,7 @@
       </p:sp>
       <p:sp>
         <p:nvSpPr>
-          <p:cNvPr id="6" name="Footer Placeholder 5">
-            <a:extLst>
-              <a:ext uri="{FF2B5EF4-FFF2-40B4-BE49-F238E27FC236}">
-                <a16:creationId xmlns:a16="http://schemas.microsoft.com/office/drawing/2014/main" id="{C4ADA4F2-15B1-95FF-AFC8-0BCFB4E4E788}"/>
-              </a:ext>
-            </a:extLst>
-          </p:cNvPr>
+          <p:cNvPr id="6" name="Footer Placeholder 5"/>
           <p:cNvSpPr>
             <a:spLocks noGrp="1"/>
           </p:cNvSpPr>
@@ -2713,13 +2391,7 @@
       </p:sp>
       <p:sp>
         <p:nvSpPr>
-          <p:cNvPr id="7" name="Slide Number Placeholder 6">
-            <a:extLst>
-              <a:ext uri="{FF2B5EF4-FFF2-40B4-BE49-F238E27FC236}">
-                <a16:creationId xmlns:a16="http://schemas.microsoft.com/office/drawing/2014/main" id="{5F57356D-53C5-30FE-E0FE-A480BE6A8E8C}"/>
-              </a:ext>
-            </a:extLst>
-          </p:cNvPr>
+          <p:cNvPr id="7" name="Slide Number Placeholder 6"/>
           <p:cNvSpPr>
             <a:spLocks noGrp="1"/>
           </p:cNvSpPr>
@@ -2743,7 +2415,7 @@
     </p:spTree>
     <p:extLst>
       <p:ext uri="{BB962C8B-B14F-4D97-AF65-F5344CB8AC3E}">
-        <p14:creationId xmlns:p14="http://schemas.microsoft.com/office/powerpoint/2010/main" val="3139710704"/>
+        <p14:creationId xmlns:p14="http://schemas.microsoft.com/office/powerpoint/2010/main" val="1002883463"/>
       </p:ext>
     </p:extLst>
   </p:cSld>
@@ -2777,13 +2449,7 @@
       </p:grpSpPr>
       <p:sp>
         <p:nvSpPr>
-          <p:cNvPr id="2" name="Title Placeholder 1">
-            <a:extLst>
-              <a:ext uri="{FF2B5EF4-FFF2-40B4-BE49-F238E27FC236}">
-                <a16:creationId xmlns:a16="http://schemas.microsoft.com/office/drawing/2014/main" id="{E707FE23-AD5C-E492-4625-B3FFD7D65D58}"/>
-              </a:ext>
-            </a:extLst>
-          </p:cNvPr>
+          <p:cNvPr id="2" name="Title Placeholder 1"/>
           <p:cNvSpPr>
             <a:spLocks noGrp="1"/>
           </p:cNvSpPr>
@@ -2793,8 +2459,8 @@
         </p:nvSpPr>
         <p:spPr>
           <a:xfrm>
-            <a:off x="838200" y="365125"/>
-            <a:ext cx="10515600" cy="1325563"/>
+            <a:off x="628650" y="365126"/>
+            <a:ext cx="7886700" cy="1325563"/>
           </a:xfrm>
           <a:prstGeom prst="rect">
             <a:avLst/>
@@ -2810,18 +2476,13 @@
               <a:rPr lang="en-US"/>
               <a:t>Click to edit Master title style</a:t>
             </a:r>
-          </a:p>
-        </p:txBody>
-      </p:sp>
-      <p:sp>
-        <p:nvSpPr>
-          <p:cNvPr id="3" name="Text Placeholder 2">
-            <a:extLst>
-              <a:ext uri="{FF2B5EF4-FFF2-40B4-BE49-F238E27FC236}">
-                <a16:creationId xmlns:a16="http://schemas.microsoft.com/office/drawing/2014/main" id="{5935509A-545F-6691-9119-47A073D0143B}"/>
-              </a:ext>
-            </a:extLst>
-          </p:cNvPr>
+            <a:endParaRPr lang="en-US" dirty="0"/>
+          </a:p>
+        </p:txBody>
+      </p:sp>
+      <p:sp>
+        <p:nvSpPr>
+          <p:cNvPr id="3" name="Text Placeholder 2"/>
           <p:cNvSpPr>
             <a:spLocks noGrp="1"/>
           </p:cNvSpPr>
@@ -2831,8 +2492,8 @@
         </p:nvSpPr>
         <p:spPr>
           <a:xfrm>
-            <a:off x="838200" y="1825625"/>
-            <a:ext cx="10515600" cy="4351338"/>
+            <a:off x="628650" y="1825625"/>
+            <a:ext cx="7886700" cy="4351338"/>
           </a:xfrm>
           <a:prstGeom prst="rect">
             <a:avLst/>
@@ -2877,18 +2538,13 @@
               <a:rPr lang="en-US"/>
               <a:t>Fifth level</a:t>
             </a:r>
-          </a:p>
-        </p:txBody>
-      </p:sp>
-      <p:sp>
-        <p:nvSpPr>
-          <p:cNvPr id="4" name="Date Placeholder 3">
-            <a:extLst>
-              <a:ext uri="{FF2B5EF4-FFF2-40B4-BE49-F238E27FC236}">
-                <a16:creationId xmlns:a16="http://schemas.microsoft.com/office/drawing/2014/main" id="{B48FCAAE-1AD5-9CBF-A0F6-52A814732FD0}"/>
-              </a:ext>
-            </a:extLst>
-          </p:cNvPr>
+            <a:endParaRPr lang="en-US" dirty="0"/>
+          </a:p>
+        </p:txBody>
+      </p:sp>
+      <p:sp>
+        <p:nvSpPr>
+          <p:cNvPr id="4" name="Date Placeholder 3"/>
           <p:cNvSpPr>
             <a:spLocks noGrp="1"/>
           </p:cNvSpPr>
@@ -2898,8 +2554,8 @@
         </p:nvSpPr>
         <p:spPr>
           <a:xfrm>
-            <a:off x="838200" y="6356350"/>
-            <a:ext cx="2743200" cy="365125"/>
+            <a:off x="628650" y="6356351"/>
+            <a:ext cx="2057400" cy="365125"/>
           </a:xfrm>
           <a:prstGeom prst="rect">
             <a:avLst/>
@@ -2921,7 +2577,7 @@
           <a:p>
             <a:fld id="{E759A0DE-F190-5444-87AC-4719D5F20D15}" type="datetimeFigureOut">
               <a:rPr lang="en-US" smtClean="0"/>
-              <a:t>3/31/26</a:t>
+              <a:t>6/13/26</a:t>
             </a:fld>
             <a:endParaRPr lang="en-US"/>
           </a:p>
@@ -2929,13 +2585,7 @@
       </p:sp>
       <p:sp>
         <p:nvSpPr>
-          <p:cNvPr id="5" name="Footer Placeholder 4">
-            <a:extLst>
-              <a:ext uri="{FF2B5EF4-FFF2-40B4-BE49-F238E27FC236}">
-                <a16:creationId xmlns:a16="http://schemas.microsoft.com/office/drawing/2014/main" id="{22229717-0F21-BE11-1F19-88106B640856}"/>
-              </a:ext>
-            </a:extLst>
-          </p:cNvPr>
+          <p:cNvPr id="5" name="Footer Placeholder 4"/>
           <p:cNvSpPr>
             <a:spLocks noGrp="1"/>
           </p:cNvSpPr>
@@ -2945,8 +2595,8 @@
         </p:nvSpPr>
         <p:spPr>
           <a:xfrm>
-            <a:off x="4038600" y="6356350"/>
-            <a:ext cx="4114800" cy="365125"/>
+            <a:off x="3028950" y="6356351"/>
+            <a:ext cx="3086100" cy="365125"/>
           </a:xfrm>
           <a:prstGeom prst="rect">
             <a:avLst/>
@@ -2972,13 +2622,7 @@
       </p:sp>
       <p:sp>
         <p:nvSpPr>
-          <p:cNvPr id="6" name="Slide Number Placeholder 5">
-            <a:extLst>
-              <a:ext uri="{FF2B5EF4-FFF2-40B4-BE49-F238E27FC236}">
-                <a16:creationId xmlns:a16="http://schemas.microsoft.com/office/drawing/2014/main" id="{3858A247-FF8D-F68A-7E74-66F74B44BB8E}"/>
-              </a:ext>
-            </a:extLst>
-          </p:cNvPr>
+          <p:cNvPr id="6" name="Slide Number Placeholder 5"/>
           <p:cNvSpPr>
             <a:spLocks noGrp="1"/>
           </p:cNvSpPr>
@@ -2988,8 +2632,8 @@
         </p:nvSpPr>
         <p:spPr>
           <a:xfrm>
-            <a:off x="8610600" y="6356350"/>
-            <a:ext cx="2743200" cy="365125"/>
+            <a:off x="6457950" y="6356351"/>
+            <a:ext cx="2057400" cy="365125"/>
           </a:xfrm>
           <a:prstGeom prst="rect">
             <a:avLst/>
@@ -3020,23 +2664,23 @@
     </p:spTree>
     <p:extLst>
       <p:ext uri="{BB962C8B-B14F-4D97-AF65-F5344CB8AC3E}">
-        <p14:creationId xmlns:p14="http://schemas.microsoft.com/office/powerpoint/2010/main" val="3785378211"/>
+        <p14:creationId xmlns:p14="http://schemas.microsoft.com/office/powerpoint/2010/main" val="1387010311"/>
       </p:ext>
     </p:extLst>
   </p:cSld>
   <p:clrMap bg1="lt1" tx1="dk1" bg2="lt2" tx2="dk2" accent1="accent1" accent2="accent2" accent3="accent3" accent4="accent4" accent5="accent5" accent6="accent6" hlink="hlink" folHlink="folHlink"/>
   <p:sldLayoutIdLst>
-    <p:sldLayoutId id="2147483649" r:id="rId1"/>
-    <p:sldLayoutId id="2147483650" r:id="rId2"/>
-    <p:sldLayoutId id="2147483651" r:id="rId3"/>
-    <p:sldLayoutId id="2147483652" r:id="rId4"/>
-    <p:sldLayoutId id="2147483653" r:id="rId5"/>
-    <p:sldLayoutId id="2147483654" r:id="rId6"/>
-    <p:sldLayoutId id="2147483655" r:id="rId7"/>
-    <p:sldLayoutId id="2147483656" r:id="rId8"/>
-    <p:sldLayoutId id="2147483657" r:id="rId9"/>
-    <p:sldLayoutId id="2147483658" r:id="rId10"/>
-    <p:sldLayoutId id="2147483659" r:id="rId11"/>
+    <p:sldLayoutId id="2147483661" r:id="rId1"/>
+    <p:sldLayoutId id="2147483662" r:id="rId2"/>
+    <p:sldLayoutId id="2147483663" r:id="rId3"/>
+    <p:sldLayoutId id="2147483664" r:id="rId4"/>
+    <p:sldLayoutId id="2147483665" r:id="rId5"/>
+    <p:sldLayoutId id="2147483666" r:id="rId6"/>
+    <p:sldLayoutId id="2147483667" r:id="rId7"/>
+    <p:sldLayoutId id="2147483668" r:id="rId8"/>
+    <p:sldLayoutId id="2147483669" r:id="rId9"/>
+    <p:sldLayoutId id="2147483670" r:id="rId10"/>
+    <p:sldLayoutId id="2147483671" r:id="rId11"/>
   </p:sldLayoutIdLst>
   <p:txStyles>
     <p:titleStyle>
@@ -3327,14 +2971,20 @@
     <p:bg>
       <p:bgPr>
         <a:solidFill>
-          <a:schemeClr val="bg1"/>
+          <a:schemeClr val="tx1"/>
         </a:solidFill>
         <a:effectLst/>
       </p:bgPr>
     </p:bg>
     <p:spTree>
       <p:nvGrpSpPr>
-        <p:cNvPr id="1" name=""/>
+        <p:cNvPr id="1" name="">
+          <a:extLst>
+            <a:ext uri="{FF2B5EF4-FFF2-40B4-BE49-F238E27FC236}">
+              <a16:creationId xmlns:a16="http://schemas.microsoft.com/office/drawing/2014/main" id="{29949692-4242-1BDD-62FE-734DDB9A1C35}"/>
+            </a:ext>
+          </a:extLst>
+        </p:cNvPr>
         <p:cNvGrpSpPr/>
         <p:nvPr/>
       </p:nvGrpSpPr>
@@ -3346,208 +2996,36 @@
           <a:chExt cx="0" cy="0"/>
         </a:xfrm>
       </p:grpSpPr>
-      <p:sp useBgFill="1">
-        <p:nvSpPr>
-          <p:cNvPr id="55" name="Rectangle 54">
+      <p:sp>
+        <p:nvSpPr>
+          <p:cNvPr id="3" name="Subtitle 2">
             <a:extLst>
               <a:ext uri="{FF2B5EF4-FFF2-40B4-BE49-F238E27FC236}">
-                <a16:creationId xmlns:a16="http://schemas.microsoft.com/office/drawing/2014/main" id="{0671A8AE-40A1-4631-A6B8-581AFF065482}"/>
-              </a:ext>
-              <a:ext uri="{C183D7F6-B498-43B3-948B-1728B52AA6E4}">
-                <adec:decorative xmlns:adec="http://schemas.microsoft.com/office/drawing/2017/decorative" val="1"/>
+                <a16:creationId xmlns:a16="http://schemas.microsoft.com/office/drawing/2014/main" id="{F5D3E287-021A-C1DA-0AA5-23097B43302E}"/>
               </a:ext>
             </a:extLst>
           </p:cNvPr>
           <p:cNvSpPr>
-            <a:spLocks noGrp="1" noRot="1" noChangeAspect="1" noMove="1" noResize="1" noEditPoints="1" noAdjustHandles="1" noChangeArrowheads="1" noChangeShapeType="1" noTextEdit="1"/>
-          </p:cNvSpPr>
-          <p:nvPr>
-            <p:extLst>
-              <p:ext uri="{386F3935-93C4-4BCD-93E2-E3B085C9AB24}">
-                <p16:designElem xmlns:p16="http://schemas.microsoft.com/office/powerpoint/2015/main" val="1"/>
-              </p:ext>
-            </p:extLst>
+            <a:spLocks noGrp="1"/>
+          </p:cNvSpPr>
+          <p:nvPr>
+            <p:ph type="subTitle" idx="1"/>
           </p:nvPr>
         </p:nvSpPr>
         <p:spPr>
           <a:xfrm>
-            <a:off x="0" y="0"/>
-            <a:ext cx="12192000" cy="6858000"/>
-          </a:xfrm>
-          <a:prstGeom prst="rect">
-            <a:avLst/>
-          </a:prstGeom>
-          <a:ln>
-            <a:noFill/>
-          </a:ln>
-        </p:spPr>
-        <p:style>
-          <a:lnRef idx="2">
-            <a:schemeClr val="accent1">
-              <a:shade val="50000"/>
-            </a:schemeClr>
-          </a:lnRef>
-          <a:fillRef idx="1">
-            <a:schemeClr val="accent1"/>
-          </a:fillRef>
-          <a:effectRef idx="0">
-            <a:schemeClr val="accent1"/>
-          </a:effectRef>
-          <a:fontRef idx="minor">
-            <a:schemeClr val="lt1"/>
-          </a:fontRef>
-        </p:style>
-        <p:txBody>
-          <a:bodyPr rtlCol="0" anchor="ctr"/>
-          <a:lstStyle/>
-          <a:p>
-            <a:pPr algn="ctr"/>
-            <a:endParaRPr lang="en-US"/>
-          </a:p>
-        </p:txBody>
-      </p:sp>
-      <p:pic>
-        <p:nvPicPr>
-          <p:cNvPr id="5" name="Picture 4">
-            <a:extLst>
-              <a:ext uri="{FF2B5EF4-FFF2-40B4-BE49-F238E27FC236}">
-                <a16:creationId xmlns:a16="http://schemas.microsoft.com/office/drawing/2014/main" id="{1187DA14-CBBD-C8B6-B730-2FD80E3F728E}"/>
-              </a:ext>
-            </a:extLst>
-          </p:cNvPr>
-          <p:cNvPicPr>
-            <a:picLocks noChangeAspect="1"/>
-          </p:cNvPicPr>
-          <p:nvPr/>
-        </p:nvPicPr>
-        <p:blipFill>
-          <a:blip r:embed="rId2"/>
-          <a:srcRect l="4340" r="17526" b="7393"/>
-          <a:stretch>
-            <a:fillRect/>
-          </a:stretch>
-        </p:blipFill>
-        <p:spPr>
-          <a:xfrm>
-            <a:off x="3523488" y="10"/>
-            <a:ext cx="8668512" cy="6857990"/>
-          </a:xfrm>
-          <a:prstGeom prst="rect">
-            <a:avLst/>
-          </a:prstGeom>
-        </p:spPr>
-      </p:pic>
-      <p:sp>
-        <p:nvSpPr>
-          <p:cNvPr id="57" name="Rectangle 56">
-            <a:extLst>
-              <a:ext uri="{FF2B5EF4-FFF2-40B4-BE49-F238E27FC236}">
-                <a16:creationId xmlns:a16="http://schemas.microsoft.com/office/drawing/2014/main" id="{AB58EF07-17C2-48CF-ABB0-EEF1F17CB8F0}"/>
-              </a:ext>
-              <a:ext uri="{C183D7F6-B498-43B3-948B-1728B52AA6E4}">
-                <adec:decorative xmlns:adec="http://schemas.microsoft.com/office/drawing/2017/decorative" val="1"/>
-              </a:ext>
-            </a:extLst>
-          </p:cNvPr>
-          <p:cNvSpPr>
-            <a:spLocks noGrp="1" noRot="1" noChangeAspect="1" noMove="1" noResize="1" noEditPoints="1" noAdjustHandles="1" noChangeArrowheads="1" noChangeShapeType="1" noTextEdit="1"/>
-          </p:cNvSpPr>
-          <p:nvPr>
-            <p:extLst>
-              <p:ext uri="{386F3935-93C4-4BCD-93E2-E3B085C9AB24}">
-                <p16:designElem xmlns:p16="http://schemas.microsoft.com/office/powerpoint/2015/main" val="1"/>
-              </p:ext>
-            </p:extLst>
-          </p:nvPr>
-        </p:nvSpPr>
-        <p:spPr>
-          <a:xfrm>
-            <a:off x="3" y="0"/>
-            <a:ext cx="9339206" cy="6858000"/>
-          </a:xfrm>
-          <a:prstGeom prst="rect">
-            <a:avLst/>
-          </a:prstGeom>
-          <a:gradFill>
-            <a:gsLst>
-              <a:gs pos="58000">
-                <a:schemeClr val="tx1"/>
-              </a:gs>
-              <a:gs pos="33000">
-                <a:schemeClr val="tx1">
-                  <a:alpha val="64000"/>
-                </a:schemeClr>
-              </a:gs>
-              <a:gs pos="0">
-                <a:schemeClr val="tx1">
-                  <a:alpha val="0"/>
-                </a:schemeClr>
-              </a:gs>
-              <a:gs pos="100000">
-                <a:schemeClr val="tx1"/>
-              </a:gs>
-            </a:gsLst>
-            <a:lin ang="10800000" scaled="0"/>
-          </a:gradFill>
-          <a:ln>
-            <a:noFill/>
-          </a:ln>
-        </p:spPr>
-        <p:style>
-          <a:lnRef idx="2">
-            <a:schemeClr val="accent1">
-              <a:shade val="50000"/>
-            </a:schemeClr>
-          </a:lnRef>
-          <a:fillRef idx="1">
-            <a:schemeClr val="accent1"/>
-          </a:fillRef>
-          <a:effectRef idx="0">
-            <a:schemeClr val="accent1"/>
-          </a:effectRef>
-          <a:fontRef idx="minor">
-            <a:schemeClr val="lt1"/>
-          </a:fontRef>
-        </p:style>
-        <p:txBody>
-          <a:bodyPr rtlCol="0" anchor="ctr"/>
-          <a:lstStyle/>
-          <a:p>
-            <a:pPr algn="ctr"/>
-            <a:endParaRPr lang="en-US" dirty="0"/>
-          </a:p>
-        </p:txBody>
-      </p:sp>
-      <p:sp>
-        <p:nvSpPr>
-          <p:cNvPr id="3" name="Subtitle 2">
-            <a:extLst>
-              <a:ext uri="{FF2B5EF4-FFF2-40B4-BE49-F238E27FC236}">
-                <a16:creationId xmlns:a16="http://schemas.microsoft.com/office/drawing/2014/main" id="{BDDF4048-2958-B759-F7D1-45755BE99DD7}"/>
-              </a:ext>
-            </a:extLst>
-          </p:cNvPr>
-          <p:cNvSpPr>
-            <a:spLocks noGrp="1"/>
-          </p:cNvSpPr>
-          <p:nvPr>
-            <p:ph type="subTitle" idx="1"/>
-          </p:nvPr>
-        </p:nvSpPr>
-        <p:spPr>
-          <a:xfrm>
-            <a:off x="505953" y="1397671"/>
-            <a:ext cx="4023359" cy="1208141"/>
+            <a:off x="170120" y="127591"/>
+            <a:ext cx="8739101" cy="6549656"/>
           </a:xfrm>
         </p:spPr>
         <p:txBody>
           <a:bodyPr>
-            <a:normAutofit fontScale="85000" lnSpcReduction="10000"/>
+            <a:noAutofit/>
           </a:bodyPr>
           <a:lstStyle/>
           <a:p>
             <a:pPr algn="l"/>
-            <a:endParaRPr lang="en-US" sz="2000" dirty="0">
+            <a:endParaRPr lang="en-US" sz="7200" dirty="0">
               <a:solidFill>
                 <a:schemeClr val="bg1"/>
               </a:solidFill>
@@ -3558,11 +3036,11 @@
           <a:p>
             <a:pPr algn="l"/>
             <a:r>
-              <a:rPr lang="en-US" sz="4000" i="1" dirty="0">
+              <a:rPr lang="en-US" sz="7200" dirty="0">
                 <a:solidFill>
                   <a:schemeClr val="bg1"/>
                 </a:solidFill>
-                <a:latin typeface="Avenir Oblique" panose="02000503020000020003" pitchFamily="2" charset="0"/>
+                <a:latin typeface="Avenir Medium" panose="02000503020000020003" pitchFamily="2" charset="0"/>
                 <a:ea typeface="Bodoni Ornaments" pitchFamily="2" charset="0"/>
               </a:rPr>
               <a:t>Old Rugged Cross</a:t>
@@ -3570,277 +3048,16 @@
           </a:p>
         </p:txBody>
       </p:sp>
-      <p:sp>
-        <p:nvSpPr>
-          <p:cNvPr id="54" name="Rectangle 53">
-            <a:extLst>
-              <a:ext uri="{FF2B5EF4-FFF2-40B4-BE49-F238E27FC236}">
-                <a16:creationId xmlns:a16="http://schemas.microsoft.com/office/drawing/2014/main" id="{AF2F604E-43BE-4DC3-B983-E071523364F8}"/>
-              </a:ext>
-              <a:ext uri="{C183D7F6-B498-43B3-948B-1728B52AA6E4}">
-                <adec:decorative xmlns:adec="http://schemas.microsoft.com/office/drawing/2017/decorative" val="1"/>
-              </a:ext>
-            </a:extLst>
-          </p:cNvPr>
-          <p:cNvSpPr>
-            <a:spLocks noGrp="1" noRot="1" noChangeAspect="1" noMove="1" noResize="1" noEditPoints="1" noAdjustHandles="1" noChangeArrowheads="1" noChangeShapeType="1" noTextEdit="1"/>
-          </p:cNvSpPr>
-          <p:nvPr>
-            <p:extLst>
-              <p:ext uri="{386F3935-93C4-4BCD-93E2-E3B085C9AB24}">
-                <p16:designElem xmlns:p16="http://schemas.microsoft.com/office/powerpoint/2015/main" val="1"/>
-              </p:ext>
-            </p:extLst>
-          </p:nvPr>
-        </p:nvSpPr>
-        <p:spPr>
-          <a:xfrm rot="5400000">
-            <a:off x="759921" y="346791"/>
-            <a:ext cx="146304" cy="704088"/>
-          </a:xfrm>
-          <a:prstGeom prst="rect">
-            <a:avLst/>
-          </a:prstGeom>
-          <a:solidFill>
-            <a:schemeClr val="accent2"/>
-          </a:solidFill>
-          <a:ln>
-            <a:noFill/>
-          </a:ln>
-        </p:spPr>
-        <p:style>
-          <a:lnRef idx="2">
-            <a:schemeClr val="accent1">
-              <a:shade val="50000"/>
-            </a:schemeClr>
-          </a:lnRef>
-          <a:fillRef idx="1">
-            <a:schemeClr val="accent1"/>
-          </a:fillRef>
-          <a:effectRef idx="0">
-            <a:schemeClr val="accent1"/>
-          </a:effectRef>
-          <a:fontRef idx="minor">
-            <a:schemeClr val="lt1"/>
-          </a:fontRef>
-        </p:style>
-        <p:txBody>
-          <a:bodyPr rtlCol="0" anchor="ctr"/>
-          <a:lstStyle/>
-          <a:p>
-            <a:pPr algn="ctr"/>
-            <a:endParaRPr lang="en-US">
-              <a:solidFill>
-                <a:prstClr val="white"/>
-              </a:solidFill>
-              <a:latin typeface="Calibri" panose="020F0502020204030204"/>
-            </a:endParaRPr>
-          </a:p>
-        </p:txBody>
-      </p:sp>
-      <p:sp>
-        <p:nvSpPr>
-          <p:cNvPr id="56" name="Rectangle 55">
-            <a:extLst>
-              <a:ext uri="{FF2B5EF4-FFF2-40B4-BE49-F238E27FC236}">
-                <a16:creationId xmlns:a16="http://schemas.microsoft.com/office/drawing/2014/main" id="{08C9B587-E65E-4B52-B37C-ABEBB6E87928}"/>
-              </a:ext>
-              <a:ext uri="{C183D7F6-B498-43B3-948B-1728B52AA6E4}">
-                <adec:decorative xmlns:adec="http://schemas.microsoft.com/office/drawing/2017/decorative" val="1"/>
-              </a:ext>
-            </a:extLst>
-          </p:cNvPr>
-          <p:cNvSpPr>
-            <a:spLocks noGrp="1" noRot="1" noChangeAspect="1" noMove="1" noResize="1" noEditPoints="1" noAdjustHandles="1" noChangeArrowheads="1" noChangeShapeType="1" noTextEdit="1"/>
-          </p:cNvSpPr>
-          <p:nvPr>
-            <p:extLst>
-              <p:ext uri="{386F3935-93C4-4BCD-93E2-E3B085C9AB24}">
-                <p16:designElem xmlns:p16="http://schemas.microsoft.com/office/powerpoint/2015/main" val="1"/>
-              </p:ext>
-            </p:extLst>
-          </p:nvPr>
-        </p:nvSpPr>
-        <p:spPr>
-          <a:xfrm>
-            <a:off x="481029" y="4546920"/>
-            <a:ext cx="3977640" cy="18288"/>
-          </a:xfrm>
-          <a:prstGeom prst="rect">
-            <a:avLst/>
-          </a:prstGeom>
-          <a:solidFill>
-            <a:schemeClr val="tx1"/>
-          </a:solidFill>
-          <a:ln w="3175">
-            <a:noFill/>
-          </a:ln>
-          <a:effectLst/>
-        </p:spPr>
-        <p:style>
-          <a:lnRef idx="2">
-            <a:schemeClr val="accent1">
-              <a:shade val="50000"/>
-            </a:schemeClr>
-          </a:lnRef>
-          <a:fillRef idx="1">
-            <a:schemeClr val="accent1"/>
-          </a:fillRef>
-          <a:effectRef idx="0">
-            <a:schemeClr val="accent1"/>
-          </a:effectRef>
-          <a:fontRef idx="minor">
-            <a:schemeClr val="lt1"/>
-          </a:fontRef>
-        </p:style>
-        <p:txBody>
-          <a:bodyPr rtlCol="0" anchor="ctr"/>
-          <a:lstStyle/>
-          <a:p>
-            <a:pPr marL="0" marR="0" lvl="0" indent="0" algn="ctr" defTabSz="914400" rtl="0" eaLnBrk="1" fontAlgn="auto" latinLnBrk="0" hangingPunct="1">
-              <a:lnSpc>
-                <a:spcPct val="100000"/>
-              </a:lnSpc>
-              <a:spcBef>
-                <a:spcPts val="0"/>
-              </a:spcBef>
-              <a:spcAft>
-                <a:spcPts val="0"/>
-              </a:spcAft>
-              <a:buClrTx/>
-              <a:buSzTx/>
-              <a:buFontTx/>
-              <a:buNone/>
-              <a:tabLst/>
-              <a:defRPr/>
-            </a:pPr>
-            <a:endParaRPr kumimoji="0" lang="en-US" sz="1800" b="0" i="0" u="none" strike="noStrike" kern="1200" cap="none" spc="0" normalizeH="0" baseline="0" noProof="0">
-              <a:ln>
-                <a:noFill/>
-              </a:ln>
-              <a:solidFill>
-                <a:prstClr val="white"/>
-              </a:solidFill>
-              <a:effectLst/>
-              <a:uLnTx/>
-              <a:uFillTx/>
-              <a:latin typeface="Calibri" panose="020F0502020204030204"/>
-              <a:ea typeface="+mn-ea"/>
-              <a:cs typeface="+mn-cs"/>
-            </a:endParaRPr>
-          </a:p>
-        </p:txBody>
-      </p:sp>
     </p:spTree>
     <p:extLst>
       <p:ext uri="{BB962C8B-B14F-4D97-AF65-F5344CB8AC3E}">
-        <p14:creationId xmlns:p14="http://schemas.microsoft.com/office/powerpoint/2010/main" val="1687888858"/>
+        <p14:creationId xmlns:p14="http://schemas.microsoft.com/office/powerpoint/2010/main" val="89724268"/>
       </p:ext>
     </p:extLst>
   </p:cSld>
   <p:clrMapOvr>
     <a:masterClrMapping/>
   </p:clrMapOvr>
-  <p:timing>
-    <p:tnLst>
-      <p:par>
-        <p:cTn id="1" dur="indefinite" restart="never" nodeType="tmRoot">
-          <p:childTnLst>
-            <p:seq concurrent="1" nextAc="seek">
-              <p:cTn id="2" dur="indefinite" nodeType="mainSeq">
-                <p:childTnLst>
-                  <p:par>
-                    <p:cTn id="3" fill="hold">
-                      <p:stCondLst>
-                        <p:cond delay="indefinite"/>
-                        <p:cond evt="onBegin" delay="0">
-                          <p:tn val="2"/>
-                        </p:cond>
-                      </p:stCondLst>
-                      <p:childTnLst>
-                        <p:par>
-                          <p:cTn id="4" fill="hold">
-                            <p:stCondLst>
-                              <p:cond delay="0"/>
-                            </p:stCondLst>
-                            <p:childTnLst>
-                              <p:par>
-                                <p:cTn id="5" presetID="10" presetClass="entr" presetSubtype="0" fill="hold" grpId="0" nodeType="withEffect">
-                                  <p:stCondLst>
-                                    <p:cond delay="2000"/>
-                                  </p:stCondLst>
-                                  <p:iterate type="lt">
-                                    <p:tmPct val="10000"/>
-                                  </p:iterate>
-                                  <p:childTnLst>
-                                    <p:set>
-                                      <p:cBhvr>
-                                        <p:cTn id="6" dur="1" fill="hold">
-                                          <p:stCondLst>
-                                            <p:cond delay="0"/>
-                                          </p:stCondLst>
-                                        </p:cTn>
-                                        <p:tgtEl>
-                                          <p:spTgt spid="3">
-                                            <p:txEl>
-                                              <p:pRg st="1" end="1"/>
-                                            </p:txEl>
-                                          </p:spTgt>
-                                        </p:tgtEl>
-                                        <p:attrNameLst>
-                                          <p:attrName>style.visibility</p:attrName>
-                                        </p:attrNameLst>
-                                      </p:cBhvr>
-                                      <p:to>
-                                        <p:strVal val="visible"/>
-                                      </p:to>
-                                    </p:set>
-                                    <p:animEffect transition="in" filter="fade">
-                                      <p:cBhvr>
-                                        <p:cTn id="7" dur="400"/>
-                                        <p:tgtEl>
-                                          <p:spTgt spid="3">
-                                            <p:txEl>
-                                              <p:pRg st="1" end="1"/>
-                                            </p:txEl>
-                                          </p:spTgt>
-                                        </p:tgtEl>
-                                      </p:cBhvr>
-                                    </p:animEffect>
-                                  </p:childTnLst>
-                                </p:cTn>
-                              </p:par>
-                            </p:childTnLst>
-                          </p:cTn>
-                        </p:par>
-                      </p:childTnLst>
-                    </p:cTn>
-                  </p:par>
-                </p:childTnLst>
-              </p:cTn>
-              <p:prevCondLst>
-                <p:cond evt="onPrev" delay="0">
-                  <p:tgtEl>
-                    <p:sldTgt/>
-                  </p:tgtEl>
-                </p:cond>
-              </p:prevCondLst>
-              <p:nextCondLst>
-                <p:cond evt="onNext" delay="0">
-                  <p:tgtEl>
-                    <p:sldTgt/>
-                  </p:tgtEl>
-                </p:cond>
-              </p:nextCondLst>
-            </p:seq>
-          </p:childTnLst>
-        </p:cTn>
-      </p:par>
-    </p:tnLst>
-    <p:bldLst>
-      <p:bldP spid="3" grpId="0" build="p"/>
-    </p:bldLst>
-  </p:timing>
 </p:sld>
 </file>
 
@@ -3850,7 +3067,1066 @@
     <p:bg>
       <p:bgPr>
         <a:solidFill>
-          <a:schemeClr val="accent1"/>
+          <a:schemeClr val="tx1"/>
+        </a:solidFill>
+        <a:effectLst/>
+      </p:bgPr>
+    </p:bg>
+    <p:spTree>
+      <p:nvGrpSpPr>
+        <p:cNvPr id="1" name="">
+          <a:extLst>
+            <a:ext uri="{FF2B5EF4-FFF2-40B4-BE49-F238E27FC236}">
+              <a16:creationId xmlns:a16="http://schemas.microsoft.com/office/drawing/2014/main" id="{A1F2B186-6AAF-F54B-D60E-E0AF57265D0C}"/>
+            </a:ext>
+          </a:extLst>
+        </p:cNvPr>
+        <p:cNvGrpSpPr/>
+        <p:nvPr/>
+      </p:nvGrpSpPr>
+      <p:grpSpPr>
+        <a:xfrm>
+          <a:off x="0" y="0"/>
+          <a:ext cx="0" cy="0"/>
+          <a:chOff x="0" y="0"/>
+          <a:chExt cx="0" cy="0"/>
+        </a:xfrm>
+      </p:grpSpPr>
+      <p:sp>
+        <p:nvSpPr>
+          <p:cNvPr id="3" name="Subtitle 2">
+            <a:extLst>
+              <a:ext uri="{FF2B5EF4-FFF2-40B4-BE49-F238E27FC236}">
+                <a16:creationId xmlns:a16="http://schemas.microsoft.com/office/drawing/2014/main" id="{4119F4E9-64FA-F6A3-B49C-DB67473EBBB9}"/>
+              </a:ext>
+            </a:extLst>
+          </p:cNvPr>
+          <p:cNvSpPr>
+            <a:spLocks noGrp="1"/>
+          </p:cNvSpPr>
+          <p:nvPr>
+            <p:ph type="subTitle" idx="1"/>
+          </p:nvPr>
+        </p:nvSpPr>
+        <p:spPr>
+          <a:xfrm>
+            <a:off x="259492" y="197709"/>
+            <a:ext cx="8563232" cy="6314302"/>
+          </a:xfrm>
+        </p:spPr>
+        <p:txBody>
+          <a:bodyPr>
+            <a:noAutofit/>
+          </a:bodyPr>
+          <a:lstStyle/>
+          <a:p>
+            <a:endParaRPr lang="en-US" sz="4000" dirty="0">
+              <a:solidFill>
+                <a:schemeClr val="bg1"/>
+              </a:solidFill>
+              <a:latin typeface="Avenir Medium" panose="02000503020000020003" pitchFamily="2" charset="0"/>
+              <a:ea typeface="Bodoni Ornaments" pitchFamily="2" charset="0"/>
+            </a:endParaRPr>
+          </a:p>
+          <a:p>
+            <a:endParaRPr lang="en-US" sz="4000" dirty="0">
+              <a:solidFill>
+                <a:schemeClr val="bg1"/>
+              </a:solidFill>
+              <a:latin typeface="Avenir Medium" panose="02000503020000020003" pitchFamily="2" charset="0"/>
+              <a:ea typeface="Bodoni Ornaments" pitchFamily="2" charset="0"/>
+            </a:endParaRPr>
+          </a:p>
+          <a:p>
+            <a:r>
+              <a:rPr lang="en-US" sz="4000" dirty="0">
+                <a:solidFill>
+                  <a:schemeClr val="bg1"/>
+                </a:solidFill>
+                <a:latin typeface="Avenir Medium" panose="02000503020000020003" pitchFamily="2" charset="0"/>
+                <a:ea typeface="Bodoni Ornaments" pitchFamily="2" charset="0"/>
+              </a:rPr>
+              <a:t>So I’ll cherish the old rugged cross</a:t>
+            </a:r>
+          </a:p>
+          <a:p>
+            <a:r>
+              <a:rPr lang="en-US" sz="4000" dirty="0">
+                <a:solidFill>
+                  <a:schemeClr val="bg1"/>
+                </a:solidFill>
+                <a:latin typeface="Avenir Medium" panose="02000503020000020003" pitchFamily="2" charset="0"/>
+                <a:ea typeface="Bodoni Ornaments" pitchFamily="2" charset="0"/>
+              </a:rPr>
+              <a:t>Till my trophies at last I lay down</a:t>
+            </a:r>
+          </a:p>
+          <a:p>
+            <a:r>
+              <a:rPr lang="en-US" sz="4000" dirty="0">
+                <a:solidFill>
+                  <a:schemeClr val="bg1"/>
+                </a:solidFill>
+                <a:latin typeface="Avenir Medium" panose="02000503020000020003" pitchFamily="2" charset="0"/>
+                <a:ea typeface="Bodoni Ornaments" pitchFamily="2" charset="0"/>
+              </a:rPr>
+              <a:t>I will cling to the old rugged cross  </a:t>
+            </a:r>
+          </a:p>
+          <a:p>
+            <a:r>
+              <a:rPr lang="en-US" sz="4000" dirty="0">
+                <a:solidFill>
+                  <a:schemeClr val="bg1"/>
+                </a:solidFill>
+                <a:latin typeface="Avenir Medium" panose="02000503020000020003" pitchFamily="2" charset="0"/>
+                <a:ea typeface="Bodoni Ornaments" pitchFamily="2" charset="0"/>
+              </a:rPr>
+              <a:t>And exchange it some day </a:t>
+            </a:r>
+          </a:p>
+          <a:p>
+            <a:r>
+              <a:rPr lang="en-US" sz="4000" dirty="0">
+                <a:solidFill>
+                  <a:schemeClr val="bg1"/>
+                </a:solidFill>
+                <a:latin typeface="Avenir Medium" panose="02000503020000020003" pitchFamily="2" charset="0"/>
+                <a:ea typeface="Bodoni Ornaments" pitchFamily="2" charset="0"/>
+              </a:rPr>
+              <a:t>for a crown</a:t>
+            </a:r>
+          </a:p>
+          <a:p>
+            <a:endParaRPr lang="en-US" sz="4000" dirty="0">
+              <a:solidFill>
+                <a:schemeClr val="bg1"/>
+              </a:solidFill>
+              <a:latin typeface="Avenir Medium" panose="02000503020000020003" pitchFamily="2" charset="0"/>
+              <a:ea typeface="Bodoni Ornaments" pitchFamily="2" charset="0"/>
+            </a:endParaRPr>
+          </a:p>
+        </p:txBody>
+      </p:sp>
+      <p:sp>
+        <p:nvSpPr>
+          <p:cNvPr id="2" name="TextBox 1">
+            <a:extLst>
+              <a:ext uri="{FF2B5EF4-FFF2-40B4-BE49-F238E27FC236}">
+                <a16:creationId xmlns:a16="http://schemas.microsoft.com/office/drawing/2014/main" id="{D4985A6C-F037-99B0-7792-98CF169CF99C}"/>
+              </a:ext>
+            </a:extLst>
+          </p:cNvPr>
+          <p:cNvSpPr txBox="1"/>
+          <p:nvPr/>
+        </p:nvSpPr>
+        <p:spPr>
+          <a:xfrm>
+            <a:off x="7390614" y="6488668"/>
+            <a:ext cx="1753386" cy="369332"/>
+          </a:xfrm>
+          <a:prstGeom prst="rect">
+            <a:avLst/>
+          </a:prstGeom>
+          <a:noFill/>
+        </p:spPr>
+        <p:txBody>
+          <a:bodyPr wrap="square" rtlCol="0">
+            <a:spAutoFit/>
+          </a:bodyPr>
+          <a:lstStyle/>
+          <a:p>
+            <a:r>
+              <a:rPr lang="en-US" dirty="0">
+                <a:solidFill>
+                  <a:schemeClr val="bg1"/>
+                </a:solidFill>
+              </a:rPr>
+              <a:t>CCLI#7102397</a:t>
+            </a:r>
+          </a:p>
+        </p:txBody>
+      </p:sp>
+    </p:spTree>
+    <p:extLst>
+      <p:ext uri="{BB962C8B-B14F-4D97-AF65-F5344CB8AC3E}">
+        <p14:creationId xmlns:p14="http://schemas.microsoft.com/office/powerpoint/2010/main" val="175485558"/>
+      </p:ext>
+    </p:extLst>
+  </p:cSld>
+  <p:clrMapOvr>
+    <a:masterClrMapping/>
+  </p:clrMapOvr>
+</p:sld>
+</file>
+
+<file path=ppt/slides/slide2.xml><?xml version="1.0" encoding="utf-8"?>
+<p:sld xmlns:a="http://schemas.openxmlformats.org/drawingml/2006/main" xmlns:r="http://schemas.openxmlformats.org/officeDocument/2006/relationships" xmlns:p="http://schemas.openxmlformats.org/presentationml/2006/main">
+  <p:cSld>
+    <p:bg>
+      <p:bgPr>
+        <a:solidFill>
+          <a:schemeClr val="tx1"/>
+        </a:solidFill>
+        <a:effectLst/>
+      </p:bgPr>
+    </p:bg>
+    <p:spTree>
+      <p:nvGrpSpPr>
+        <p:cNvPr id="1" name="">
+          <a:extLst>
+            <a:ext uri="{FF2B5EF4-FFF2-40B4-BE49-F238E27FC236}">
+              <a16:creationId xmlns:a16="http://schemas.microsoft.com/office/drawing/2014/main" id="{7788CD03-7DF8-6D01-AD0A-B66F7B2194AA}"/>
+            </a:ext>
+          </a:extLst>
+        </p:cNvPr>
+        <p:cNvGrpSpPr/>
+        <p:nvPr/>
+      </p:nvGrpSpPr>
+      <p:grpSpPr>
+        <a:xfrm>
+          <a:off x="0" y="0"/>
+          <a:ext cx="0" cy="0"/>
+          <a:chOff x="0" y="0"/>
+          <a:chExt cx="0" cy="0"/>
+        </a:xfrm>
+      </p:grpSpPr>
+      <p:sp>
+        <p:nvSpPr>
+          <p:cNvPr id="3" name="Subtitle 2">
+            <a:extLst>
+              <a:ext uri="{FF2B5EF4-FFF2-40B4-BE49-F238E27FC236}">
+                <a16:creationId xmlns:a16="http://schemas.microsoft.com/office/drawing/2014/main" id="{BB2716E9-BD45-484C-2C0B-CCA12388B03B}"/>
+              </a:ext>
+            </a:extLst>
+          </p:cNvPr>
+          <p:cNvSpPr>
+            <a:spLocks noGrp="1"/>
+          </p:cNvSpPr>
+          <p:nvPr>
+            <p:ph type="subTitle" idx="1"/>
+          </p:nvPr>
+        </p:nvSpPr>
+        <p:spPr>
+          <a:xfrm>
+            <a:off x="512123" y="172995"/>
+            <a:ext cx="8119754" cy="6376086"/>
+          </a:xfrm>
+        </p:spPr>
+        <p:txBody>
+          <a:bodyPr>
+            <a:noAutofit/>
+          </a:bodyPr>
+          <a:lstStyle/>
+          <a:p>
+            <a:endParaRPr lang="en-US" sz="4000" dirty="0">
+              <a:solidFill>
+                <a:schemeClr val="bg1"/>
+              </a:solidFill>
+              <a:latin typeface="Avenir Medium" panose="02000503020000020003" pitchFamily="2" charset="0"/>
+              <a:ea typeface="Bodoni Ornaments" pitchFamily="2" charset="0"/>
+            </a:endParaRPr>
+          </a:p>
+          <a:p>
+            <a:endParaRPr lang="en-US" sz="4000" dirty="0">
+              <a:solidFill>
+                <a:schemeClr val="bg1"/>
+              </a:solidFill>
+              <a:latin typeface="Avenir Medium" panose="02000503020000020003" pitchFamily="2" charset="0"/>
+              <a:ea typeface="Bodoni Ornaments" pitchFamily="2" charset="0"/>
+            </a:endParaRPr>
+          </a:p>
+          <a:p>
+            <a:r>
+              <a:rPr lang="en-US" sz="4000" dirty="0">
+                <a:solidFill>
+                  <a:schemeClr val="bg1"/>
+                </a:solidFill>
+                <a:latin typeface="Avenir Medium" panose="02000503020000020003" pitchFamily="2" charset="0"/>
+                <a:ea typeface="Bodoni Ornaments" pitchFamily="2" charset="0"/>
+              </a:rPr>
+              <a:t>On a hill far away </a:t>
+            </a:r>
+          </a:p>
+          <a:p>
+            <a:r>
+              <a:rPr lang="en-US" sz="4000" dirty="0">
+                <a:solidFill>
+                  <a:schemeClr val="bg1"/>
+                </a:solidFill>
+                <a:latin typeface="Avenir Medium" panose="02000503020000020003" pitchFamily="2" charset="0"/>
+                <a:ea typeface="Bodoni Ornaments" pitchFamily="2" charset="0"/>
+              </a:rPr>
+              <a:t>stood an old rugged cross,  </a:t>
+            </a:r>
+          </a:p>
+          <a:p>
+            <a:r>
+              <a:rPr lang="en-US" sz="4000" dirty="0">
+                <a:solidFill>
+                  <a:schemeClr val="bg1"/>
+                </a:solidFill>
+                <a:latin typeface="Avenir Medium" panose="02000503020000020003" pitchFamily="2" charset="0"/>
+                <a:ea typeface="Bodoni Ornaments" pitchFamily="2" charset="0"/>
+              </a:rPr>
+              <a:t>The emblem of </a:t>
+            </a:r>
+            <a:r>
+              <a:rPr lang="en-US" sz="4000" dirty="0" err="1">
+                <a:solidFill>
+                  <a:schemeClr val="bg1"/>
+                </a:solidFill>
+                <a:latin typeface="Avenir Medium" panose="02000503020000020003" pitchFamily="2" charset="0"/>
+                <a:ea typeface="Bodoni Ornaments" pitchFamily="2" charset="0"/>
+              </a:rPr>
+              <a:t>suff’ring</a:t>
+            </a:r>
+            <a:r>
+              <a:rPr lang="en-US" sz="4000" dirty="0">
+                <a:solidFill>
+                  <a:schemeClr val="bg1"/>
+                </a:solidFill>
+                <a:latin typeface="Avenir Medium" panose="02000503020000020003" pitchFamily="2" charset="0"/>
+                <a:ea typeface="Bodoni Ornaments" pitchFamily="2" charset="0"/>
+              </a:rPr>
+              <a:t> </a:t>
+            </a:r>
+          </a:p>
+          <a:p>
+            <a:r>
+              <a:rPr lang="en-US" sz="4000" dirty="0">
+                <a:solidFill>
+                  <a:schemeClr val="bg1"/>
+                </a:solidFill>
+                <a:latin typeface="Avenir Medium" panose="02000503020000020003" pitchFamily="2" charset="0"/>
+                <a:ea typeface="Bodoni Ornaments" pitchFamily="2" charset="0"/>
+              </a:rPr>
+              <a:t>and shame,</a:t>
+            </a:r>
+          </a:p>
+        </p:txBody>
+      </p:sp>
+    </p:spTree>
+    <p:extLst>
+      <p:ext uri="{BB962C8B-B14F-4D97-AF65-F5344CB8AC3E}">
+        <p14:creationId xmlns:p14="http://schemas.microsoft.com/office/powerpoint/2010/main" val="2649732973"/>
+      </p:ext>
+    </p:extLst>
+  </p:cSld>
+  <p:clrMapOvr>
+    <a:masterClrMapping/>
+  </p:clrMapOvr>
+</p:sld>
+</file>
+
+<file path=ppt/slides/slide3.xml><?xml version="1.0" encoding="utf-8"?>
+<p:sld xmlns:a="http://schemas.openxmlformats.org/drawingml/2006/main" xmlns:r="http://schemas.openxmlformats.org/officeDocument/2006/relationships" xmlns:p="http://schemas.openxmlformats.org/presentationml/2006/main">
+  <p:cSld>
+    <p:bg>
+      <p:bgPr>
+        <a:solidFill>
+          <a:schemeClr val="tx1"/>
+        </a:solidFill>
+        <a:effectLst/>
+      </p:bgPr>
+    </p:bg>
+    <p:spTree>
+      <p:nvGrpSpPr>
+        <p:cNvPr id="1" name="">
+          <a:extLst>
+            <a:ext uri="{FF2B5EF4-FFF2-40B4-BE49-F238E27FC236}">
+              <a16:creationId xmlns:a16="http://schemas.microsoft.com/office/drawing/2014/main" id="{D8BDBFFC-C2E7-FF56-08B2-79D8D2E20D0E}"/>
+            </a:ext>
+          </a:extLst>
+        </p:cNvPr>
+        <p:cNvGrpSpPr/>
+        <p:nvPr/>
+      </p:nvGrpSpPr>
+      <p:grpSpPr>
+        <a:xfrm>
+          <a:off x="0" y="0"/>
+          <a:ext cx="0" cy="0"/>
+          <a:chOff x="0" y="0"/>
+          <a:chExt cx="0" cy="0"/>
+        </a:xfrm>
+      </p:grpSpPr>
+      <p:sp>
+        <p:nvSpPr>
+          <p:cNvPr id="3" name="Subtitle 2">
+            <a:extLst>
+              <a:ext uri="{FF2B5EF4-FFF2-40B4-BE49-F238E27FC236}">
+                <a16:creationId xmlns:a16="http://schemas.microsoft.com/office/drawing/2014/main" id="{7CB49F10-2809-A234-C867-D60729E4BBB9}"/>
+              </a:ext>
+            </a:extLst>
+          </p:cNvPr>
+          <p:cNvSpPr>
+            <a:spLocks noGrp="1"/>
+          </p:cNvSpPr>
+          <p:nvPr>
+            <p:ph type="subTitle" idx="1"/>
+          </p:nvPr>
+        </p:nvSpPr>
+        <p:spPr>
+          <a:xfrm>
+            <a:off x="247134" y="197708"/>
+            <a:ext cx="8563233" cy="6425513"/>
+          </a:xfrm>
+        </p:spPr>
+        <p:txBody>
+          <a:bodyPr>
+            <a:noAutofit/>
+          </a:bodyPr>
+          <a:lstStyle/>
+          <a:p>
+            <a:endParaRPr lang="en-US" sz="4000" dirty="0">
+              <a:solidFill>
+                <a:schemeClr val="bg1"/>
+              </a:solidFill>
+              <a:latin typeface="Avenir Medium" panose="02000503020000020003" pitchFamily="2" charset="0"/>
+              <a:ea typeface="Bodoni Ornaments" pitchFamily="2" charset="0"/>
+            </a:endParaRPr>
+          </a:p>
+          <a:p>
+            <a:endParaRPr lang="en-US" sz="4000" dirty="0">
+              <a:solidFill>
+                <a:schemeClr val="bg1"/>
+              </a:solidFill>
+              <a:latin typeface="Avenir Medium" panose="02000503020000020003" pitchFamily="2" charset="0"/>
+              <a:ea typeface="Bodoni Ornaments" pitchFamily="2" charset="0"/>
+            </a:endParaRPr>
+          </a:p>
+          <a:p>
+            <a:r>
+              <a:rPr lang="en-US" sz="4000" dirty="0">
+                <a:solidFill>
+                  <a:schemeClr val="bg1"/>
+                </a:solidFill>
+                <a:latin typeface="Avenir Medium" panose="02000503020000020003" pitchFamily="2" charset="0"/>
+                <a:ea typeface="Bodoni Ornaments" pitchFamily="2" charset="0"/>
+              </a:rPr>
+              <a:t>And I love that old cross </a:t>
+            </a:r>
+          </a:p>
+          <a:p>
+            <a:r>
+              <a:rPr lang="en-US" sz="4000" dirty="0">
+                <a:solidFill>
+                  <a:schemeClr val="bg1"/>
+                </a:solidFill>
+                <a:latin typeface="Avenir Medium" panose="02000503020000020003" pitchFamily="2" charset="0"/>
+                <a:ea typeface="Bodoni Ornaments" pitchFamily="2" charset="0"/>
+              </a:rPr>
+              <a:t>where the Dearest and Best</a:t>
+            </a:r>
+          </a:p>
+          <a:p>
+            <a:r>
+              <a:rPr lang="en-US" sz="4000" dirty="0">
+                <a:solidFill>
+                  <a:schemeClr val="bg1"/>
+                </a:solidFill>
+                <a:latin typeface="Avenir Medium" panose="02000503020000020003" pitchFamily="2" charset="0"/>
+                <a:ea typeface="Bodoni Ornaments" pitchFamily="2" charset="0"/>
+              </a:rPr>
+              <a:t>  For a world of lost sinners was slain.</a:t>
+            </a:r>
+          </a:p>
+        </p:txBody>
+      </p:sp>
+    </p:spTree>
+    <p:extLst>
+      <p:ext uri="{BB962C8B-B14F-4D97-AF65-F5344CB8AC3E}">
+        <p14:creationId xmlns:p14="http://schemas.microsoft.com/office/powerpoint/2010/main" val="2554902462"/>
+      </p:ext>
+    </p:extLst>
+  </p:cSld>
+  <p:clrMapOvr>
+    <a:masterClrMapping/>
+  </p:clrMapOvr>
+</p:sld>
+</file>
+
+<file path=ppt/slides/slide4.xml><?xml version="1.0" encoding="utf-8"?>
+<p:sld xmlns:a="http://schemas.openxmlformats.org/drawingml/2006/main" xmlns:r="http://schemas.openxmlformats.org/officeDocument/2006/relationships" xmlns:p="http://schemas.openxmlformats.org/presentationml/2006/main">
+  <p:cSld>
+    <p:bg>
+      <p:bgPr>
+        <a:solidFill>
+          <a:schemeClr val="tx1"/>
+        </a:solidFill>
+        <a:effectLst/>
+      </p:bgPr>
+    </p:bg>
+    <p:spTree>
+      <p:nvGrpSpPr>
+        <p:cNvPr id="1" name="">
+          <a:extLst>
+            <a:ext uri="{FF2B5EF4-FFF2-40B4-BE49-F238E27FC236}">
+              <a16:creationId xmlns:a16="http://schemas.microsoft.com/office/drawing/2014/main" id="{105C7419-E011-28A7-9A00-12DEA80269EF}"/>
+            </a:ext>
+          </a:extLst>
+        </p:cNvPr>
+        <p:cNvGrpSpPr/>
+        <p:nvPr/>
+      </p:nvGrpSpPr>
+      <p:grpSpPr>
+        <a:xfrm>
+          <a:off x="0" y="0"/>
+          <a:ext cx="0" cy="0"/>
+          <a:chOff x="0" y="0"/>
+          <a:chExt cx="0" cy="0"/>
+        </a:xfrm>
+      </p:grpSpPr>
+      <p:sp>
+        <p:nvSpPr>
+          <p:cNvPr id="3" name="Subtitle 2">
+            <a:extLst>
+              <a:ext uri="{FF2B5EF4-FFF2-40B4-BE49-F238E27FC236}">
+                <a16:creationId xmlns:a16="http://schemas.microsoft.com/office/drawing/2014/main" id="{76DA5D01-CA66-E4A3-D9BB-F19A657F5172}"/>
+              </a:ext>
+            </a:extLst>
+          </p:cNvPr>
+          <p:cNvSpPr>
+            <a:spLocks noGrp="1"/>
+          </p:cNvSpPr>
+          <p:nvPr>
+            <p:ph type="subTitle" idx="1"/>
+          </p:nvPr>
+        </p:nvSpPr>
+        <p:spPr>
+          <a:xfrm>
+            <a:off x="259492" y="197709"/>
+            <a:ext cx="8563232" cy="6314302"/>
+          </a:xfrm>
+        </p:spPr>
+        <p:txBody>
+          <a:bodyPr>
+            <a:noAutofit/>
+          </a:bodyPr>
+          <a:lstStyle/>
+          <a:p>
+            <a:endParaRPr lang="en-US" sz="4000" dirty="0">
+              <a:solidFill>
+                <a:schemeClr val="bg1"/>
+              </a:solidFill>
+              <a:latin typeface="Avenir Medium" panose="02000503020000020003" pitchFamily="2" charset="0"/>
+              <a:ea typeface="Bodoni Ornaments" pitchFamily="2" charset="0"/>
+            </a:endParaRPr>
+          </a:p>
+          <a:p>
+            <a:endParaRPr lang="en-US" sz="4000" dirty="0">
+              <a:solidFill>
+                <a:schemeClr val="bg1"/>
+              </a:solidFill>
+              <a:latin typeface="Avenir Medium" panose="02000503020000020003" pitchFamily="2" charset="0"/>
+              <a:ea typeface="Bodoni Ornaments" pitchFamily="2" charset="0"/>
+            </a:endParaRPr>
+          </a:p>
+          <a:p>
+            <a:r>
+              <a:rPr lang="en-US" sz="4000" dirty="0">
+                <a:solidFill>
+                  <a:schemeClr val="bg1"/>
+                </a:solidFill>
+                <a:latin typeface="Avenir Medium" panose="02000503020000020003" pitchFamily="2" charset="0"/>
+                <a:ea typeface="Bodoni Ornaments" pitchFamily="2" charset="0"/>
+              </a:rPr>
+              <a:t>So I’ll cherish the old rugged cross</a:t>
+            </a:r>
+          </a:p>
+          <a:p>
+            <a:r>
+              <a:rPr lang="en-US" sz="4000" dirty="0">
+                <a:solidFill>
+                  <a:schemeClr val="bg1"/>
+                </a:solidFill>
+                <a:latin typeface="Avenir Medium" panose="02000503020000020003" pitchFamily="2" charset="0"/>
+                <a:ea typeface="Bodoni Ornaments" pitchFamily="2" charset="0"/>
+              </a:rPr>
+              <a:t>Till my trophies at last I lay down</a:t>
+            </a:r>
+          </a:p>
+          <a:p>
+            <a:r>
+              <a:rPr lang="en-US" sz="4000" dirty="0">
+                <a:solidFill>
+                  <a:schemeClr val="bg1"/>
+                </a:solidFill>
+                <a:latin typeface="Avenir Medium" panose="02000503020000020003" pitchFamily="2" charset="0"/>
+                <a:ea typeface="Bodoni Ornaments" pitchFamily="2" charset="0"/>
+              </a:rPr>
+              <a:t>I will cling to the old rugged cross  </a:t>
+            </a:r>
+          </a:p>
+          <a:p>
+            <a:r>
+              <a:rPr lang="en-US" sz="4000" dirty="0">
+                <a:solidFill>
+                  <a:schemeClr val="bg1"/>
+                </a:solidFill>
+                <a:latin typeface="Avenir Medium" panose="02000503020000020003" pitchFamily="2" charset="0"/>
+                <a:ea typeface="Bodoni Ornaments" pitchFamily="2" charset="0"/>
+              </a:rPr>
+              <a:t>And exchange it some day </a:t>
+            </a:r>
+          </a:p>
+          <a:p>
+            <a:r>
+              <a:rPr lang="en-US" sz="4000" dirty="0">
+                <a:solidFill>
+                  <a:schemeClr val="bg1"/>
+                </a:solidFill>
+                <a:latin typeface="Avenir Medium" panose="02000503020000020003" pitchFamily="2" charset="0"/>
+                <a:ea typeface="Bodoni Ornaments" pitchFamily="2" charset="0"/>
+              </a:rPr>
+              <a:t>for a crown</a:t>
+            </a:r>
+          </a:p>
+          <a:p>
+            <a:endParaRPr lang="en-US" sz="4000" dirty="0">
+              <a:solidFill>
+                <a:schemeClr val="bg1"/>
+              </a:solidFill>
+              <a:latin typeface="Avenir Medium" panose="02000503020000020003" pitchFamily="2" charset="0"/>
+              <a:ea typeface="Bodoni Ornaments" pitchFamily="2" charset="0"/>
+            </a:endParaRPr>
+          </a:p>
+        </p:txBody>
+      </p:sp>
+    </p:spTree>
+    <p:extLst>
+      <p:ext uri="{BB962C8B-B14F-4D97-AF65-F5344CB8AC3E}">
+        <p14:creationId xmlns:p14="http://schemas.microsoft.com/office/powerpoint/2010/main" val="4254184139"/>
+      </p:ext>
+    </p:extLst>
+  </p:cSld>
+  <p:clrMapOvr>
+    <a:masterClrMapping/>
+  </p:clrMapOvr>
+</p:sld>
+</file>
+
+<file path=ppt/slides/slide5.xml><?xml version="1.0" encoding="utf-8"?>
+<p:sld xmlns:a="http://schemas.openxmlformats.org/drawingml/2006/main" xmlns:r="http://schemas.openxmlformats.org/officeDocument/2006/relationships" xmlns:p="http://schemas.openxmlformats.org/presentationml/2006/main">
+  <p:cSld>
+    <p:bg>
+      <p:bgPr>
+        <a:solidFill>
+          <a:schemeClr val="tx1"/>
+        </a:solidFill>
+        <a:effectLst/>
+      </p:bgPr>
+    </p:bg>
+    <p:spTree>
+      <p:nvGrpSpPr>
+        <p:cNvPr id="1" name="">
+          <a:extLst>
+            <a:ext uri="{FF2B5EF4-FFF2-40B4-BE49-F238E27FC236}">
+              <a16:creationId xmlns:a16="http://schemas.microsoft.com/office/drawing/2014/main" id="{02737DA7-8C8E-FBA7-4464-713026D604AB}"/>
+            </a:ext>
+          </a:extLst>
+        </p:cNvPr>
+        <p:cNvGrpSpPr/>
+        <p:nvPr/>
+      </p:nvGrpSpPr>
+      <p:grpSpPr>
+        <a:xfrm>
+          <a:off x="0" y="0"/>
+          <a:ext cx="0" cy="0"/>
+          <a:chOff x="0" y="0"/>
+          <a:chExt cx="0" cy="0"/>
+        </a:xfrm>
+      </p:grpSpPr>
+      <p:sp>
+        <p:nvSpPr>
+          <p:cNvPr id="3" name="Subtitle 2">
+            <a:extLst>
+              <a:ext uri="{FF2B5EF4-FFF2-40B4-BE49-F238E27FC236}">
+                <a16:creationId xmlns:a16="http://schemas.microsoft.com/office/drawing/2014/main" id="{4DA09BC1-4614-96C7-F99B-7D39C6033838}"/>
+              </a:ext>
+            </a:extLst>
+          </p:cNvPr>
+          <p:cNvSpPr>
+            <a:spLocks noGrp="1"/>
+          </p:cNvSpPr>
+          <p:nvPr>
+            <p:ph type="subTitle" idx="1"/>
+          </p:nvPr>
+        </p:nvSpPr>
+        <p:spPr>
+          <a:xfrm>
+            <a:off x="222422" y="210065"/>
+            <a:ext cx="8748583" cy="6413157"/>
+          </a:xfrm>
+        </p:spPr>
+        <p:txBody>
+          <a:bodyPr>
+            <a:noAutofit/>
+          </a:bodyPr>
+          <a:lstStyle/>
+          <a:p>
+            <a:endParaRPr lang="en-US" sz="4000" dirty="0">
+              <a:solidFill>
+                <a:schemeClr val="bg1"/>
+              </a:solidFill>
+              <a:latin typeface="Avenir Medium" panose="02000503020000020003" pitchFamily="2" charset="0"/>
+              <a:ea typeface="Bodoni Ornaments" pitchFamily="2" charset="0"/>
+            </a:endParaRPr>
+          </a:p>
+          <a:p>
+            <a:endParaRPr lang="en-US" sz="4000" dirty="0">
+              <a:solidFill>
+                <a:schemeClr val="bg1"/>
+              </a:solidFill>
+              <a:latin typeface="Avenir Medium" panose="02000503020000020003" pitchFamily="2" charset="0"/>
+              <a:ea typeface="Bodoni Ornaments" pitchFamily="2" charset="0"/>
+            </a:endParaRPr>
+          </a:p>
+          <a:p>
+            <a:r>
+              <a:rPr lang="en-US" sz="4000" dirty="0">
+                <a:solidFill>
+                  <a:schemeClr val="bg1"/>
+                </a:solidFill>
+                <a:latin typeface="Avenir Medium" panose="02000503020000020003" pitchFamily="2" charset="0"/>
+                <a:ea typeface="Bodoni Ornaments" pitchFamily="2" charset="0"/>
+              </a:rPr>
+              <a:t>Oh, that old rugged cross, </a:t>
+            </a:r>
+          </a:p>
+          <a:p>
+            <a:r>
+              <a:rPr lang="en-US" sz="4000" dirty="0">
+                <a:solidFill>
+                  <a:schemeClr val="bg1"/>
+                </a:solidFill>
+                <a:latin typeface="Avenir Medium" panose="02000503020000020003" pitchFamily="2" charset="0"/>
+                <a:ea typeface="Bodoni Ornaments" pitchFamily="2" charset="0"/>
+              </a:rPr>
+              <a:t>so despised by the world</a:t>
+            </a:r>
+          </a:p>
+          <a:p>
+            <a:r>
+              <a:rPr lang="en-US" sz="4000" dirty="0">
+                <a:solidFill>
+                  <a:schemeClr val="bg1"/>
+                </a:solidFill>
+                <a:latin typeface="Avenir Medium" panose="02000503020000020003" pitchFamily="2" charset="0"/>
+                <a:ea typeface="Bodoni Ornaments" pitchFamily="2" charset="0"/>
+              </a:rPr>
+              <a:t>  Has a wondrous attraction for me</a:t>
+            </a:r>
+          </a:p>
+        </p:txBody>
+      </p:sp>
+    </p:spTree>
+    <p:extLst>
+      <p:ext uri="{BB962C8B-B14F-4D97-AF65-F5344CB8AC3E}">
+        <p14:creationId xmlns:p14="http://schemas.microsoft.com/office/powerpoint/2010/main" val="868937877"/>
+      </p:ext>
+    </p:extLst>
+  </p:cSld>
+  <p:clrMapOvr>
+    <a:masterClrMapping/>
+  </p:clrMapOvr>
+</p:sld>
+</file>
+
+<file path=ppt/slides/slide6.xml><?xml version="1.0" encoding="utf-8"?>
+<p:sld xmlns:a="http://schemas.openxmlformats.org/drawingml/2006/main" xmlns:r="http://schemas.openxmlformats.org/officeDocument/2006/relationships" xmlns:p="http://schemas.openxmlformats.org/presentationml/2006/main">
+  <p:cSld>
+    <p:bg>
+      <p:bgPr>
+        <a:solidFill>
+          <a:schemeClr val="tx1"/>
+        </a:solidFill>
+        <a:effectLst/>
+      </p:bgPr>
+    </p:bg>
+    <p:spTree>
+      <p:nvGrpSpPr>
+        <p:cNvPr id="1" name="">
+          <a:extLst>
+            <a:ext uri="{FF2B5EF4-FFF2-40B4-BE49-F238E27FC236}">
+              <a16:creationId xmlns:a16="http://schemas.microsoft.com/office/drawing/2014/main" id="{1E69B19D-8C95-EA9E-68E8-5AC7D629CFEE}"/>
+            </a:ext>
+          </a:extLst>
+        </p:cNvPr>
+        <p:cNvGrpSpPr/>
+        <p:nvPr/>
+      </p:nvGrpSpPr>
+      <p:grpSpPr>
+        <a:xfrm>
+          <a:off x="0" y="0"/>
+          <a:ext cx="0" cy="0"/>
+          <a:chOff x="0" y="0"/>
+          <a:chExt cx="0" cy="0"/>
+        </a:xfrm>
+      </p:grpSpPr>
+      <p:sp>
+        <p:nvSpPr>
+          <p:cNvPr id="3" name="Subtitle 2">
+            <a:extLst>
+              <a:ext uri="{FF2B5EF4-FFF2-40B4-BE49-F238E27FC236}">
+                <a16:creationId xmlns:a16="http://schemas.microsoft.com/office/drawing/2014/main" id="{F990EEF6-A5F3-3FA9-CAC7-9AEFF86CEC08}"/>
+              </a:ext>
+            </a:extLst>
+          </p:cNvPr>
+          <p:cNvSpPr>
+            <a:spLocks noGrp="1"/>
+          </p:cNvSpPr>
+          <p:nvPr>
+            <p:ph type="subTitle" idx="1"/>
+          </p:nvPr>
+        </p:nvSpPr>
+        <p:spPr>
+          <a:xfrm>
+            <a:off x="222422" y="197709"/>
+            <a:ext cx="8723870" cy="6413156"/>
+          </a:xfrm>
+        </p:spPr>
+        <p:txBody>
+          <a:bodyPr>
+            <a:noAutofit/>
+          </a:bodyPr>
+          <a:lstStyle/>
+          <a:p>
+            <a:endParaRPr lang="en-US" sz="4000" dirty="0">
+              <a:solidFill>
+                <a:schemeClr val="bg1"/>
+              </a:solidFill>
+              <a:latin typeface="Avenir Medium" panose="02000503020000020003" pitchFamily="2" charset="0"/>
+              <a:ea typeface="Bodoni Ornaments" pitchFamily="2" charset="0"/>
+            </a:endParaRPr>
+          </a:p>
+          <a:p>
+            <a:endParaRPr lang="en-US" sz="4000" dirty="0">
+              <a:solidFill>
+                <a:schemeClr val="bg1"/>
+              </a:solidFill>
+              <a:latin typeface="Avenir Medium" panose="02000503020000020003" pitchFamily="2" charset="0"/>
+              <a:ea typeface="Bodoni Ornaments" pitchFamily="2" charset="0"/>
+            </a:endParaRPr>
+          </a:p>
+          <a:p>
+            <a:r>
+              <a:rPr lang="en-US" sz="4000" dirty="0">
+                <a:solidFill>
+                  <a:schemeClr val="bg1"/>
+                </a:solidFill>
+                <a:latin typeface="Avenir Medium" panose="02000503020000020003" pitchFamily="2" charset="0"/>
+                <a:ea typeface="Bodoni Ornaments" pitchFamily="2" charset="0"/>
+              </a:rPr>
+              <a:t>For the dear Lamb of God </a:t>
+            </a:r>
+          </a:p>
+          <a:p>
+            <a:r>
+              <a:rPr lang="en-US" sz="4000" dirty="0">
+                <a:solidFill>
+                  <a:schemeClr val="bg1"/>
+                </a:solidFill>
+                <a:latin typeface="Avenir Medium" panose="02000503020000020003" pitchFamily="2" charset="0"/>
+                <a:ea typeface="Bodoni Ornaments" pitchFamily="2" charset="0"/>
+              </a:rPr>
+              <a:t>left His glory above</a:t>
+            </a:r>
+          </a:p>
+          <a:p>
+            <a:r>
+              <a:rPr lang="en-US" sz="4000" dirty="0">
+                <a:solidFill>
+                  <a:schemeClr val="bg1"/>
+                </a:solidFill>
+                <a:latin typeface="Avenir Medium" panose="02000503020000020003" pitchFamily="2" charset="0"/>
+                <a:ea typeface="Bodoni Ornaments" pitchFamily="2" charset="0"/>
+              </a:rPr>
+              <a:t>  To bear it to dark Calvary</a:t>
+            </a:r>
+          </a:p>
+        </p:txBody>
+      </p:sp>
+    </p:spTree>
+    <p:extLst>
+      <p:ext uri="{BB962C8B-B14F-4D97-AF65-F5344CB8AC3E}">
+        <p14:creationId xmlns:p14="http://schemas.microsoft.com/office/powerpoint/2010/main" val="3486774362"/>
+      </p:ext>
+    </p:extLst>
+  </p:cSld>
+  <p:clrMapOvr>
+    <a:masterClrMapping/>
+  </p:clrMapOvr>
+</p:sld>
+</file>
+
+<file path=ppt/slides/slide7.xml><?xml version="1.0" encoding="utf-8"?>
+<p:sld xmlns:a="http://schemas.openxmlformats.org/drawingml/2006/main" xmlns:r="http://schemas.openxmlformats.org/officeDocument/2006/relationships" xmlns:p="http://schemas.openxmlformats.org/presentationml/2006/main">
+  <p:cSld>
+    <p:bg>
+      <p:bgPr>
+        <a:solidFill>
+          <a:schemeClr val="tx1"/>
+        </a:solidFill>
+        <a:effectLst/>
+      </p:bgPr>
+    </p:bg>
+    <p:spTree>
+      <p:nvGrpSpPr>
+        <p:cNvPr id="1" name="">
+          <a:extLst>
+            <a:ext uri="{FF2B5EF4-FFF2-40B4-BE49-F238E27FC236}">
+              <a16:creationId xmlns:a16="http://schemas.microsoft.com/office/drawing/2014/main" id="{1E998186-5FCE-5DCF-4562-4C35C3B849A4}"/>
+            </a:ext>
+          </a:extLst>
+        </p:cNvPr>
+        <p:cNvGrpSpPr/>
+        <p:nvPr/>
+      </p:nvGrpSpPr>
+      <p:grpSpPr>
+        <a:xfrm>
+          <a:off x="0" y="0"/>
+          <a:ext cx="0" cy="0"/>
+          <a:chOff x="0" y="0"/>
+          <a:chExt cx="0" cy="0"/>
+        </a:xfrm>
+      </p:grpSpPr>
+      <p:sp>
+        <p:nvSpPr>
+          <p:cNvPr id="3" name="Subtitle 2">
+            <a:extLst>
+              <a:ext uri="{FF2B5EF4-FFF2-40B4-BE49-F238E27FC236}">
+                <a16:creationId xmlns:a16="http://schemas.microsoft.com/office/drawing/2014/main" id="{6EF18DB0-CF82-ED90-98B7-C78DFDA97CA5}"/>
+              </a:ext>
+            </a:extLst>
+          </p:cNvPr>
+          <p:cNvSpPr>
+            <a:spLocks noGrp="1"/>
+          </p:cNvSpPr>
+          <p:nvPr>
+            <p:ph type="subTitle" idx="1"/>
+          </p:nvPr>
+        </p:nvSpPr>
+        <p:spPr>
+          <a:xfrm>
+            <a:off x="259492" y="197709"/>
+            <a:ext cx="8563232" cy="6314302"/>
+          </a:xfrm>
+        </p:spPr>
+        <p:txBody>
+          <a:bodyPr>
+            <a:noAutofit/>
+          </a:bodyPr>
+          <a:lstStyle/>
+          <a:p>
+            <a:endParaRPr lang="en-US" sz="4000" dirty="0">
+              <a:solidFill>
+                <a:schemeClr val="bg1"/>
+              </a:solidFill>
+              <a:latin typeface="Avenir Medium" panose="02000503020000020003" pitchFamily="2" charset="0"/>
+              <a:ea typeface="Bodoni Ornaments" pitchFamily="2" charset="0"/>
+            </a:endParaRPr>
+          </a:p>
+          <a:p>
+            <a:endParaRPr lang="en-US" sz="4000" dirty="0">
+              <a:solidFill>
+                <a:schemeClr val="bg1"/>
+              </a:solidFill>
+              <a:latin typeface="Avenir Medium" panose="02000503020000020003" pitchFamily="2" charset="0"/>
+              <a:ea typeface="Bodoni Ornaments" pitchFamily="2" charset="0"/>
+            </a:endParaRPr>
+          </a:p>
+          <a:p>
+            <a:r>
+              <a:rPr lang="en-US" sz="4000" dirty="0">
+                <a:solidFill>
+                  <a:schemeClr val="bg1"/>
+                </a:solidFill>
+                <a:latin typeface="Avenir Medium" panose="02000503020000020003" pitchFamily="2" charset="0"/>
+                <a:ea typeface="Bodoni Ornaments" pitchFamily="2" charset="0"/>
+              </a:rPr>
+              <a:t>So I’ll cherish the old rugged cross</a:t>
+            </a:r>
+          </a:p>
+          <a:p>
+            <a:r>
+              <a:rPr lang="en-US" sz="4000" dirty="0">
+                <a:solidFill>
+                  <a:schemeClr val="bg1"/>
+                </a:solidFill>
+                <a:latin typeface="Avenir Medium" panose="02000503020000020003" pitchFamily="2" charset="0"/>
+                <a:ea typeface="Bodoni Ornaments" pitchFamily="2" charset="0"/>
+              </a:rPr>
+              <a:t>Till my trophies at last I lay down</a:t>
+            </a:r>
+          </a:p>
+          <a:p>
+            <a:r>
+              <a:rPr lang="en-US" sz="4000" dirty="0">
+                <a:solidFill>
+                  <a:schemeClr val="bg1"/>
+                </a:solidFill>
+                <a:latin typeface="Avenir Medium" panose="02000503020000020003" pitchFamily="2" charset="0"/>
+                <a:ea typeface="Bodoni Ornaments" pitchFamily="2" charset="0"/>
+              </a:rPr>
+              <a:t>I will cling to the old rugged cross  </a:t>
+            </a:r>
+          </a:p>
+          <a:p>
+            <a:r>
+              <a:rPr lang="en-US" sz="4000" dirty="0">
+                <a:solidFill>
+                  <a:schemeClr val="bg1"/>
+                </a:solidFill>
+                <a:latin typeface="Avenir Medium" panose="02000503020000020003" pitchFamily="2" charset="0"/>
+                <a:ea typeface="Bodoni Ornaments" pitchFamily="2" charset="0"/>
+              </a:rPr>
+              <a:t>And exchange it some day </a:t>
+            </a:r>
+          </a:p>
+          <a:p>
+            <a:r>
+              <a:rPr lang="en-US" sz="4000" dirty="0">
+                <a:solidFill>
+                  <a:schemeClr val="bg1"/>
+                </a:solidFill>
+                <a:latin typeface="Avenir Medium" panose="02000503020000020003" pitchFamily="2" charset="0"/>
+                <a:ea typeface="Bodoni Ornaments" pitchFamily="2" charset="0"/>
+              </a:rPr>
+              <a:t>for a crown</a:t>
+            </a:r>
+          </a:p>
+          <a:p>
+            <a:endParaRPr lang="en-US" sz="4000" dirty="0">
+              <a:solidFill>
+                <a:schemeClr val="bg1"/>
+              </a:solidFill>
+              <a:latin typeface="Avenir Medium" panose="02000503020000020003" pitchFamily="2" charset="0"/>
+              <a:ea typeface="Bodoni Ornaments" pitchFamily="2" charset="0"/>
+            </a:endParaRPr>
+          </a:p>
+        </p:txBody>
+      </p:sp>
+    </p:spTree>
+    <p:extLst>
+      <p:ext uri="{BB962C8B-B14F-4D97-AF65-F5344CB8AC3E}">
+        <p14:creationId xmlns:p14="http://schemas.microsoft.com/office/powerpoint/2010/main" val="414954580"/>
+      </p:ext>
+    </p:extLst>
+  </p:cSld>
+  <p:clrMapOvr>
+    <a:masterClrMapping/>
+  </p:clrMapOvr>
+</p:sld>
+</file>
+
+<file path=ppt/slides/slide8.xml><?xml version="1.0" encoding="utf-8"?>
+<p:sld xmlns:a="http://schemas.openxmlformats.org/drawingml/2006/main" xmlns:r="http://schemas.openxmlformats.org/officeDocument/2006/relationships" xmlns:p="http://schemas.openxmlformats.org/presentationml/2006/main">
+  <p:cSld>
+    <p:bg>
+      <p:bgPr>
+        <a:solidFill>
+          <a:schemeClr val="tx1"/>
         </a:solidFill>
         <a:effectLst/>
       </p:bgPr>
@@ -3893,8 +4169,8 @@
         </p:nvSpPr>
         <p:spPr>
           <a:xfrm>
-            <a:off x="682831" y="497702"/>
-            <a:ext cx="10826338" cy="5862596"/>
+            <a:off x="296562" y="222422"/>
+            <a:ext cx="8587946" cy="6437869"/>
           </a:xfrm>
         </p:spPr>
         <p:txBody>
@@ -3903,7 +4179,7 @@
           </a:bodyPr>
           <a:lstStyle/>
           <a:p>
-            <a:endParaRPr lang="en-US" sz="4400" dirty="0">
+            <a:endParaRPr lang="en-US" sz="4000" dirty="0">
               <a:solidFill>
                 <a:schemeClr val="bg1"/>
               </a:solidFill>
@@ -3912,7 +4188,7 @@
             </a:endParaRPr>
           </a:p>
           <a:p>
-            <a:endParaRPr lang="en-US" sz="4400" dirty="0">
+            <a:endParaRPr lang="en-US" sz="4000" dirty="0">
               <a:solidFill>
                 <a:schemeClr val="bg1"/>
               </a:solidFill>
@@ -3922,7 +4198,7 @@
           </a:p>
           <a:p>
             <a:r>
-              <a:rPr lang="en-US" sz="4400" dirty="0">
+              <a:rPr lang="en-US" sz="4000" dirty="0">
                 <a:solidFill>
                   <a:schemeClr val="bg1"/>
                 </a:solidFill>
@@ -3934,7 +4210,7 @@
           </a:p>
           <a:p>
             <a:r>
-              <a:rPr lang="en-US" sz="4400" dirty="0">
+              <a:rPr lang="en-US" sz="4000" dirty="0">
                 <a:solidFill>
                   <a:schemeClr val="bg1"/>
                 </a:solidFill>
@@ -3946,7 +4222,7 @@
           </a:p>
           <a:p>
             <a:r>
-              <a:rPr lang="en-US" sz="4400" dirty="0">
+              <a:rPr lang="en-US" sz="4000" dirty="0">
                 <a:solidFill>
                   <a:schemeClr val="bg1"/>
                 </a:solidFill>
@@ -3971,13 +4247,13 @@
 </p:sld>
 </file>
 
-<file path=ppt/slides/slide11.xml><?xml version="1.0" encoding="utf-8"?>
+<file path=ppt/slides/slide9.xml><?xml version="1.0" encoding="utf-8"?>
 <p:sld xmlns:a="http://schemas.openxmlformats.org/drawingml/2006/main" xmlns:r="http://schemas.openxmlformats.org/officeDocument/2006/relationships" xmlns:p="http://schemas.openxmlformats.org/presentationml/2006/main">
   <p:cSld>
     <p:bg>
       <p:bgPr>
         <a:solidFill>
-          <a:schemeClr val="accent1"/>
+          <a:schemeClr val="tx1"/>
         </a:solidFill>
         <a:effectLst/>
       </p:bgPr>
@@ -4020,8 +4296,8 @@
         </p:nvSpPr>
         <p:spPr>
           <a:xfrm>
-            <a:off x="682831" y="497702"/>
-            <a:ext cx="10826338" cy="5862596"/>
+            <a:off x="271848" y="247135"/>
+            <a:ext cx="8513805" cy="6400800"/>
           </a:xfrm>
         </p:spPr>
         <p:txBody>
@@ -4030,7 +4306,7 @@
           </a:bodyPr>
           <a:lstStyle/>
           <a:p>
-            <a:endParaRPr lang="en-US" sz="4400" dirty="0">
+            <a:endParaRPr lang="en-US" sz="4000" dirty="0">
               <a:solidFill>
                 <a:schemeClr val="bg1"/>
               </a:solidFill>
@@ -4039,7 +4315,7 @@
             </a:endParaRPr>
           </a:p>
           <a:p>
-            <a:endParaRPr lang="en-US" sz="4400" dirty="0">
+            <a:endParaRPr lang="en-US" sz="4000" dirty="0">
               <a:solidFill>
                 <a:schemeClr val="bg1"/>
               </a:solidFill>
@@ -4049,7 +4325,7 @@
           </a:p>
           <a:p>
             <a:r>
-              <a:rPr lang="en-US" sz="4400" dirty="0">
+              <a:rPr lang="en-US" sz="4000" dirty="0">
                 <a:solidFill>
                   <a:schemeClr val="bg1"/>
                 </a:solidFill>
@@ -4061,7 +4337,7 @@
           </a:p>
           <a:p>
             <a:r>
-              <a:rPr lang="en-US" sz="4400" dirty="0">
+              <a:rPr lang="en-US" sz="4000" dirty="0">
                 <a:solidFill>
                   <a:schemeClr val="bg1"/>
                 </a:solidFill>
@@ -4073,7 +4349,7 @@
           </a:p>
           <a:p>
             <a:r>
-              <a:rPr lang="en-US" sz="4400" dirty="0">
+              <a:rPr lang="en-US" sz="4000" dirty="0">
                 <a:solidFill>
                   <a:schemeClr val="bg1"/>
                 </a:solidFill>
@@ -4098,1330 +4374,10 @@
 </p:sld>
 </file>
 
-<file path=ppt/slides/slide12.xml><?xml version="1.0" encoding="utf-8"?>
-<p:sld xmlns:a="http://schemas.openxmlformats.org/drawingml/2006/main" xmlns:r="http://schemas.openxmlformats.org/officeDocument/2006/relationships" xmlns:p="http://schemas.openxmlformats.org/presentationml/2006/main">
-  <p:cSld>
-    <p:bg>
-      <p:bgPr>
-        <a:solidFill>
-          <a:schemeClr val="accent5">
-            <a:lumMod val="50000"/>
-          </a:schemeClr>
-        </a:solidFill>
-        <a:effectLst/>
-      </p:bgPr>
-    </p:bg>
-    <p:spTree>
-      <p:nvGrpSpPr>
-        <p:cNvPr id="1" name="">
-          <a:extLst>
-            <a:ext uri="{FF2B5EF4-FFF2-40B4-BE49-F238E27FC236}">
-              <a16:creationId xmlns:a16="http://schemas.microsoft.com/office/drawing/2014/main" id="{4B4B8507-2E93-95AB-B389-0BBC98C7D460}"/>
-            </a:ext>
-          </a:extLst>
-        </p:cNvPr>
-        <p:cNvGrpSpPr/>
-        <p:nvPr/>
-      </p:nvGrpSpPr>
-      <p:grpSpPr>
-        <a:xfrm>
-          <a:off x="0" y="0"/>
-          <a:ext cx="0" cy="0"/>
-          <a:chOff x="0" y="0"/>
-          <a:chExt cx="0" cy="0"/>
-        </a:xfrm>
-      </p:grpSpPr>
-      <p:sp>
-        <p:nvSpPr>
-          <p:cNvPr id="3" name="Subtitle 2">
-            <a:extLst>
-              <a:ext uri="{FF2B5EF4-FFF2-40B4-BE49-F238E27FC236}">
-                <a16:creationId xmlns:a16="http://schemas.microsoft.com/office/drawing/2014/main" id="{8A0E62C6-0CC3-2564-490A-1E626FCB4FFC}"/>
-              </a:ext>
-            </a:extLst>
-          </p:cNvPr>
-          <p:cNvSpPr>
-            <a:spLocks noGrp="1"/>
-          </p:cNvSpPr>
-          <p:nvPr>
-            <p:ph type="subTitle" idx="1"/>
-          </p:nvPr>
-        </p:nvSpPr>
-        <p:spPr>
-          <a:xfrm>
-            <a:off x="682831" y="497702"/>
-            <a:ext cx="10826338" cy="5862596"/>
-          </a:xfrm>
-        </p:spPr>
-        <p:txBody>
-          <a:bodyPr>
-            <a:noAutofit/>
-          </a:bodyPr>
-          <a:lstStyle/>
-          <a:p>
-            <a:endParaRPr lang="en-US" sz="4400" dirty="0">
-              <a:solidFill>
-                <a:schemeClr val="bg1"/>
-              </a:solidFill>
-              <a:latin typeface="Avenir Medium" panose="02000503020000020003" pitchFamily="2" charset="0"/>
-              <a:ea typeface="Bodoni Ornaments" pitchFamily="2" charset="0"/>
-            </a:endParaRPr>
-          </a:p>
-          <a:p>
-            <a:endParaRPr lang="en-US" sz="4400" dirty="0">
-              <a:solidFill>
-                <a:schemeClr val="bg1"/>
-              </a:solidFill>
-              <a:latin typeface="Avenir Medium" panose="02000503020000020003" pitchFamily="2" charset="0"/>
-              <a:ea typeface="Bodoni Ornaments" pitchFamily="2" charset="0"/>
-            </a:endParaRPr>
-          </a:p>
-          <a:p>
-            <a:r>
-              <a:rPr lang="en-US" sz="4400" dirty="0">
-                <a:solidFill>
-                  <a:schemeClr val="bg1"/>
-                </a:solidFill>
-                <a:latin typeface="Avenir Medium" panose="02000503020000020003" pitchFamily="2" charset="0"/>
-                <a:ea typeface="Bodoni Ornaments" pitchFamily="2" charset="0"/>
-              </a:rPr>
-              <a:t>So I’ll cherish the old rugged cross</a:t>
-            </a:r>
-          </a:p>
-          <a:p>
-            <a:endParaRPr lang="en-US" sz="4400" dirty="0">
-              <a:solidFill>
-                <a:schemeClr val="bg1"/>
-              </a:solidFill>
-              <a:latin typeface="Avenir Medium" panose="02000503020000020003" pitchFamily="2" charset="0"/>
-              <a:ea typeface="Bodoni Ornaments" pitchFamily="2" charset="0"/>
-            </a:endParaRPr>
-          </a:p>
-          <a:p>
-            <a:r>
-              <a:rPr lang="en-US" sz="4400" dirty="0">
-                <a:solidFill>
-                  <a:schemeClr val="bg1"/>
-                </a:solidFill>
-                <a:latin typeface="Avenir Medium" panose="02000503020000020003" pitchFamily="2" charset="0"/>
-                <a:ea typeface="Bodoni Ornaments" pitchFamily="2" charset="0"/>
-              </a:rPr>
-              <a:t>Till my trophies at last I lay down</a:t>
-            </a:r>
-          </a:p>
-          <a:p>
-            <a:endParaRPr lang="en-US" sz="4400" dirty="0">
-              <a:solidFill>
-                <a:schemeClr val="bg1"/>
-              </a:solidFill>
-              <a:latin typeface="Avenir Medium" panose="02000503020000020003" pitchFamily="2" charset="0"/>
-              <a:ea typeface="Bodoni Ornaments" pitchFamily="2" charset="0"/>
-            </a:endParaRPr>
-          </a:p>
-        </p:txBody>
-      </p:sp>
-    </p:spTree>
-    <p:extLst>
-      <p:ext uri="{BB962C8B-B14F-4D97-AF65-F5344CB8AC3E}">
-        <p14:creationId xmlns:p14="http://schemas.microsoft.com/office/powerpoint/2010/main" val="3202436822"/>
-      </p:ext>
-    </p:extLst>
-  </p:cSld>
-  <p:clrMapOvr>
-    <a:masterClrMapping/>
-  </p:clrMapOvr>
-</p:sld>
-</file>
-
-<file path=ppt/slides/slide13.xml><?xml version="1.0" encoding="utf-8"?>
-<p:sld xmlns:a="http://schemas.openxmlformats.org/drawingml/2006/main" xmlns:r="http://schemas.openxmlformats.org/officeDocument/2006/relationships" xmlns:p="http://schemas.openxmlformats.org/presentationml/2006/main">
-  <p:cSld>
-    <p:bg>
-      <p:bgPr>
-        <a:solidFill>
-          <a:schemeClr val="accent5">
-            <a:lumMod val="50000"/>
-          </a:schemeClr>
-        </a:solidFill>
-        <a:effectLst/>
-      </p:bgPr>
-    </p:bg>
-    <p:spTree>
-      <p:nvGrpSpPr>
-        <p:cNvPr id="1" name="">
-          <a:extLst>
-            <a:ext uri="{FF2B5EF4-FFF2-40B4-BE49-F238E27FC236}">
-              <a16:creationId xmlns:a16="http://schemas.microsoft.com/office/drawing/2014/main" id="{4F1EC472-1C0C-8340-E862-916590D397C8}"/>
-            </a:ext>
-          </a:extLst>
-        </p:cNvPr>
-        <p:cNvGrpSpPr/>
-        <p:nvPr/>
-      </p:nvGrpSpPr>
-      <p:grpSpPr>
-        <a:xfrm>
-          <a:off x="0" y="0"/>
-          <a:ext cx="0" cy="0"/>
-          <a:chOff x="0" y="0"/>
-          <a:chExt cx="0" cy="0"/>
-        </a:xfrm>
-      </p:grpSpPr>
-      <p:sp>
-        <p:nvSpPr>
-          <p:cNvPr id="3" name="Subtitle 2">
-            <a:extLst>
-              <a:ext uri="{FF2B5EF4-FFF2-40B4-BE49-F238E27FC236}">
-                <a16:creationId xmlns:a16="http://schemas.microsoft.com/office/drawing/2014/main" id="{D9029FC0-C4B4-086D-80FA-307DBB5CF3F9}"/>
-              </a:ext>
-            </a:extLst>
-          </p:cNvPr>
-          <p:cNvSpPr>
-            <a:spLocks noGrp="1"/>
-          </p:cNvSpPr>
-          <p:nvPr>
-            <p:ph type="subTitle" idx="1"/>
-          </p:nvPr>
-        </p:nvSpPr>
-        <p:spPr>
-          <a:xfrm>
-            <a:off x="682831" y="497702"/>
-            <a:ext cx="10826338" cy="5862596"/>
-          </a:xfrm>
-        </p:spPr>
-        <p:txBody>
-          <a:bodyPr>
-            <a:noAutofit/>
-          </a:bodyPr>
-          <a:lstStyle/>
-          <a:p>
-            <a:endParaRPr lang="en-US" sz="4400" dirty="0">
-              <a:solidFill>
-                <a:schemeClr val="bg1"/>
-              </a:solidFill>
-              <a:latin typeface="Avenir Medium" panose="02000503020000020003" pitchFamily="2" charset="0"/>
-              <a:ea typeface="Bodoni Ornaments" pitchFamily="2" charset="0"/>
-            </a:endParaRPr>
-          </a:p>
-          <a:p>
-            <a:endParaRPr lang="en-US" sz="4400" dirty="0">
-              <a:solidFill>
-                <a:schemeClr val="bg1"/>
-              </a:solidFill>
-              <a:latin typeface="Avenir Medium" panose="02000503020000020003" pitchFamily="2" charset="0"/>
-              <a:ea typeface="Bodoni Ornaments" pitchFamily="2" charset="0"/>
-            </a:endParaRPr>
-          </a:p>
-          <a:p>
-            <a:r>
-              <a:rPr lang="en-US" sz="4400" dirty="0">
-                <a:solidFill>
-                  <a:schemeClr val="bg1"/>
-                </a:solidFill>
-                <a:latin typeface="Avenir Medium" panose="02000503020000020003" pitchFamily="2" charset="0"/>
-                <a:ea typeface="Bodoni Ornaments" pitchFamily="2" charset="0"/>
-              </a:rPr>
-              <a:t>I will cling to the old rugged cross</a:t>
-            </a:r>
-          </a:p>
-          <a:p>
-            <a:r>
-              <a:rPr lang="en-US" sz="4400" dirty="0">
-                <a:solidFill>
-                  <a:schemeClr val="bg1"/>
-                </a:solidFill>
-                <a:latin typeface="Avenir Medium" panose="02000503020000020003" pitchFamily="2" charset="0"/>
-                <a:ea typeface="Bodoni Ornaments" pitchFamily="2" charset="0"/>
-              </a:rPr>
-              <a:t>  </a:t>
-            </a:r>
-          </a:p>
-          <a:p>
-            <a:r>
-              <a:rPr lang="en-US" sz="4400" dirty="0">
-                <a:solidFill>
-                  <a:schemeClr val="bg1"/>
-                </a:solidFill>
-                <a:latin typeface="Avenir Medium" panose="02000503020000020003" pitchFamily="2" charset="0"/>
-                <a:ea typeface="Bodoni Ornaments" pitchFamily="2" charset="0"/>
-              </a:rPr>
-              <a:t>And exchange it some day for a crown</a:t>
-            </a:r>
-          </a:p>
-        </p:txBody>
-      </p:sp>
-    </p:spTree>
-    <p:extLst>
-      <p:ext uri="{BB962C8B-B14F-4D97-AF65-F5344CB8AC3E}">
-        <p14:creationId xmlns:p14="http://schemas.microsoft.com/office/powerpoint/2010/main" val="4033103774"/>
-      </p:ext>
-    </p:extLst>
-  </p:cSld>
-  <p:clrMapOvr>
-    <a:masterClrMapping/>
-  </p:clrMapOvr>
-</p:sld>
-</file>
-
-<file path=ppt/slides/slide2.xml><?xml version="1.0" encoding="utf-8"?>
-<p:sld xmlns:a="http://schemas.openxmlformats.org/drawingml/2006/main" xmlns:r="http://schemas.openxmlformats.org/officeDocument/2006/relationships" xmlns:p="http://schemas.openxmlformats.org/presentationml/2006/main">
-  <p:cSld>
-    <p:bg>
-      <p:bgPr>
-        <a:solidFill>
-          <a:schemeClr val="accent1"/>
-        </a:solidFill>
-        <a:effectLst/>
-      </p:bgPr>
-    </p:bg>
-    <p:spTree>
-      <p:nvGrpSpPr>
-        <p:cNvPr id="1" name="">
-          <a:extLst>
-            <a:ext uri="{FF2B5EF4-FFF2-40B4-BE49-F238E27FC236}">
-              <a16:creationId xmlns:a16="http://schemas.microsoft.com/office/drawing/2014/main" id="{29949692-4242-1BDD-62FE-734DDB9A1C35}"/>
-            </a:ext>
-          </a:extLst>
-        </p:cNvPr>
-        <p:cNvGrpSpPr/>
-        <p:nvPr/>
-      </p:nvGrpSpPr>
-      <p:grpSpPr>
-        <a:xfrm>
-          <a:off x="0" y="0"/>
-          <a:ext cx="0" cy="0"/>
-          <a:chOff x="0" y="0"/>
-          <a:chExt cx="0" cy="0"/>
-        </a:xfrm>
-      </p:grpSpPr>
-      <p:sp>
-        <p:nvSpPr>
-          <p:cNvPr id="3" name="Subtitle 2">
-            <a:extLst>
-              <a:ext uri="{FF2B5EF4-FFF2-40B4-BE49-F238E27FC236}">
-                <a16:creationId xmlns:a16="http://schemas.microsoft.com/office/drawing/2014/main" id="{F5D3E287-021A-C1DA-0AA5-23097B43302E}"/>
-              </a:ext>
-            </a:extLst>
-          </p:cNvPr>
-          <p:cNvSpPr>
-            <a:spLocks noGrp="1"/>
-          </p:cNvSpPr>
-          <p:nvPr>
-            <p:ph type="subTitle" idx="1"/>
-          </p:nvPr>
-        </p:nvSpPr>
-        <p:spPr>
-          <a:xfrm>
-            <a:off x="682831" y="497702"/>
-            <a:ext cx="10826338" cy="5862596"/>
-          </a:xfrm>
-        </p:spPr>
-        <p:txBody>
-          <a:bodyPr>
-            <a:noAutofit/>
-          </a:bodyPr>
-          <a:lstStyle/>
-          <a:p>
-            <a:endParaRPr lang="en-US" sz="4400" dirty="0">
-              <a:solidFill>
-                <a:schemeClr val="bg1"/>
-              </a:solidFill>
-              <a:latin typeface="Avenir Medium" panose="02000503020000020003" pitchFamily="2" charset="0"/>
-              <a:ea typeface="Bodoni Ornaments" pitchFamily="2" charset="0"/>
-            </a:endParaRPr>
-          </a:p>
-          <a:p>
-            <a:endParaRPr lang="en-US" sz="4400" dirty="0">
-              <a:solidFill>
-                <a:schemeClr val="bg1"/>
-              </a:solidFill>
-              <a:latin typeface="Avenir Medium" panose="02000503020000020003" pitchFamily="2" charset="0"/>
-              <a:ea typeface="Bodoni Ornaments" pitchFamily="2" charset="0"/>
-            </a:endParaRPr>
-          </a:p>
-          <a:p>
-            <a:r>
-              <a:rPr lang="en-US" sz="4400" dirty="0">
-                <a:solidFill>
-                  <a:schemeClr val="bg1"/>
-                </a:solidFill>
-                <a:latin typeface="Avenir Medium" panose="02000503020000020003" pitchFamily="2" charset="0"/>
-                <a:ea typeface="Bodoni Ornaments" pitchFamily="2" charset="0"/>
-              </a:rPr>
-              <a:t>On a hill far away </a:t>
-            </a:r>
-          </a:p>
-          <a:p>
-            <a:r>
-              <a:rPr lang="en-US" sz="4400" dirty="0">
-                <a:solidFill>
-                  <a:schemeClr val="bg1"/>
-                </a:solidFill>
-                <a:latin typeface="Avenir Medium" panose="02000503020000020003" pitchFamily="2" charset="0"/>
-                <a:ea typeface="Bodoni Ornaments" pitchFamily="2" charset="0"/>
-              </a:rPr>
-              <a:t>stood an old rugged cross,  </a:t>
-            </a:r>
-          </a:p>
-          <a:p>
-            <a:r>
-              <a:rPr lang="en-US" sz="4400" dirty="0">
-                <a:solidFill>
-                  <a:schemeClr val="bg1"/>
-                </a:solidFill>
-                <a:latin typeface="Avenir Medium" panose="02000503020000020003" pitchFamily="2" charset="0"/>
-                <a:ea typeface="Bodoni Ornaments" pitchFamily="2" charset="0"/>
-              </a:rPr>
-              <a:t>The emblem of </a:t>
-            </a:r>
-            <a:r>
-              <a:rPr lang="en-US" sz="4400" dirty="0" err="1">
-                <a:solidFill>
-                  <a:schemeClr val="bg1"/>
-                </a:solidFill>
-                <a:latin typeface="Avenir Medium" panose="02000503020000020003" pitchFamily="2" charset="0"/>
-                <a:ea typeface="Bodoni Ornaments" pitchFamily="2" charset="0"/>
-              </a:rPr>
-              <a:t>suff’ring</a:t>
-            </a:r>
-            <a:r>
-              <a:rPr lang="en-US" sz="4400" dirty="0">
-                <a:solidFill>
-                  <a:schemeClr val="bg1"/>
-                </a:solidFill>
-                <a:latin typeface="Avenir Medium" panose="02000503020000020003" pitchFamily="2" charset="0"/>
-                <a:ea typeface="Bodoni Ornaments" pitchFamily="2" charset="0"/>
-              </a:rPr>
-              <a:t> and shame,</a:t>
-            </a:r>
-          </a:p>
-        </p:txBody>
-      </p:sp>
-    </p:spTree>
-    <p:extLst>
-      <p:ext uri="{BB962C8B-B14F-4D97-AF65-F5344CB8AC3E}">
-        <p14:creationId xmlns:p14="http://schemas.microsoft.com/office/powerpoint/2010/main" val="89724268"/>
-      </p:ext>
-    </p:extLst>
-  </p:cSld>
-  <p:clrMapOvr>
-    <a:masterClrMapping/>
-  </p:clrMapOvr>
-</p:sld>
-</file>
-
-<file path=ppt/slides/slide3.xml><?xml version="1.0" encoding="utf-8"?>
-<p:sld xmlns:a="http://schemas.openxmlformats.org/drawingml/2006/main" xmlns:r="http://schemas.openxmlformats.org/officeDocument/2006/relationships" xmlns:p="http://schemas.openxmlformats.org/presentationml/2006/main">
-  <p:cSld>
-    <p:bg>
-      <p:bgPr>
-        <a:solidFill>
-          <a:schemeClr val="accent1"/>
-        </a:solidFill>
-        <a:effectLst/>
-      </p:bgPr>
-    </p:bg>
-    <p:spTree>
-      <p:nvGrpSpPr>
-        <p:cNvPr id="1" name="">
-          <a:extLst>
-            <a:ext uri="{FF2B5EF4-FFF2-40B4-BE49-F238E27FC236}">
-              <a16:creationId xmlns:a16="http://schemas.microsoft.com/office/drawing/2014/main" id="{D8BDBFFC-C2E7-FF56-08B2-79D8D2E20D0E}"/>
-            </a:ext>
-          </a:extLst>
-        </p:cNvPr>
-        <p:cNvGrpSpPr/>
-        <p:nvPr/>
-      </p:nvGrpSpPr>
-      <p:grpSpPr>
-        <a:xfrm>
-          <a:off x="0" y="0"/>
-          <a:ext cx="0" cy="0"/>
-          <a:chOff x="0" y="0"/>
-          <a:chExt cx="0" cy="0"/>
-        </a:xfrm>
-      </p:grpSpPr>
-      <p:sp>
-        <p:nvSpPr>
-          <p:cNvPr id="3" name="Subtitle 2">
-            <a:extLst>
-              <a:ext uri="{FF2B5EF4-FFF2-40B4-BE49-F238E27FC236}">
-                <a16:creationId xmlns:a16="http://schemas.microsoft.com/office/drawing/2014/main" id="{7CB49F10-2809-A234-C867-D60729E4BBB9}"/>
-              </a:ext>
-            </a:extLst>
-          </p:cNvPr>
-          <p:cNvSpPr>
-            <a:spLocks noGrp="1"/>
-          </p:cNvSpPr>
-          <p:nvPr>
-            <p:ph type="subTitle" idx="1"/>
-          </p:nvPr>
-        </p:nvSpPr>
-        <p:spPr>
-          <a:xfrm>
-            <a:off x="682831" y="497702"/>
-            <a:ext cx="10826338" cy="5862596"/>
-          </a:xfrm>
-        </p:spPr>
-        <p:txBody>
-          <a:bodyPr>
-            <a:noAutofit/>
-          </a:bodyPr>
-          <a:lstStyle/>
-          <a:p>
-            <a:endParaRPr lang="en-US" sz="4400" dirty="0">
-              <a:solidFill>
-                <a:schemeClr val="bg1"/>
-              </a:solidFill>
-              <a:latin typeface="Avenir Medium" panose="02000503020000020003" pitchFamily="2" charset="0"/>
-              <a:ea typeface="Bodoni Ornaments" pitchFamily="2" charset="0"/>
-            </a:endParaRPr>
-          </a:p>
-          <a:p>
-            <a:endParaRPr lang="en-US" sz="4400" dirty="0">
-              <a:solidFill>
-                <a:schemeClr val="bg1"/>
-              </a:solidFill>
-              <a:latin typeface="Avenir Medium" panose="02000503020000020003" pitchFamily="2" charset="0"/>
-              <a:ea typeface="Bodoni Ornaments" pitchFamily="2" charset="0"/>
-            </a:endParaRPr>
-          </a:p>
-          <a:p>
-            <a:r>
-              <a:rPr lang="en-US" sz="4400" dirty="0">
-                <a:solidFill>
-                  <a:schemeClr val="bg1"/>
-                </a:solidFill>
-                <a:latin typeface="Avenir Medium" panose="02000503020000020003" pitchFamily="2" charset="0"/>
-                <a:ea typeface="Bodoni Ornaments" pitchFamily="2" charset="0"/>
-              </a:rPr>
-              <a:t>And I love that old cross </a:t>
-            </a:r>
-          </a:p>
-          <a:p>
-            <a:r>
-              <a:rPr lang="en-US" sz="4400" dirty="0">
-                <a:solidFill>
-                  <a:schemeClr val="bg1"/>
-                </a:solidFill>
-                <a:latin typeface="Avenir Medium" panose="02000503020000020003" pitchFamily="2" charset="0"/>
-                <a:ea typeface="Bodoni Ornaments" pitchFamily="2" charset="0"/>
-              </a:rPr>
-              <a:t>where the Dearest and Best</a:t>
-            </a:r>
-          </a:p>
-          <a:p>
-            <a:r>
-              <a:rPr lang="en-US" sz="4400" dirty="0">
-                <a:solidFill>
-                  <a:schemeClr val="bg1"/>
-                </a:solidFill>
-                <a:latin typeface="Avenir Medium" panose="02000503020000020003" pitchFamily="2" charset="0"/>
-                <a:ea typeface="Bodoni Ornaments" pitchFamily="2" charset="0"/>
-              </a:rPr>
-              <a:t>  For a world of lost sinners was slain.</a:t>
-            </a:r>
-          </a:p>
-        </p:txBody>
-      </p:sp>
-    </p:spTree>
-    <p:extLst>
-      <p:ext uri="{BB962C8B-B14F-4D97-AF65-F5344CB8AC3E}">
-        <p14:creationId xmlns:p14="http://schemas.microsoft.com/office/powerpoint/2010/main" val="2554902462"/>
-      </p:ext>
-    </p:extLst>
-  </p:cSld>
-  <p:clrMapOvr>
-    <a:masterClrMapping/>
-  </p:clrMapOvr>
-</p:sld>
-</file>
-
-<file path=ppt/slides/slide4.xml><?xml version="1.0" encoding="utf-8"?>
-<p:sld xmlns:a="http://schemas.openxmlformats.org/drawingml/2006/main" xmlns:r="http://schemas.openxmlformats.org/officeDocument/2006/relationships" xmlns:p="http://schemas.openxmlformats.org/presentationml/2006/main">
-  <p:cSld>
-    <p:bg>
-      <p:bgPr>
-        <a:solidFill>
-          <a:schemeClr val="accent5">
-            <a:lumMod val="50000"/>
-          </a:schemeClr>
-        </a:solidFill>
-        <a:effectLst/>
-      </p:bgPr>
-    </p:bg>
-    <p:spTree>
-      <p:nvGrpSpPr>
-        <p:cNvPr id="1" name="">
-          <a:extLst>
-            <a:ext uri="{FF2B5EF4-FFF2-40B4-BE49-F238E27FC236}">
-              <a16:creationId xmlns:a16="http://schemas.microsoft.com/office/drawing/2014/main" id="{105C7419-E011-28A7-9A00-12DEA80269EF}"/>
-            </a:ext>
-          </a:extLst>
-        </p:cNvPr>
-        <p:cNvGrpSpPr/>
-        <p:nvPr/>
-      </p:nvGrpSpPr>
-      <p:grpSpPr>
-        <a:xfrm>
-          <a:off x="0" y="0"/>
-          <a:ext cx="0" cy="0"/>
-          <a:chOff x="0" y="0"/>
-          <a:chExt cx="0" cy="0"/>
-        </a:xfrm>
-      </p:grpSpPr>
-      <p:sp>
-        <p:nvSpPr>
-          <p:cNvPr id="3" name="Subtitle 2">
-            <a:extLst>
-              <a:ext uri="{FF2B5EF4-FFF2-40B4-BE49-F238E27FC236}">
-                <a16:creationId xmlns:a16="http://schemas.microsoft.com/office/drawing/2014/main" id="{76DA5D01-CA66-E4A3-D9BB-F19A657F5172}"/>
-              </a:ext>
-            </a:extLst>
-          </p:cNvPr>
-          <p:cNvSpPr>
-            <a:spLocks noGrp="1"/>
-          </p:cNvSpPr>
-          <p:nvPr>
-            <p:ph type="subTitle" idx="1"/>
-          </p:nvPr>
-        </p:nvSpPr>
-        <p:spPr>
-          <a:xfrm>
-            <a:off x="682831" y="497702"/>
-            <a:ext cx="10826338" cy="5862596"/>
-          </a:xfrm>
-        </p:spPr>
-        <p:txBody>
-          <a:bodyPr>
-            <a:noAutofit/>
-          </a:bodyPr>
-          <a:lstStyle/>
-          <a:p>
-            <a:endParaRPr lang="en-US" sz="4400" dirty="0">
-              <a:solidFill>
-                <a:schemeClr val="bg1"/>
-              </a:solidFill>
-              <a:latin typeface="Avenir Medium" panose="02000503020000020003" pitchFamily="2" charset="0"/>
-              <a:ea typeface="Bodoni Ornaments" pitchFamily="2" charset="0"/>
-            </a:endParaRPr>
-          </a:p>
-          <a:p>
-            <a:endParaRPr lang="en-US" sz="4400" dirty="0">
-              <a:solidFill>
-                <a:schemeClr val="bg1"/>
-              </a:solidFill>
-              <a:latin typeface="Avenir Medium" panose="02000503020000020003" pitchFamily="2" charset="0"/>
-              <a:ea typeface="Bodoni Ornaments" pitchFamily="2" charset="0"/>
-            </a:endParaRPr>
-          </a:p>
-          <a:p>
-            <a:r>
-              <a:rPr lang="en-US" sz="4400" dirty="0">
-                <a:solidFill>
-                  <a:schemeClr val="bg1"/>
-                </a:solidFill>
-                <a:latin typeface="Avenir Medium" panose="02000503020000020003" pitchFamily="2" charset="0"/>
-                <a:ea typeface="Bodoni Ornaments" pitchFamily="2" charset="0"/>
-              </a:rPr>
-              <a:t>So I’ll cherish the old rugged cross</a:t>
-            </a:r>
-          </a:p>
-          <a:p>
-            <a:endParaRPr lang="en-US" sz="4400" dirty="0">
-              <a:solidFill>
-                <a:schemeClr val="bg1"/>
-              </a:solidFill>
-              <a:latin typeface="Avenir Medium" panose="02000503020000020003" pitchFamily="2" charset="0"/>
-              <a:ea typeface="Bodoni Ornaments" pitchFamily="2" charset="0"/>
-            </a:endParaRPr>
-          </a:p>
-          <a:p>
-            <a:r>
-              <a:rPr lang="en-US" sz="4400" dirty="0">
-                <a:solidFill>
-                  <a:schemeClr val="bg1"/>
-                </a:solidFill>
-                <a:latin typeface="Avenir Medium" panose="02000503020000020003" pitchFamily="2" charset="0"/>
-                <a:ea typeface="Bodoni Ornaments" pitchFamily="2" charset="0"/>
-              </a:rPr>
-              <a:t>Till my trophies at last I lay down</a:t>
-            </a:r>
-          </a:p>
-          <a:p>
-            <a:endParaRPr lang="en-US" sz="4400" dirty="0">
-              <a:solidFill>
-                <a:schemeClr val="bg1"/>
-              </a:solidFill>
-              <a:latin typeface="Avenir Medium" panose="02000503020000020003" pitchFamily="2" charset="0"/>
-              <a:ea typeface="Bodoni Ornaments" pitchFamily="2" charset="0"/>
-            </a:endParaRPr>
-          </a:p>
-        </p:txBody>
-      </p:sp>
-    </p:spTree>
-    <p:extLst>
-      <p:ext uri="{BB962C8B-B14F-4D97-AF65-F5344CB8AC3E}">
-        <p14:creationId xmlns:p14="http://schemas.microsoft.com/office/powerpoint/2010/main" val="4254184139"/>
-      </p:ext>
-    </p:extLst>
-  </p:cSld>
-  <p:clrMapOvr>
-    <a:masterClrMapping/>
-  </p:clrMapOvr>
-</p:sld>
-</file>
-
-<file path=ppt/slides/slide5.xml><?xml version="1.0" encoding="utf-8"?>
-<p:sld xmlns:a="http://schemas.openxmlformats.org/drawingml/2006/main" xmlns:r="http://schemas.openxmlformats.org/officeDocument/2006/relationships" xmlns:p="http://schemas.openxmlformats.org/presentationml/2006/main">
-  <p:cSld>
-    <p:bg>
-      <p:bgPr>
-        <a:solidFill>
-          <a:schemeClr val="accent5">
-            <a:lumMod val="50000"/>
-          </a:schemeClr>
-        </a:solidFill>
-        <a:effectLst/>
-      </p:bgPr>
-    </p:bg>
-    <p:spTree>
-      <p:nvGrpSpPr>
-        <p:cNvPr id="1" name="">
-          <a:extLst>
-            <a:ext uri="{FF2B5EF4-FFF2-40B4-BE49-F238E27FC236}">
-              <a16:creationId xmlns:a16="http://schemas.microsoft.com/office/drawing/2014/main" id="{0D0DFF7F-A7AF-B016-173E-8639CE351D21}"/>
-            </a:ext>
-          </a:extLst>
-        </p:cNvPr>
-        <p:cNvGrpSpPr/>
-        <p:nvPr/>
-      </p:nvGrpSpPr>
-      <p:grpSpPr>
-        <a:xfrm>
-          <a:off x="0" y="0"/>
-          <a:ext cx="0" cy="0"/>
-          <a:chOff x="0" y="0"/>
-          <a:chExt cx="0" cy="0"/>
-        </a:xfrm>
-      </p:grpSpPr>
-      <p:sp>
-        <p:nvSpPr>
-          <p:cNvPr id="3" name="Subtitle 2">
-            <a:extLst>
-              <a:ext uri="{FF2B5EF4-FFF2-40B4-BE49-F238E27FC236}">
-                <a16:creationId xmlns:a16="http://schemas.microsoft.com/office/drawing/2014/main" id="{1AAADC52-6434-6795-A457-57E97496E04D}"/>
-              </a:ext>
-            </a:extLst>
-          </p:cNvPr>
-          <p:cNvSpPr>
-            <a:spLocks noGrp="1"/>
-          </p:cNvSpPr>
-          <p:nvPr>
-            <p:ph type="subTitle" idx="1"/>
-          </p:nvPr>
-        </p:nvSpPr>
-        <p:spPr>
-          <a:xfrm>
-            <a:off x="682831" y="497702"/>
-            <a:ext cx="10826338" cy="5862596"/>
-          </a:xfrm>
-        </p:spPr>
-        <p:txBody>
-          <a:bodyPr>
-            <a:noAutofit/>
-          </a:bodyPr>
-          <a:lstStyle/>
-          <a:p>
-            <a:endParaRPr lang="en-US" sz="4400" dirty="0">
-              <a:solidFill>
-                <a:schemeClr val="bg1"/>
-              </a:solidFill>
-              <a:latin typeface="Avenir Medium" panose="02000503020000020003" pitchFamily="2" charset="0"/>
-              <a:ea typeface="Bodoni Ornaments" pitchFamily="2" charset="0"/>
-            </a:endParaRPr>
-          </a:p>
-          <a:p>
-            <a:endParaRPr lang="en-US" sz="4400" dirty="0">
-              <a:solidFill>
-                <a:schemeClr val="bg1"/>
-              </a:solidFill>
-              <a:latin typeface="Avenir Medium" panose="02000503020000020003" pitchFamily="2" charset="0"/>
-              <a:ea typeface="Bodoni Ornaments" pitchFamily="2" charset="0"/>
-            </a:endParaRPr>
-          </a:p>
-          <a:p>
-            <a:r>
-              <a:rPr lang="en-US" sz="4400" dirty="0">
-                <a:solidFill>
-                  <a:schemeClr val="bg1"/>
-                </a:solidFill>
-                <a:latin typeface="Avenir Medium" panose="02000503020000020003" pitchFamily="2" charset="0"/>
-                <a:ea typeface="Bodoni Ornaments" pitchFamily="2" charset="0"/>
-              </a:rPr>
-              <a:t>I will cling to the old rugged cross</a:t>
-            </a:r>
-          </a:p>
-          <a:p>
-            <a:r>
-              <a:rPr lang="en-US" sz="4400" dirty="0">
-                <a:solidFill>
-                  <a:schemeClr val="bg1"/>
-                </a:solidFill>
-                <a:latin typeface="Avenir Medium" panose="02000503020000020003" pitchFamily="2" charset="0"/>
-                <a:ea typeface="Bodoni Ornaments" pitchFamily="2" charset="0"/>
-              </a:rPr>
-              <a:t>  </a:t>
-            </a:r>
-          </a:p>
-          <a:p>
-            <a:r>
-              <a:rPr lang="en-US" sz="4400" dirty="0">
-                <a:solidFill>
-                  <a:schemeClr val="bg1"/>
-                </a:solidFill>
-                <a:latin typeface="Avenir Medium" panose="02000503020000020003" pitchFamily="2" charset="0"/>
-                <a:ea typeface="Bodoni Ornaments" pitchFamily="2" charset="0"/>
-              </a:rPr>
-              <a:t>And exchange it some day for a crown</a:t>
-            </a:r>
-          </a:p>
-        </p:txBody>
-      </p:sp>
-    </p:spTree>
-    <p:extLst>
-      <p:ext uri="{BB962C8B-B14F-4D97-AF65-F5344CB8AC3E}">
-        <p14:creationId xmlns:p14="http://schemas.microsoft.com/office/powerpoint/2010/main" val="3176881118"/>
-      </p:ext>
-    </p:extLst>
-  </p:cSld>
-  <p:clrMapOvr>
-    <a:masterClrMapping/>
-  </p:clrMapOvr>
-</p:sld>
-</file>
-
-<file path=ppt/slides/slide6.xml><?xml version="1.0" encoding="utf-8"?>
-<p:sld xmlns:a="http://schemas.openxmlformats.org/drawingml/2006/main" xmlns:r="http://schemas.openxmlformats.org/officeDocument/2006/relationships" xmlns:p="http://schemas.openxmlformats.org/presentationml/2006/main">
-  <p:cSld>
-    <p:bg>
-      <p:bgPr>
-        <a:solidFill>
-          <a:schemeClr val="accent1"/>
-        </a:solidFill>
-        <a:effectLst/>
-      </p:bgPr>
-    </p:bg>
-    <p:spTree>
-      <p:nvGrpSpPr>
-        <p:cNvPr id="1" name="">
-          <a:extLst>
-            <a:ext uri="{FF2B5EF4-FFF2-40B4-BE49-F238E27FC236}">
-              <a16:creationId xmlns:a16="http://schemas.microsoft.com/office/drawing/2014/main" id="{02737DA7-8C8E-FBA7-4464-713026D604AB}"/>
-            </a:ext>
-          </a:extLst>
-        </p:cNvPr>
-        <p:cNvGrpSpPr/>
-        <p:nvPr/>
-      </p:nvGrpSpPr>
-      <p:grpSpPr>
-        <a:xfrm>
-          <a:off x="0" y="0"/>
-          <a:ext cx="0" cy="0"/>
-          <a:chOff x="0" y="0"/>
-          <a:chExt cx="0" cy="0"/>
-        </a:xfrm>
-      </p:grpSpPr>
-      <p:sp>
-        <p:nvSpPr>
-          <p:cNvPr id="3" name="Subtitle 2">
-            <a:extLst>
-              <a:ext uri="{FF2B5EF4-FFF2-40B4-BE49-F238E27FC236}">
-                <a16:creationId xmlns:a16="http://schemas.microsoft.com/office/drawing/2014/main" id="{4DA09BC1-4614-96C7-F99B-7D39C6033838}"/>
-              </a:ext>
-            </a:extLst>
-          </p:cNvPr>
-          <p:cNvSpPr>
-            <a:spLocks noGrp="1"/>
-          </p:cNvSpPr>
-          <p:nvPr>
-            <p:ph type="subTitle" idx="1"/>
-          </p:nvPr>
-        </p:nvSpPr>
-        <p:spPr>
-          <a:xfrm>
-            <a:off x="682831" y="497702"/>
-            <a:ext cx="10826338" cy="5862596"/>
-          </a:xfrm>
-        </p:spPr>
-        <p:txBody>
-          <a:bodyPr>
-            <a:noAutofit/>
-          </a:bodyPr>
-          <a:lstStyle/>
-          <a:p>
-            <a:endParaRPr lang="en-US" sz="4400" dirty="0">
-              <a:solidFill>
-                <a:schemeClr val="bg1"/>
-              </a:solidFill>
-              <a:latin typeface="Avenir Medium" panose="02000503020000020003" pitchFamily="2" charset="0"/>
-              <a:ea typeface="Bodoni Ornaments" pitchFamily="2" charset="0"/>
-            </a:endParaRPr>
-          </a:p>
-          <a:p>
-            <a:endParaRPr lang="en-US" sz="4400" dirty="0">
-              <a:solidFill>
-                <a:schemeClr val="bg1"/>
-              </a:solidFill>
-              <a:latin typeface="Avenir Medium" panose="02000503020000020003" pitchFamily="2" charset="0"/>
-              <a:ea typeface="Bodoni Ornaments" pitchFamily="2" charset="0"/>
-            </a:endParaRPr>
-          </a:p>
-          <a:p>
-            <a:r>
-              <a:rPr lang="en-US" sz="4400" dirty="0">
-                <a:solidFill>
-                  <a:schemeClr val="bg1"/>
-                </a:solidFill>
-                <a:latin typeface="Avenir Medium" panose="02000503020000020003" pitchFamily="2" charset="0"/>
-                <a:ea typeface="Bodoni Ornaments" pitchFamily="2" charset="0"/>
-              </a:rPr>
-              <a:t>Oh, that old rugged cross, </a:t>
-            </a:r>
-          </a:p>
-          <a:p>
-            <a:r>
-              <a:rPr lang="en-US" sz="4400" dirty="0">
-                <a:solidFill>
-                  <a:schemeClr val="bg1"/>
-                </a:solidFill>
-                <a:latin typeface="Avenir Medium" panose="02000503020000020003" pitchFamily="2" charset="0"/>
-                <a:ea typeface="Bodoni Ornaments" pitchFamily="2" charset="0"/>
-              </a:rPr>
-              <a:t>so despised by the world</a:t>
-            </a:r>
-          </a:p>
-          <a:p>
-            <a:r>
-              <a:rPr lang="en-US" sz="4400" dirty="0">
-                <a:solidFill>
-                  <a:schemeClr val="bg1"/>
-                </a:solidFill>
-                <a:latin typeface="Avenir Medium" panose="02000503020000020003" pitchFamily="2" charset="0"/>
-                <a:ea typeface="Bodoni Ornaments" pitchFamily="2" charset="0"/>
-              </a:rPr>
-              <a:t>  Has a wondrous attraction for me</a:t>
-            </a:r>
-          </a:p>
-        </p:txBody>
-      </p:sp>
-    </p:spTree>
-    <p:extLst>
-      <p:ext uri="{BB962C8B-B14F-4D97-AF65-F5344CB8AC3E}">
-        <p14:creationId xmlns:p14="http://schemas.microsoft.com/office/powerpoint/2010/main" val="868937877"/>
-      </p:ext>
-    </p:extLst>
-  </p:cSld>
-  <p:clrMapOvr>
-    <a:masterClrMapping/>
-  </p:clrMapOvr>
-</p:sld>
-</file>
-
-<file path=ppt/slides/slide7.xml><?xml version="1.0" encoding="utf-8"?>
-<p:sld xmlns:a="http://schemas.openxmlformats.org/drawingml/2006/main" xmlns:r="http://schemas.openxmlformats.org/officeDocument/2006/relationships" xmlns:p="http://schemas.openxmlformats.org/presentationml/2006/main">
-  <p:cSld>
-    <p:bg>
-      <p:bgPr>
-        <a:solidFill>
-          <a:schemeClr val="accent1"/>
-        </a:solidFill>
-        <a:effectLst/>
-      </p:bgPr>
-    </p:bg>
-    <p:spTree>
-      <p:nvGrpSpPr>
-        <p:cNvPr id="1" name="">
-          <a:extLst>
-            <a:ext uri="{FF2B5EF4-FFF2-40B4-BE49-F238E27FC236}">
-              <a16:creationId xmlns:a16="http://schemas.microsoft.com/office/drawing/2014/main" id="{1E69B19D-8C95-EA9E-68E8-5AC7D629CFEE}"/>
-            </a:ext>
-          </a:extLst>
-        </p:cNvPr>
-        <p:cNvGrpSpPr/>
-        <p:nvPr/>
-      </p:nvGrpSpPr>
-      <p:grpSpPr>
-        <a:xfrm>
-          <a:off x="0" y="0"/>
-          <a:ext cx="0" cy="0"/>
-          <a:chOff x="0" y="0"/>
-          <a:chExt cx="0" cy="0"/>
-        </a:xfrm>
-      </p:grpSpPr>
-      <p:sp>
-        <p:nvSpPr>
-          <p:cNvPr id="3" name="Subtitle 2">
-            <a:extLst>
-              <a:ext uri="{FF2B5EF4-FFF2-40B4-BE49-F238E27FC236}">
-                <a16:creationId xmlns:a16="http://schemas.microsoft.com/office/drawing/2014/main" id="{F990EEF6-A5F3-3FA9-CAC7-9AEFF86CEC08}"/>
-              </a:ext>
-            </a:extLst>
-          </p:cNvPr>
-          <p:cNvSpPr>
-            <a:spLocks noGrp="1"/>
-          </p:cNvSpPr>
-          <p:nvPr>
-            <p:ph type="subTitle" idx="1"/>
-          </p:nvPr>
-        </p:nvSpPr>
-        <p:spPr>
-          <a:xfrm>
-            <a:off x="682831" y="497702"/>
-            <a:ext cx="10826338" cy="5862596"/>
-          </a:xfrm>
-        </p:spPr>
-        <p:txBody>
-          <a:bodyPr>
-            <a:noAutofit/>
-          </a:bodyPr>
-          <a:lstStyle/>
-          <a:p>
-            <a:endParaRPr lang="en-US" sz="4400" dirty="0">
-              <a:solidFill>
-                <a:schemeClr val="bg1"/>
-              </a:solidFill>
-              <a:latin typeface="Avenir Medium" panose="02000503020000020003" pitchFamily="2" charset="0"/>
-              <a:ea typeface="Bodoni Ornaments" pitchFamily="2" charset="0"/>
-            </a:endParaRPr>
-          </a:p>
-          <a:p>
-            <a:endParaRPr lang="en-US" sz="4400" dirty="0">
-              <a:solidFill>
-                <a:schemeClr val="bg1"/>
-              </a:solidFill>
-              <a:latin typeface="Avenir Medium" panose="02000503020000020003" pitchFamily="2" charset="0"/>
-              <a:ea typeface="Bodoni Ornaments" pitchFamily="2" charset="0"/>
-            </a:endParaRPr>
-          </a:p>
-          <a:p>
-            <a:r>
-              <a:rPr lang="en-US" sz="4400" dirty="0">
-                <a:solidFill>
-                  <a:schemeClr val="bg1"/>
-                </a:solidFill>
-                <a:latin typeface="Avenir Medium" panose="02000503020000020003" pitchFamily="2" charset="0"/>
-                <a:ea typeface="Bodoni Ornaments" pitchFamily="2" charset="0"/>
-              </a:rPr>
-              <a:t>For the dear Lamb of God </a:t>
-            </a:r>
-          </a:p>
-          <a:p>
-            <a:r>
-              <a:rPr lang="en-US" sz="4400" dirty="0">
-                <a:solidFill>
-                  <a:schemeClr val="bg1"/>
-                </a:solidFill>
-                <a:latin typeface="Avenir Medium" panose="02000503020000020003" pitchFamily="2" charset="0"/>
-                <a:ea typeface="Bodoni Ornaments" pitchFamily="2" charset="0"/>
-              </a:rPr>
-              <a:t>left His glory above</a:t>
-            </a:r>
-          </a:p>
-          <a:p>
-            <a:r>
-              <a:rPr lang="en-US" sz="4400" dirty="0">
-                <a:solidFill>
-                  <a:schemeClr val="bg1"/>
-                </a:solidFill>
-                <a:latin typeface="Avenir Medium" panose="02000503020000020003" pitchFamily="2" charset="0"/>
-                <a:ea typeface="Bodoni Ornaments" pitchFamily="2" charset="0"/>
-              </a:rPr>
-              <a:t>  To bear it to dark Calvary</a:t>
-            </a:r>
-          </a:p>
-        </p:txBody>
-      </p:sp>
-    </p:spTree>
-    <p:extLst>
-      <p:ext uri="{BB962C8B-B14F-4D97-AF65-F5344CB8AC3E}">
-        <p14:creationId xmlns:p14="http://schemas.microsoft.com/office/powerpoint/2010/main" val="3486774362"/>
-      </p:ext>
-    </p:extLst>
-  </p:cSld>
-  <p:clrMapOvr>
-    <a:masterClrMapping/>
-  </p:clrMapOvr>
-</p:sld>
-</file>
-
-<file path=ppt/slides/slide8.xml><?xml version="1.0" encoding="utf-8"?>
-<p:sld xmlns:a="http://schemas.openxmlformats.org/drawingml/2006/main" xmlns:r="http://schemas.openxmlformats.org/officeDocument/2006/relationships" xmlns:p="http://schemas.openxmlformats.org/presentationml/2006/main">
-  <p:cSld>
-    <p:bg>
-      <p:bgPr>
-        <a:solidFill>
-          <a:schemeClr val="accent5">
-            <a:lumMod val="50000"/>
-          </a:schemeClr>
-        </a:solidFill>
-        <a:effectLst/>
-      </p:bgPr>
-    </p:bg>
-    <p:spTree>
-      <p:nvGrpSpPr>
-        <p:cNvPr id="1" name="">
-          <a:extLst>
-            <a:ext uri="{FF2B5EF4-FFF2-40B4-BE49-F238E27FC236}">
-              <a16:creationId xmlns:a16="http://schemas.microsoft.com/office/drawing/2014/main" id="{01CB2027-A9F3-ECA6-D77E-D9EB6DE0DF39}"/>
-            </a:ext>
-          </a:extLst>
-        </p:cNvPr>
-        <p:cNvGrpSpPr/>
-        <p:nvPr/>
-      </p:nvGrpSpPr>
-      <p:grpSpPr>
-        <a:xfrm>
-          <a:off x="0" y="0"/>
-          <a:ext cx="0" cy="0"/>
-          <a:chOff x="0" y="0"/>
-          <a:chExt cx="0" cy="0"/>
-        </a:xfrm>
-      </p:grpSpPr>
-      <p:sp>
-        <p:nvSpPr>
-          <p:cNvPr id="3" name="Subtitle 2">
-            <a:extLst>
-              <a:ext uri="{FF2B5EF4-FFF2-40B4-BE49-F238E27FC236}">
-                <a16:creationId xmlns:a16="http://schemas.microsoft.com/office/drawing/2014/main" id="{E689129F-59E0-D186-9091-B108B345301E}"/>
-              </a:ext>
-            </a:extLst>
-          </p:cNvPr>
-          <p:cNvSpPr>
-            <a:spLocks noGrp="1"/>
-          </p:cNvSpPr>
-          <p:nvPr>
-            <p:ph type="subTitle" idx="1"/>
-          </p:nvPr>
-        </p:nvSpPr>
-        <p:spPr>
-          <a:xfrm>
-            <a:off x="682831" y="497702"/>
-            <a:ext cx="10826338" cy="5862596"/>
-          </a:xfrm>
-        </p:spPr>
-        <p:txBody>
-          <a:bodyPr>
-            <a:noAutofit/>
-          </a:bodyPr>
-          <a:lstStyle/>
-          <a:p>
-            <a:endParaRPr lang="en-US" sz="4400" dirty="0">
-              <a:solidFill>
-                <a:schemeClr val="bg1"/>
-              </a:solidFill>
-              <a:latin typeface="Avenir Medium" panose="02000503020000020003" pitchFamily="2" charset="0"/>
-              <a:ea typeface="Bodoni Ornaments" pitchFamily="2" charset="0"/>
-            </a:endParaRPr>
-          </a:p>
-          <a:p>
-            <a:endParaRPr lang="en-US" sz="4400" dirty="0">
-              <a:solidFill>
-                <a:schemeClr val="bg1"/>
-              </a:solidFill>
-              <a:latin typeface="Avenir Medium" panose="02000503020000020003" pitchFamily="2" charset="0"/>
-              <a:ea typeface="Bodoni Ornaments" pitchFamily="2" charset="0"/>
-            </a:endParaRPr>
-          </a:p>
-          <a:p>
-            <a:r>
-              <a:rPr lang="en-US" sz="4400" dirty="0">
-                <a:solidFill>
-                  <a:schemeClr val="bg1"/>
-                </a:solidFill>
-                <a:latin typeface="Avenir Medium" panose="02000503020000020003" pitchFamily="2" charset="0"/>
-                <a:ea typeface="Bodoni Ornaments" pitchFamily="2" charset="0"/>
-              </a:rPr>
-              <a:t>So I’ll cherish the old rugged cross</a:t>
-            </a:r>
-          </a:p>
-          <a:p>
-            <a:endParaRPr lang="en-US" sz="4400" dirty="0">
-              <a:solidFill>
-                <a:schemeClr val="bg1"/>
-              </a:solidFill>
-              <a:latin typeface="Avenir Medium" panose="02000503020000020003" pitchFamily="2" charset="0"/>
-              <a:ea typeface="Bodoni Ornaments" pitchFamily="2" charset="0"/>
-            </a:endParaRPr>
-          </a:p>
-          <a:p>
-            <a:r>
-              <a:rPr lang="en-US" sz="4400" dirty="0">
-                <a:solidFill>
-                  <a:schemeClr val="bg1"/>
-                </a:solidFill>
-                <a:latin typeface="Avenir Medium" panose="02000503020000020003" pitchFamily="2" charset="0"/>
-                <a:ea typeface="Bodoni Ornaments" pitchFamily="2" charset="0"/>
-              </a:rPr>
-              <a:t>Till my trophies at last I lay down</a:t>
-            </a:r>
-          </a:p>
-          <a:p>
-            <a:endParaRPr lang="en-US" sz="4400" dirty="0">
-              <a:solidFill>
-                <a:schemeClr val="bg1"/>
-              </a:solidFill>
-              <a:latin typeface="Avenir Medium" panose="02000503020000020003" pitchFamily="2" charset="0"/>
-              <a:ea typeface="Bodoni Ornaments" pitchFamily="2" charset="0"/>
-            </a:endParaRPr>
-          </a:p>
-        </p:txBody>
-      </p:sp>
-    </p:spTree>
-    <p:extLst>
-      <p:ext uri="{BB962C8B-B14F-4D97-AF65-F5344CB8AC3E}">
-        <p14:creationId xmlns:p14="http://schemas.microsoft.com/office/powerpoint/2010/main" val="2347016665"/>
-      </p:ext>
-    </p:extLst>
-  </p:cSld>
-  <p:clrMapOvr>
-    <a:masterClrMapping/>
-  </p:clrMapOvr>
-</p:sld>
-</file>
-
-<file path=ppt/slides/slide9.xml><?xml version="1.0" encoding="utf-8"?>
-<p:sld xmlns:a="http://schemas.openxmlformats.org/drawingml/2006/main" xmlns:r="http://schemas.openxmlformats.org/officeDocument/2006/relationships" xmlns:p="http://schemas.openxmlformats.org/presentationml/2006/main">
-  <p:cSld>
-    <p:bg>
-      <p:bgPr>
-        <a:solidFill>
-          <a:schemeClr val="accent5">
-            <a:lumMod val="50000"/>
-          </a:schemeClr>
-        </a:solidFill>
-        <a:effectLst/>
-      </p:bgPr>
-    </p:bg>
-    <p:spTree>
-      <p:nvGrpSpPr>
-        <p:cNvPr id="1" name="">
-          <a:extLst>
-            <a:ext uri="{FF2B5EF4-FFF2-40B4-BE49-F238E27FC236}">
-              <a16:creationId xmlns:a16="http://schemas.microsoft.com/office/drawing/2014/main" id="{33F5F712-6C4A-B27C-24C4-7A986C64EB3E}"/>
-            </a:ext>
-          </a:extLst>
-        </p:cNvPr>
-        <p:cNvGrpSpPr/>
-        <p:nvPr/>
-      </p:nvGrpSpPr>
-      <p:grpSpPr>
-        <a:xfrm>
-          <a:off x="0" y="0"/>
-          <a:ext cx="0" cy="0"/>
-          <a:chOff x="0" y="0"/>
-          <a:chExt cx="0" cy="0"/>
-        </a:xfrm>
-      </p:grpSpPr>
-      <p:sp>
-        <p:nvSpPr>
-          <p:cNvPr id="3" name="Subtitle 2">
-            <a:extLst>
-              <a:ext uri="{FF2B5EF4-FFF2-40B4-BE49-F238E27FC236}">
-                <a16:creationId xmlns:a16="http://schemas.microsoft.com/office/drawing/2014/main" id="{23D4777C-F0DB-B32E-5DA8-88495BCCDA8A}"/>
-              </a:ext>
-            </a:extLst>
-          </p:cNvPr>
-          <p:cNvSpPr>
-            <a:spLocks noGrp="1"/>
-          </p:cNvSpPr>
-          <p:nvPr>
-            <p:ph type="subTitle" idx="1"/>
-          </p:nvPr>
-        </p:nvSpPr>
-        <p:spPr>
-          <a:xfrm>
-            <a:off x="682831" y="497702"/>
-            <a:ext cx="10826338" cy="5862596"/>
-          </a:xfrm>
-        </p:spPr>
-        <p:txBody>
-          <a:bodyPr>
-            <a:noAutofit/>
-          </a:bodyPr>
-          <a:lstStyle/>
-          <a:p>
-            <a:endParaRPr lang="en-US" sz="4400" dirty="0">
-              <a:solidFill>
-                <a:schemeClr val="bg1"/>
-              </a:solidFill>
-              <a:latin typeface="Avenir Medium" panose="02000503020000020003" pitchFamily="2" charset="0"/>
-              <a:ea typeface="Bodoni Ornaments" pitchFamily="2" charset="0"/>
-            </a:endParaRPr>
-          </a:p>
-          <a:p>
-            <a:endParaRPr lang="en-US" sz="4400" dirty="0">
-              <a:solidFill>
-                <a:schemeClr val="bg1"/>
-              </a:solidFill>
-              <a:latin typeface="Avenir Medium" panose="02000503020000020003" pitchFamily="2" charset="0"/>
-              <a:ea typeface="Bodoni Ornaments" pitchFamily="2" charset="0"/>
-            </a:endParaRPr>
-          </a:p>
-          <a:p>
-            <a:r>
-              <a:rPr lang="en-US" sz="4400" dirty="0">
-                <a:solidFill>
-                  <a:schemeClr val="bg1"/>
-                </a:solidFill>
-                <a:latin typeface="Avenir Medium" panose="02000503020000020003" pitchFamily="2" charset="0"/>
-                <a:ea typeface="Bodoni Ornaments" pitchFamily="2" charset="0"/>
-              </a:rPr>
-              <a:t>I will cling to the old rugged cross</a:t>
-            </a:r>
-          </a:p>
-          <a:p>
-            <a:r>
-              <a:rPr lang="en-US" sz="4400" dirty="0">
-                <a:solidFill>
-                  <a:schemeClr val="bg1"/>
-                </a:solidFill>
-                <a:latin typeface="Avenir Medium" panose="02000503020000020003" pitchFamily="2" charset="0"/>
-                <a:ea typeface="Bodoni Ornaments" pitchFamily="2" charset="0"/>
-              </a:rPr>
-              <a:t>  </a:t>
-            </a:r>
-          </a:p>
-          <a:p>
-            <a:r>
-              <a:rPr lang="en-US" sz="4400" dirty="0">
-                <a:solidFill>
-                  <a:schemeClr val="bg1"/>
-                </a:solidFill>
-                <a:latin typeface="Avenir Medium" panose="02000503020000020003" pitchFamily="2" charset="0"/>
-                <a:ea typeface="Bodoni Ornaments" pitchFamily="2" charset="0"/>
-              </a:rPr>
-              <a:t>And exchange it some day for a crown</a:t>
-            </a:r>
-          </a:p>
-        </p:txBody>
-      </p:sp>
-    </p:spTree>
-    <p:extLst>
-      <p:ext uri="{BB962C8B-B14F-4D97-AF65-F5344CB8AC3E}">
-        <p14:creationId xmlns:p14="http://schemas.microsoft.com/office/powerpoint/2010/main" val="857351653"/>
-      </p:ext>
-    </p:extLst>
-  </p:cSld>
-  <p:clrMapOvr>
-    <a:masterClrMapping/>
-  </p:clrMapOvr>
-</p:sld>
-</file>
-
 <file path=ppt/theme/theme1.xml><?xml version="1.0" encoding="utf-8"?>
 <a:theme xmlns:a="http://schemas.openxmlformats.org/drawingml/2006/main" name="Office Theme">
   <a:themeElements>
-    <a:clrScheme name="Office">
+    <a:clrScheme name="Office Theme">
       <a:dk1>
         <a:sysClr val="windowText" lastClr="000000"/>
       </a:dk1>
@@ -5459,7 +4415,7 @@
         <a:srgbClr val="96607D"/>
       </a:folHlink>
     </a:clrScheme>
-    <a:fontScheme name="Office">
+    <a:fontScheme name="Office Theme">
       <a:majorFont>
         <a:latin typeface="Aptos Display" panose="02110004020202020204"/>
         <a:ea typeface=""/>
@@ -5565,7 +4521,7 @@
         <a:font script="Tfng" typeface="Ebrima"/>
       </a:minorFont>
     </a:fontScheme>
-    <a:fmtScheme name="Office">
+    <a:fmtScheme name="Office Theme">
       <a:fillStyleLst>
         <a:solidFill>
           <a:schemeClr val="phClr"/>

--- a/Old Rugged Cross.pptx
+++ b/Old Rugged Cross.pptx
@@ -252,7 +252,7 @@
           <a:p>
             <a:fld id="{E759A0DE-F190-5444-87AC-4719D5F20D15}" type="datetimeFigureOut">
               <a:rPr lang="en-US" smtClean="0"/>
-              <a:t>6/13/26</a:t>
+              <a:t>8/22/26</a:t>
             </a:fld>
             <a:endParaRPr lang="en-US"/>
           </a:p>
@@ -422,7 +422,7 @@
           <a:p>
             <a:fld id="{E759A0DE-F190-5444-87AC-4719D5F20D15}" type="datetimeFigureOut">
               <a:rPr lang="en-US" smtClean="0"/>
-              <a:t>6/13/26</a:t>
+              <a:t>8/22/26</a:t>
             </a:fld>
             <a:endParaRPr lang="en-US"/>
           </a:p>
@@ -602,7 +602,7 @@
           <a:p>
             <a:fld id="{E759A0DE-F190-5444-87AC-4719D5F20D15}" type="datetimeFigureOut">
               <a:rPr lang="en-US" smtClean="0"/>
-              <a:t>6/13/26</a:t>
+              <a:t>8/22/26</a:t>
             </a:fld>
             <a:endParaRPr lang="en-US"/>
           </a:p>
@@ -772,7 +772,7 @@
           <a:p>
             <a:fld id="{E759A0DE-F190-5444-87AC-4719D5F20D15}" type="datetimeFigureOut">
               <a:rPr lang="en-US" smtClean="0"/>
-              <a:t>6/13/26</a:t>
+              <a:t>8/22/26</a:t>
             </a:fld>
             <a:endParaRPr lang="en-US"/>
           </a:p>
@@ -1018,7 +1018,7 @@
           <a:p>
             <a:fld id="{E759A0DE-F190-5444-87AC-4719D5F20D15}" type="datetimeFigureOut">
               <a:rPr lang="en-US" smtClean="0"/>
-              <a:t>6/13/26</a:t>
+              <a:t>8/22/26</a:t>
             </a:fld>
             <a:endParaRPr lang="en-US"/>
           </a:p>
@@ -1250,7 +1250,7 @@
           <a:p>
             <a:fld id="{E759A0DE-F190-5444-87AC-4719D5F20D15}" type="datetimeFigureOut">
               <a:rPr lang="en-US" smtClean="0"/>
-              <a:t>6/13/26</a:t>
+              <a:t>8/22/26</a:t>
             </a:fld>
             <a:endParaRPr lang="en-US"/>
           </a:p>
@@ -1617,7 +1617,7 @@
           <a:p>
             <a:fld id="{E759A0DE-F190-5444-87AC-4719D5F20D15}" type="datetimeFigureOut">
               <a:rPr lang="en-US" smtClean="0"/>
-              <a:t>6/13/26</a:t>
+              <a:t>8/22/26</a:t>
             </a:fld>
             <a:endParaRPr lang="en-US"/>
           </a:p>
@@ -1735,7 +1735,7 @@
           <a:p>
             <a:fld id="{E759A0DE-F190-5444-87AC-4719D5F20D15}" type="datetimeFigureOut">
               <a:rPr lang="en-US" smtClean="0"/>
-              <a:t>6/13/26</a:t>
+              <a:t>8/22/26</a:t>
             </a:fld>
             <a:endParaRPr lang="en-US"/>
           </a:p>
@@ -1830,7 +1830,7 @@
           <a:p>
             <a:fld id="{E759A0DE-F190-5444-87AC-4719D5F20D15}" type="datetimeFigureOut">
               <a:rPr lang="en-US" smtClean="0"/>
-              <a:t>6/13/26</a:t>
+              <a:t>8/22/26</a:t>
             </a:fld>
             <a:endParaRPr lang="en-US"/>
           </a:p>
@@ -2107,7 +2107,7 @@
           <a:p>
             <a:fld id="{E759A0DE-F190-5444-87AC-4719D5F20D15}" type="datetimeFigureOut">
               <a:rPr lang="en-US" smtClean="0"/>
-              <a:t>6/13/26</a:t>
+              <a:t>8/22/26</a:t>
             </a:fld>
             <a:endParaRPr lang="en-US"/>
           </a:p>
@@ -2364,7 +2364,7 @@
           <a:p>
             <a:fld id="{E759A0DE-F190-5444-87AC-4719D5F20D15}" type="datetimeFigureOut">
               <a:rPr lang="en-US" smtClean="0"/>
-              <a:t>6/13/26</a:t>
+              <a:t>8/22/26</a:t>
             </a:fld>
             <a:endParaRPr lang="en-US"/>
           </a:p>
@@ -2577,7 +2577,7 @@
           <a:p>
             <a:fld id="{E759A0DE-F190-5444-87AC-4719D5F20D15}" type="datetimeFigureOut">
               <a:rPr lang="en-US" smtClean="0"/>
-              <a:t>6/13/26</a:t>
+              <a:t>8/22/26</a:t>
             </a:fld>
             <a:endParaRPr lang="en-US"/>
           </a:p>
@@ -3048,6 +3048,68 @@
           </a:p>
         </p:txBody>
       </p:sp>
+      <p:sp>
+        <p:nvSpPr>
+          <p:cNvPr id="2" name="TextBox 1">
+            <a:extLst>
+              <a:ext uri="{FF2B5EF4-FFF2-40B4-BE49-F238E27FC236}">
+                <a16:creationId xmlns:a16="http://schemas.microsoft.com/office/drawing/2014/main" id="{ECE07660-9797-12AA-A945-10B568B5FAC5}"/>
+              </a:ext>
+            </a:extLst>
+          </p:cNvPr>
+          <p:cNvSpPr txBox="1"/>
+          <p:nvPr/>
+        </p:nvSpPr>
+        <p:spPr>
+          <a:xfrm>
+            <a:off x="168442" y="5444311"/>
+            <a:ext cx="8807115" cy="923330"/>
+          </a:xfrm>
+          <a:prstGeom prst="rect">
+            <a:avLst/>
+          </a:prstGeom>
+          <a:noFill/>
+        </p:spPr>
+        <p:txBody>
+          <a:bodyPr wrap="square" rtlCol="0">
+            <a:spAutoFit/>
+          </a:bodyPr>
+          <a:lstStyle/>
+          <a:p>
+            <a:pPr algn="ctr"/>
+            <a:r>
+              <a:rPr lang="en-US" dirty="0">
+                <a:solidFill>
+                  <a:schemeClr val="bg1"/>
+                </a:solidFill>
+              </a:rPr>
+              <a:t>Words &amp; Music by George Bennard (1913)</a:t>
+            </a:r>
+          </a:p>
+          <a:p>
+            <a:pPr algn="ctr"/>
+            <a:r>
+              <a:rPr lang="en-US" dirty="0">
+                <a:solidFill>
+                  <a:schemeClr val="bg1"/>
+                </a:solidFill>
+              </a:rPr>
+              <a:t>Public Domain</a:t>
+            </a:r>
+          </a:p>
+          <a:p>
+            <a:pPr algn="ctr"/>
+            <a:r>
+              <a:rPr lang="en-US" dirty="0">
+                <a:solidFill>
+                  <a:schemeClr val="bg1"/>
+                </a:solidFill>
+              </a:rPr>
+              <a:t>CCLI License #137776</a:t>
+            </a:r>
+          </a:p>
+        </p:txBody>
+      </p:sp>
     </p:spTree>
     <p:extLst>
       <p:ext uri="{BB962C8B-B14F-4D97-AF65-F5344CB8AC3E}">
@@ -3205,45 +3267,6 @@
               <a:latin typeface="Avenir Medium" panose="02000503020000020003" pitchFamily="2" charset="0"/>
               <a:ea typeface="Bodoni Ornaments" pitchFamily="2" charset="0"/>
             </a:endParaRPr>
-          </a:p>
-        </p:txBody>
-      </p:sp>
-      <p:sp>
-        <p:nvSpPr>
-          <p:cNvPr id="2" name="TextBox 1">
-            <a:extLst>
-              <a:ext uri="{FF2B5EF4-FFF2-40B4-BE49-F238E27FC236}">
-                <a16:creationId xmlns:a16="http://schemas.microsoft.com/office/drawing/2014/main" id="{D4985A6C-F037-99B0-7792-98CF169CF99C}"/>
-              </a:ext>
-            </a:extLst>
-          </p:cNvPr>
-          <p:cNvSpPr txBox="1"/>
-          <p:nvPr/>
-        </p:nvSpPr>
-        <p:spPr>
-          <a:xfrm>
-            <a:off x="7390614" y="6488668"/>
-            <a:ext cx="1753386" cy="369332"/>
-          </a:xfrm>
-          <a:prstGeom prst="rect">
-            <a:avLst/>
-          </a:prstGeom>
-          <a:noFill/>
-        </p:spPr>
-        <p:txBody>
-          <a:bodyPr wrap="square" rtlCol="0">
-            <a:spAutoFit/>
-          </a:bodyPr>
-          <a:lstStyle/>
-          <a:p>
-            <a:r>
-              <a:rPr lang="en-US" dirty="0">
-                <a:solidFill>
-                  <a:schemeClr val="bg1"/>
-                </a:solidFill>
-              </a:rPr>
-              <a:t>CCLI#7102397</a:t>
-            </a:r>
           </a:p>
         </p:txBody>
       </p:sp>
